--- a/docs/wirefit-intro.pptx
+++ b/docs/wirefit-intro.pptx
@@ -15,9 +15,10 @@
     <p:sldId id="263" r:id="rId9"/>
     <p:sldId id="264" r:id="rId10"/>
     <p:sldId id="265" r:id="rId11"/>
+    <p:sldId id="266" r:id="rId12"/>
   </p:sldIdLst>
   <p:notesMasterIdLst>
-    <p:notesMasterId r:id="rId12"/>
+    <p:notesMasterId r:id="rId13"/>
   </p:notesMasterIdLst>
   <p:sldSz cx="9144000" cy="5143500"/>
   <p:notesSz cx="5143500" cy="9144000"/>
@@ -623,6 +624,94 @@
             <a:fld id="{F7021451-1387-4CA6-816F-3879F97B5CBC}" type="slidenum">
               <a:rPr lang="en-US"/>
               <a:t>10</a:t>
+            </a:fld>
+            <a:endParaRPr lang="en-US"/>
+          </a:p>
+        </p:txBody>
+      </p:sp>
+    </p:spTree>
+    <p:extLst>
+      <p:ext uri="{BB962C8B-B14F-4D97-AF65-F5344CB8AC3E}">
+        <p14:creationId xmlns:p14="http://schemas.microsoft.com/office/powerpoint/2010/main" val="1024086991"/>
+      </p:ext>
+    </p:extLst>
+  </p:cSld>
+  <p:clrMapOvr>
+    <a:masterClrMapping/>
+  </p:clrMapOvr>
+</p:notes>
+</file>
+
+<file path=ppt/notesSlides/notesSlide11.xml><?xml version="1.0" encoding="utf-8"?>
+<p:notes xmlns:a="http://schemas.openxmlformats.org/drawingml/2006/main" xmlns:r="http://schemas.openxmlformats.org/officeDocument/2006/relationships" xmlns:p="http://schemas.openxmlformats.org/presentationml/2006/main">
+  <p:cSld>
+    <p:spTree>
+      <p:nvGrpSpPr>
+        <p:cNvPr id="1" name=""/>
+        <p:cNvGrpSpPr/>
+        <p:nvPr/>
+      </p:nvGrpSpPr>
+      <p:grpSpPr>
+        <a:xfrm>
+          <a:off x="0" y="0"/>
+          <a:ext cx="0" cy="0"/>
+          <a:chOff x="0" y="0"/>
+          <a:chExt cx="0" cy="0"/>
+        </a:xfrm>
+      </p:grpSpPr>
+      <p:sp>
+        <p:nvSpPr>
+          <p:cNvPr id="2" name="Slide Image Placeholder 1"/>
+          <p:cNvSpPr>
+            <a:spLocks noGrp="1" noRot="1" noChangeAspect="1"/>
+          </p:cNvSpPr>
+          <p:nvPr>
+            <p:ph type="sldImg"/>
+          </p:nvPr>
+        </p:nvSpPr>
+        <p:spPr/>
+      </p:sp>
+      <p:sp>
+        <p:nvSpPr>
+          <p:cNvPr id="3" name="Notes Placeholder 2"/>
+          <p:cNvSpPr>
+            <a:spLocks noGrp="1"/>
+          </p:cNvSpPr>
+          <p:nvPr>
+            <p:ph type="body" idx="1"/>
+          </p:nvPr>
+        </p:nvSpPr>
+        <p:spPr/>
+        <p:txBody>
+          <a:bodyPr/>
+          <a:lstStyle/>
+          <a:p>
+            <a:r>
+              <a:rPr lang="en-US" dirty="0"/>
+              <a:t/>
+            </a:r>
+            <a:endParaRPr lang="en-US" dirty="0"/>
+          </a:p>
+        </p:txBody>
+      </p:sp>
+      <p:sp>
+        <p:nvSpPr>
+          <p:cNvPr id="4" name="Slide Number Placeholder 3"/>
+          <p:cNvSpPr>
+            <a:spLocks noGrp="1"/>
+          </p:cNvSpPr>
+          <p:nvPr>
+            <p:ph type="sldNum" sz="quarter" idx="10"/>
+          </p:nvPr>
+        </p:nvSpPr>
+        <p:spPr/>
+        <p:txBody>
+          <a:bodyPr/>
+          <a:lstStyle/>
+          <a:p>
+            <a:fld id="{F7021451-1387-4CA6-816F-3879F97B5CBC}" type="slidenum">
+              <a:rPr lang="en-US"/>
+              <a:t>11</a:t>
             </a:fld>
             <a:endParaRPr lang="en-US"/>
           </a:p>
@@ -1932,6 +2021,1299 @@
     <p:bg>
       <p:bgPr>
         <a:solidFill>
+          <a:srgbClr val="F4F1EC"/>
+        </a:solidFill>
+      </p:bgPr>
+    </p:bg>
+    <p:spTree>
+      <p:nvGrpSpPr>
+        <p:cNvPr id="1" name=""/>
+        <p:cNvGrpSpPr/>
+        <p:nvPr/>
+      </p:nvGrpSpPr>
+      <p:grpSpPr>
+        <a:xfrm>
+          <a:off x="0" y="0"/>
+          <a:ext cx="0" cy="0"/>
+          <a:chOff x="0" y="0"/>
+          <a:chExt cx="0" cy="0"/>
+        </a:xfrm>
+      </p:grpSpPr>
+      <p:sp>
+        <p:nvSpPr>
+          <p:cNvPr id="2" name="Text 0"/>
+          <p:cNvSpPr/>
+          <p:nvPr/>
+        </p:nvSpPr>
+        <p:spPr>
+          <a:xfrm>
+            <a:off x="457200" y="292608"/>
+            <a:ext cx="8229600" cy="566928"/>
+          </a:xfrm>
+          <a:prstGeom prst="rect">
+            <a:avLst/>
+          </a:prstGeom>
+          <a:noFill/>
+          <a:ln/>
+        </p:spPr>
+        <p:txBody>
+          <a:bodyPr wrap="square" lIns="0" tIns="0" rIns="0" bIns="0" rtlCol="0" anchor="ctr"/>
+          <a:lstStyle/>
+          <a:p>
+            <a:pPr indent="0" marL="0">
+              <a:buNone/>
+            </a:pPr>
+            <a:r>
+              <a:rPr lang="en-US" sz="3000" b="1" dirty="0">
+                <a:solidFill>
+                  <a:srgbClr val="26313B"/>
+                </a:solidFill>
+                <a:latin typeface="Trebuchet MS" pitchFamily="34" charset="0"/>
+                <a:ea typeface="Trebuchet MS" pitchFamily="34" charset="-122"/>
+                <a:cs typeface="Trebuchet MS" pitchFamily="34" charset="-120"/>
+              </a:rPr>
+              <a:t>How it hangs together</a:t>
+            </a:r>
+            <a:endParaRPr lang="en-US" sz="3000" dirty="0"/>
+          </a:p>
+        </p:txBody>
+      </p:sp>
+      <p:sp>
+        <p:nvSpPr>
+          <p:cNvPr id="3" name="Text 1"/>
+          <p:cNvSpPr/>
+          <p:nvPr/>
+        </p:nvSpPr>
+        <p:spPr>
+          <a:xfrm>
+            <a:off x="457200" y="804672"/>
+            <a:ext cx="8229600" cy="310896"/>
+          </a:xfrm>
+          <a:prstGeom prst="rect">
+            <a:avLst/>
+          </a:prstGeom>
+          <a:noFill/>
+          <a:ln/>
+        </p:spPr>
+        <p:txBody>
+          <a:bodyPr wrap="square" lIns="0" tIns="0" rIns="0" bIns="0" rtlCol="0" anchor="ctr"/>
+          <a:lstStyle/>
+          <a:p>
+            <a:pPr indent="0" marL="0">
+              <a:buNone/>
+            </a:pPr>
+            <a:r>
+              <a:rPr lang="en-US" sz="1300" i="1" dirty="0">
+                <a:solidFill>
+                  <a:srgbClr val="76838F"/>
+                </a:solidFill>
+                <a:latin typeface="Calibri" pitchFamily="34" charset="0"/>
+                <a:ea typeface="Calibri" pitchFamily="34" charset="-122"/>
+                <a:cs typeface="Calibri" pitchFamily="34" charset="-120"/>
+              </a:rPr>
+              <a:t>every box is a file or a process you already run</a:t>
+            </a:r>
+            <a:endParaRPr lang="en-US" sz="1300" dirty="0"/>
+          </a:p>
+        </p:txBody>
+      </p:sp>
+      <p:sp>
+        <p:nvSpPr>
+          <p:cNvPr id="4" name="Shape 2"/>
+          <p:cNvSpPr/>
+          <p:nvPr/>
+        </p:nvSpPr>
+        <p:spPr>
+          <a:xfrm>
+            <a:off x="457200" y="1417320"/>
+            <a:ext cx="1481328" cy="1097280"/>
+          </a:xfrm>
+          <a:prstGeom prst="rect">
+            <a:avLst/>
+          </a:prstGeom>
+          <a:solidFill>
+            <a:srgbClr val="FFFFFF"/>
+          </a:solidFill>
+          <a:ln w="9525">
+            <a:solidFill>
+              <a:srgbClr val="E4DFD6"/>
+            </a:solidFill>
+            <a:prstDash val="solid"/>
+          </a:ln>
+          <a:effectLst>
+            <a:outerShdw sx="100000" sy="100000" kx="0" ky="0" algn="bl" rotWithShape="0" blurRad="63500" dist="25400" dir="8100000">
+              <a:srgbClr val="000000">
+                <a:alpha val="12000"/>
+              </a:srgbClr>
+            </a:outerShdw>
+          </a:effectLst>
+        </p:spPr>
+      </p:sp>
+      <p:sp>
+        <p:nvSpPr>
+          <p:cNvPr id="5" name="Text 3"/>
+          <p:cNvSpPr/>
+          <p:nvPr/>
+        </p:nvSpPr>
+        <p:spPr>
+          <a:xfrm>
+            <a:off x="512064" y="1554480"/>
+            <a:ext cx="1371600" cy="502920"/>
+          </a:xfrm>
+          <a:prstGeom prst="rect">
+            <a:avLst/>
+          </a:prstGeom>
+          <a:noFill/>
+          <a:ln/>
+        </p:spPr>
+        <p:txBody>
+          <a:bodyPr wrap="square" lIns="0" tIns="0" rIns="0" bIns="0" rtlCol="0" anchor="ctr"/>
+          <a:lstStyle/>
+          <a:p>
+            <a:pPr algn="ctr" indent="0" marL="0">
+              <a:buNone/>
+            </a:pPr>
+            <a:r>
+              <a:rPr lang="en-US" sz="1150" b="1" dirty="0">
+                <a:solidFill>
+                  <a:srgbClr val="26313B"/>
+                </a:solidFill>
+                <a:latin typeface="Trebuchet MS" pitchFamily="34" charset="0"/>
+                <a:ea typeface="Trebuchet MS" pitchFamily="34" charset="-122"/>
+                <a:cs typeface="Trebuchet MS" pitchFamily="34" charset="-120"/>
+              </a:rPr>
+              <a:t>DTOs &amp; schemas</a:t>
+            </a:r>
+            <a:endParaRPr lang="en-US" sz="1150" dirty="0"/>
+          </a:p>
+        </p:txBody>
+      </p:sp>
+      <p:sp>
+        <p:nvSpPr>
+          <p:cNvPr id="6" name="Text 4"/>
+          <p:cNvSpPr/>
+          <p:nvPr/>
+        </p:nvSpPr>
+        <p:spPr>
+          <a:xfrm>
+            <a:off x="512064" y="2029968"/>
+            <a:ext cx="1371600" cy="411480"/>
+          </a:xfrm>
+          <a:prstGeom prst="rect">
+            <a:avLst/>
+          </a:prstGeom>
+          <a:noFill/>
+          <a:ln/>
+        </p:spPr>
+        <p:txBody>
+          <a:bodyPr wrap="square" lIns="0" tIns="0" rIns="0" bIns="0" rtlCol="0" anchor="ctr"/>
+          <a:lstStyle/>
+          <a:p>
+            <a:pPr algn="ctr" indent="0" marL="0">
+              <a:buNone/>
+            </a:pPr>
+            <a:r>
+              <a:rPr lang="en-US" sz="950" dirty="0">
+                <a:solidFill>
+                  <a:srgbClr val="76838F"/>
+                </a:solidFill>
+                <a:latin typeface="Calibri" pitchFamily="34" charset="0"/>
+                <a:ea typeface="Calibri" pitchFamily="34" charset="-122"/>
+                <a:cs typeface="Calibri" pitchFamily="34" charset="-120"/>
+              </a:rPr>
+              <a:t>your code, untouched</a:t>
+            </a:r>
+            <a:endParaRPr lang="en-US" sz="950" dirty="0"/>
+          </a:p>
+        </p:txBody>
+      </p:sp>
+      <p:sp>
+        <p:nvSpPr>
+          <p:cNvPr id="7" name="Text 5"/>
+          <p:cNvSpPr/>
+          <p:nvPr/>
+        </p:nvSpPr>
+        <p:spPr>
+          <a:xfrm>
+            <a:off x="1920240" y="1828800"/>
+            <a:ext cx="260604" cy="365760"/>
+          </a:xfrm>
+          <a:prstGeom prst="rect">
+            <a:avLst/>
+          </a:prstGeom>
+          <a:noFill/>
+          <a:ln/>
+        </p:spPr>
+        <p:txBody>
+          <a:bodyPr wrap="square" lIns="0" tIns="0" rIns="0" bIns="0" rtlCol="0" anchor="ctr"/>
+          <a:lstStyle/>
+          <a:p>
+            <a:pPr algn="ctr" indent="0" marL="0">
+              <a:buNone/>
+            </a:pPr>
+            <a:r>
+              <a:rPr lang="en-US" sz="1500" dirty="0">
+                <a:solidFill>
+                  <a:srgbClr val="C96F3B"/>
+                </a:solidFill>
+                <a:latin typeface="Calibri" pitchFamily="34" charset="0"/>
+                <a:ea typeface="Calibri" pitchFamily="34" charset="-122"/>
+                <a:cs typeface="Calibri" pitchFamily="34" charset="-120"/>
+              </a:rPr>
+              <a:t>→</a:t>
+            </a:r>
+            <a:endParaRPr lang="en-US" sz="1500" dirty="0"/>
+          </a:p>
+        </p:txBody>
+      </p:sp>
+      <p:sp>
+        <p:nvSpPr>
+          <p:cNvPr id="8" name="Shape 6"/>
+          <p:cNvSpPr/>
+          <p:nvPr/>
+        </p:nvSpPr>
+        <p:spPr>
+          <a:xfrm>
+            <a:off x="2144268" y="1417320"/>
+            <a:ext cx="1481328" cy="1097280"/>
+          </a:xfrm>
+          <a:prstGeom prst="rect">
+            <a:avLst/>
+          </a:prstGeom>
+          <a:solidFill>
+            <a:srgbClr val="FFFFFF"/>
+          </a:solidFill>
+          <a:ln w="9525">
+            <a:solidFill>
+              <a:srgbClr val="E4DFD6"/>
+            </a:solidFill>
+            <a:prstDash val="solid"/>
+          </a:ln>
+          <a:effectLst>
+            <a:outerShdw sx="100000" sy="100000" kx="0" ky="0" algn="bl" rotWithShape="0" blurRad="63500" dist="25400" dir="8100000">
+              <a:srgbClr val="000000">
+                <a:alpha val="12000"/>
+              </a:srgbClr>
+            </a:outerShdw>
+          </a:effectLst>
+        </p:spPr>
+      </p:sp>
+      <p:sp>
+        <p:nvSpPr>
+          <p:cNvPr id="9" name="Text 7"/>
+          <p:cNvSpPr/>
+          <p:nvPr/>
+        </p:nvSpPr>
+        <p:spPr>
+          <a:xfrm>
+            <a:off x="2199132" y="1554480"/>
+            <a:ext cx="1371600" cy="502920"/>
+          </a:xfrm>
+          <a:prstGeom prst="rect">
+            <a:avLst/>
+          </a:prstGeom>
+          <a:noFill/>
+          <a:ln/>
+        </p:spPr>
+        <p:txBody>
+          <a:bodyPr wrap="square" lIns="0" tIns="0" rIns="0" bIns="0" rtlCol="0" anchor="ctr"/>
+          <a:lstStyle/>
+          <a:p>
+            <a:pPr algn="ctr" indent="0" marL="0">
+              <a:buNone/>
+            </a:pPr>
+            <a:r>
+              <a:rPr lang="en-US" sz="1150" b="1" dirty="0">
+                <a:solidFill>
+                  <a:srgbClr val="26313B"/>
+                </a:solidFill>
+                <a:latin typeface="Trebuchet MS" pitchFamily="34" charset="0"/>
+                <a:ea typeface="Trebuchet MS" pitchFamily="34" charset="-122"/>
+                <a:cs typeface="Trebuchet MS" pitchFamily="34" charset="-120"/>
+              </a:rPr>
+              <a:t>extractors</a:t>
+            </a:r>
+            <a:endParaRPr lang="en-US" sz="1150" dirty="0"/>
+          </a:p>
+        </p:txBody>
+      </p:sp>
+      <p:sp>
+        <p:nvSpPr>
+          <p:cNvPr id="10" name="Text 8"/>
+          <p:cNvSpPr/>
+          <p:nvPr/>
+        </p:nvSpPr>
+        <p:spPr>
+          <a:xfrm>
+            <a:off x="2199132" y="2029968"/>
+            <a:ext cx="1371600" cy="411480"/>
+          </a:xfrm>
+          <a:prstGeom prst="rect">
+            <a:avLst/>
+          </a:prstGeom>
+          <a:noFill/>
+          <a:ln/>
+        </p:spPr>
+        <p:txBody>
+          <a:bodyPr wrap="square" lIns="0" tIns="0" rIns="0" bIns="0" rtlCol="0" anchor="ctr"/>
+          <a:lstStyle/>
+          <a:p>
+            <a:pPr algn="ctr" indent="0" marL="0">
+              <a:buNone/>
+            </a:pPr>
+            <a:r>
+              <a:rPr lang="en-US" sz="950" dirty="0">
+                <a:solidFill>
+                  <a:srgbClr val="76838F"/>
+                </a:solidFill>
+                <a:latin typeface="Calibri" pitchFamily="34" charset="0"/>
+                <a:ea typeface="Calibri" pitchFamily="34" charset="-122"/>
+                <a:cs typeface="Calibri" pitchFamily="34" charset="-120"/>
+              </a:rPr>
+              <a:t>per language · protocol v1</a:t>
+            </a:r>
+            <a:endParaRPr lang="en-US" sz="950" dirty="0"/>
+          </a:p>
+        </p:txBody>
+      </p:sp>
+      <p:sp>
+        <p:nvSpPr>
+          <p:cNvPr id="11" name="Text 9"/>
+          <p:cNvSpPr/>
+          <p:nvPr/>
+        </p:nvSpPr>
+        <p:spPr>
+          <a:xfrm>
+            <a:off x="3607308" y="1828800"/>
+            <a:ext cx="260604" cy="365760"/>
+          </a:xfrm>
+          <a:prstGeom prst="rect">
+            <a:avLst/>
+          </a:prstGeom>
+          <a:noFill/>
+          <a:ln/>
+        </p:spPr>
+        <p:txBody>
+          <a:bodyPr wrap="square" lIns="0" tIns="0" rIns="0" bIns="0" rtlCol="0" anchor="ctr"/>
+          <a:lstStyle/>
+          <a:p>
+            <a:pPr algn="ctr" indent="0" marL="0">
+              <a:buNone/>
+            </a:pPr>
+            <a:r>
+              <a:rPr lang="en-US" sz="1500" dirty="0">
+                <a:solidFill>
+                  <a:srgbClr val="C96F3B"/>
+                </a:solidFill>
+                <a:latin typeface="Calibri" pitchFamily="34" charset="0"/>
+                <a:ea typeface="Calibri" pitchFamily="34" charset="-122"/>
+                <a:cs typeface="Calibri" pitchFamily="34" charset="-120"/>
+              </a:rPr>
+              <a:t>→</a:t>
+            </a:r>
+            <a:endParaRPr lang="en-US" sz="1500" dirty="0"/>
+          </a:p>
+        </p:txBody>
+      </p:sp>
+      <p:sp>
+        <p:nvSpPr>
+          <p:cNvPr id="12" name="Shape 10"/>
+          <p:cNvSpPr/>
+          <p:nvPr/>
+        </p:nvSpPr>
+        <p:spPr>
+          <a:xfrm>
+            <a:off x="3831336" y="1417320"/>
+            <a:ext cx="1481328" cy="1097280"/>
+          </a:xfrm>
+          <a:prstGeom prst="rect">
+            <a:avLst/>
+          </a:prstGeom>
+          <a:solidFill>
+            <a:srgbClr val="FFFFFF"/>
+          </a:solidFill>
+          <a:ln w="9525">
+            <a:solidFill>
+              <a:srgbClr val="E4DFD6"/>
+            </a:solidFill>
+            <a:prstDash val="solid"/>
+          </a:ln>
+          <a:effectLst>
+            <a:outerShdw sx="100000" sy="100000" kx="0" ky="0" algn="bl" rotWithShape="0" blurRad="63500" dist="25400" dir="8100000">
+              <a:srgbClr val="000000">
+                <a:alpha val="12000"/>
+              </a:srgbClr>
+            </a:outerShdw>
+          </a:effectLst>
+        </p:spPr>
+      </p:sp>
+      <p:sp>
+        <p:nvSpPr>
+          <p:cNvPr id="13" name="Text 11"/>
+          <p:cNvSpPr/>
+          <p:nvPr/>
+        </p:nvSpPr>
+        <p:spPr>
+          <a:xfrm>
+            <a:off x="3886200" y="1554480"/>
+            <a:ext cx="1371600" cy="502920"/>
+          </a:xfrm>
+          <a:prstGeom prst="rect">
+            <a:avLst/>
+          </a:prstGeom>
+          <a:noFill/>
+          <a:ln/>
+        </p:spPr>
+        <p:txBody>
+          <a:bodyPr wrap="square" lIns="0" tIns="0" rIns="0" bIns="0" rtlCol="0" anchor="ctr"/>
+          <a:lstStyle/>
+          <a:p>
+            <a:pPr algn="ctr" indent="0" marL="0">
+              <a:buNone/>
+            </a:pPr>
+            <a:r>
+              <a:rPr lang="en-US" sz="1150" b="1" dirty="0">
+                <a:solidFill>
+                  <a:srgbClr val="26313B"/>
+                </a:solidFill>
+                <a:latin typeface="Trebuchet MS" pitchFamily="34" charset="0"/>
+                <a:ea typeface="Trebuchet MS" pitchFamily="34" charset="-122"/>
+                <a:cs typeface="Trebuchet MS" pitchFamily="34" charset="-120"/>
+              </a:rPr>
+              <a:t>canonical IR</a:t>
+            </a:r>
+            <a:endParaRPr lang="en-US" sz="1150" dirty="0"/>
+          </a:p>
+        </p:txBody>
+      </p:sp>
+      <p:sp>
+        <p:nvSpPr>
+          <p:cNvPr id="14" name="Text 12"/>
+          <p:cNvSpPr/>
+          <p:nvPr/>
+        </p:nvSpPr>
+        <p:spPr>
+          <a:xfrm>
+            <a:off x="3886200" y="2029968"/>
+            <a:ext cx="1371600" cy="411480"/>
+          </a:xfrm>
+          <a:prstGeom prst="rect">
+            <a:avLst/>
+          </a:prstGeom>
+          <a:noFill/>
+          <a:ln/>
+        </p:spPr>
+        <p:txBody>
+          <a:bodyPr wrap="square" lIns="0" tIns="0" rIns="0" bIns="0" rtlCol="0" anchor="ctr"/>
+          <a:lstStyle/>
+          <a:p>
+            <a:pPr algn="ctr" indent="0" marL="0">
+              <a:buNone/>
+            </a:pPr>
+            <a:r>
+              <a:rPr lang="en-US" sz="950" dirty="0">
+                <a:solidFill>
+                  <a:srgbClr val="76838F"/>
+                </a:solidFill>
+                <a:latin typeface="Calibri" pitchFamily="34" charset="0"/>
+                <a:ea typeface="Calibri" pitchFamily="34" charset="-122"/>
+                <a:cs typeface="Calibri" pitchFamily="34" charset="-120"/>
+              </a:rPr>
+              <a:t>hashed · deterministic</a:t>
+            </a:r>
+            <a:endParaRPr lang="en-US" sz="950" dirty="0"/>
+          </a:p>
+        </p:txBody>
+      </p:sp>
+      <p:sp>
+        <p:nvSpPr>
+          <p:cNvPr id="15" name="Text 13"/>
+          <p:cNvSpPr/>
+          <p:nvPr/>
+        </p:nvSpPr>
+        <p:spPr>
+          <a:xfrm>
+            <a:off x="5294376" y="1828800"/>
+            <a:ext cx="260604" cy="365760"/>
+          </a:xfrm>
+          <a:prstGeom prst="rect">
+            <a:avLst/>
+          </a:prstGeom>
+          <a:noFill/>
+          <a:ln/>
+        </p:spPr>
+        <p:txBody>
+          <a:bodyPr wrap="square" lIns="0" tIns="0" rIns="0" bIns="0" rtlCol="0" anchor="ctr"/>
+          <a:lstStyle/>
+          <a:p>
+            <a:pPr algn="ctr" indent="0" marL="0">
+              <a:buNone/>
+            </a:pPr>
+            <a:r>
+              <a:rPr lang="en-US" sz="1500" dirty="0">
+                <a:solidFill>
+                  <a:srgbClr val="C96F3B"/>
+                </a:solidFill>
+                <a:latin typeface="Calibri" pitchFamily="34" charset="0"/>
+                <a:ea typeface="Calibri" pitchFamily="34" charset="-122"/>
+                <a:cs typeface="Calibri" pitchFamily="34" charset="-120"/>
+              </a:rPr>
+              <a:t>→</a:t>
+            </a:r>
+            <a:endParaRPr lang="en-US" sz="1500" dirty="0"/>
+          </a:p>
+        </p:txBody>
+      </p:sp>
+      <p:sp>
+        <p:nvSpPr>
+          <p:cNvPr id="16" name="Shape 14"/>
+          <p:cNvSpPr/>
+          <p:nvPr/>
+        </p:nvSpPr>
+        <p:spPr>
+          <a:xfrm>
+            <a:off x="5518404" y="1417320"/>
+            <a:ext cx="1481328" cy="1097280"/>
+          </a:xfrm>
+          <a:prstGeom prst="rect">
+            <a:avLst/>
+          </a:prstGeom>
+          <a:solidFill>
+            <a:srgbClr val="FFFFFF"/>
+          </a:solidFill>
+          <a:ln w="9525">
+            <a:solidFill>
+              <a:srgbClr val="E4DFD6"/>
+            </a:solidFill>
+            <a:prstDash val="solid"/>
+          </a:ln>
+          <a:effectLst>
+            <a:outerShdw sx="100000" sy="100000" kx="0" ky="0" algn="bl" rotWithShape="0" blurRad="63500" dist="25400" dir="8100000">
+              <a:srgbClr val="000000">
+                <a:alpha val="12000"/>
+              </a:srgbClr>
+            </a:outerShdw>
+          </a:effectLst>
+        </p:spPr>
+      </p:sp>
+      <p:sp>
+        <p:nvSpPr>
+          <p:cNvPr id="17" name="Text 15"/>
+          <p:cNvSpPr/>
+          <p:nvPr/>
+        </p:nvSpPr>
+        <p:spPr>
+          <a:xfrm>
+            <a:off x="5573268" y="1554480"/>
+            <a:ext cx="1371600" cy="502920"/>
+          </a:xfrm>
+          <a:prstGeom prst="rect">
+            <a:avLst/>
+          </a:prstGeom>
+          <a:noFill/>
+          <a:ln/>
+        </p:spPr>
+        <p:txBody>
+          <a:bodyPr wrap="square" lIns="0" tIns="0" rIns="0" bIns="0" rtlCol="0" anchor="ctr"/>
+          <a:lstStyle/>
+          <a:p>
+            <a:pPr algn="ctr" indent="0" marL="0">
+              <a:buNone/>
+            </a:pPr>
+            <a:r>
+              <a:rPr lang="en-US" sz="1150" b="1" dirty="0">
+                <a:solidFill>
+                  <a:srgbClr val="26313B"/>
+                </a:solidFill>
+                <a:latin typeface="Trebuchet MS" pitchFamily="34" charset="0"/>
+                <a:ea typeface="Trebuchet MS" pitchFamily="34" charset="-122"/>
+                <a:cs typeface="Trebuchet MS" pitchFamily="34" charset="-120"/>
+              </a:rPr>
+              <a:t>diff engine</a:t>
+            </a:r>
+            <a:endParaRPr lang="en-US" sz="1150" dirty="0"/>
+          </a:p>
+        </p:txBody>
+      </p:sp>
+      <p:sp>
+        <p:nvSpPr>
+          <p:cNvPr id="18" name="Text 16"/>
+          <p:cNvSpPr/>
+          <p:nvPr/>
+        </p:nvSpPr>
+        <p:spPr>
+          <a:xfrm>
+            <a:off x="5573268" y="2029968"/>
+            <a:ext cx="1371600" cy="411480"/>
+          </a:xfrm>
+          <a:prstGeom prst="rect">
+            <a:avLst/>
+          </a:prstGeom>
+          <a:noFill/>
+          <a:ln/>
+        </p:spPr>
+        <p:txBody>
+          <a:bodyPr wrap="square" lIns="0" tIns="0" rIns="0" bIns="0" rtlCol="0" anchor="ctr"/>
+          <a:lstStyle/>
+          <a:p>
+            <a:pPr algn="ctr" indent="0" marL="0">
+              <a:buNone/>
+            </a:pPr>
+            <a:r>
+              <a:rPr lang="en-US" sz="950" dirty="0">
+                <a:solidFill>
+                  <a:srgbClr val="76838F"/>
+                </a:solidFill>
+                <a:latin typeface="Calibri" pitchFamily="34" charset="0"/>
+                <a:ea typeface="Calibri" pitchFamily="34" charset="-122"/>
+                <a:cs typeface="Calibri" pitchFamily="34" charset="-120"/>
+              </a:rPr>
+              <a:t>direction-aware rules</a:t>
+            </a:r>
+            <a:endParaRPr lang="en-US" sz="950" dirty="0"/>
+          </a:p>
+        </p:txBody>
+      </p:sp>
+      <p:sp>
+        <p:nvSpPr>
+          <p:cNvPr id="19" name="Text 17"/>
+          <p:cNvSpPr/>
+          <p:nvPr/>
+        </p:nvSpPr>
+        <p:spPr>
+          <a:xfrm>
+            <a:off x="6981444" y="1828800"/>
+            <a:ext cx="260604" cy="365760"/>
+          </a:xfrm>
+          <a:prstGeom prst="rect">
+            <a:avLst/>
+          </a:prstGeom>
+          <a:noFill/>
+          <a:ln/>
+        </p:spPr>
+        <p:txBody>
+          <a:bodyPr wrap="square" lIns="0" tIns="0" rIns="0" bIns="0" rtlCol="0" anchor="ctr"/>
+          <a:lstStyle/>
+          <a:p>
+            <a:pPr algn="ctr" indent="0" marL="0">
+              <a:buNone/>
+            </a:pPr>
+            <a:r>
+              <a:rPr lang="en-US" sz="1500" dirty="0">
+                <a:solidFill>
+                  <a:srgbClr val="C96F3B"/>
+                </a:solidFill>
+                <a:latin typeface="Calibri" pitchFamily="34" charset="0"/>
+                <a:ea typeface="Calibri" pitchFamily="34" charset="-122"/>
+                <a:cs typeface="Calibri" pitchFamily="34" charset="-120"/>
+              </a:rPr>
+              <a:t>→</a:t>
+            </a:r>
+            <a:endParaRPr lang="en-US" sz="1500" dirty="0"/>
+          </a:p>
+        </p:txBody>
+      </p:sp>
+      <p:sp>
+        <p:nvSpPr>
+          <p:cNvPr id="20" name="Shape 18"/>
+          <p:cNvSpPr/>
+          <p:nvPr/>
+        </p:nvSpPr>
+        <p:spPr>
+          <a:xfrm>
+            <a:off x="7205472" y="1417320"/>
+            <a:ext cx="1481328" cy="1097280"/>
+          </a:xfrm>
+          <a:prstGeom prst="rect">
+            <a:avLst/>
+          </a:prstGeom>
+          <a:solidFill>
+            <a:srgbClr val="FFFFFF"/>
+          </a:solidFill>
+          <a:ln w="9525">
+            <a:solidFill>
+              <a:srgbClr val="E4DFD6"/>
+            </a:solidFill>
+            <a:prstDash val="solid"/>
+          </a:ln>
+          <a:effectLst>
+            <a:outerShdw sx="100000" sy="100000" kx="0" ky="0" algn="bl" rotWithShape="0" blurRad="63500" dist="25400" dir="8100000">
+              <a:srgbClr val="000000">
+                <a:alpha val="12000"/>
+              </a:srgbClr>
+            </a:outerShdw>
+          </a:effectLst>
+        </p:spPr>
+      </p:sp>
+      <p:sp>
+        <p:nvSpPr>
+          <p:cNvPr id="21" name="Text 19"/>
+          <p:cNvSpPr/>
+          <p:nvPr/>
+        </p:nvSpPr>
+        <p:spPr>
+          <a:xfrm>
+            <a:off x="7260336" y="1554480"/>
+            <a:ext cx="1371600" cy="502920"/>
+          </a:xfrm>
+          <a:prstGeom prst="rect">
+            <a:avLst/>
+          </a:prstGeom>
+          <a:noFill/>
+          <a:ln/>
+        </p:spPr>
+        <p:txBody>
+          <a:bodyPr wrap="square" lIns="0" tIns="0" rIns="0" bIns="0" rtlCol="0" anchor="ctr"/>
+          <a:lstStyle/>
+          <a:p>
+            <a:pPr algn="ctr" indent="0" marL="0">
+              <a:buNone/>
+            </a:pPr>
+            <a:r>
+              <a:rPr lang="en-US" sz="1150" b="1" dirty="0">
+                <a:solidFill>
+                  <a:srgbClr val="26313B"/>
+                </a:solidFill>
+                <a:latin typeface="Trebuchet MS" pitchFamily="34" charset="0"/>
+                <a:ea typeface="Trebuchet MS" pitchFamily="34" charset="-122"/>
+                <a:cs typeface="Trebuchet MS" pitchFamily="34" charset="-120"/>
+              </a:rPr>
+              <a:t>contracts repo</a:t>
+            </a:r>
+            <a:endParaRPr lang="en-US" sz="1150" dirty="0"/>
+          </a:p>
+        </p:txBody>
+      </p:sp>
+      <p:sp>
+        <p:nvSpPr>
+          <p:cNvPr id="22" name="Text 20"/>
+          <p:cNvSpPr/>
+          <p:nvPr/>
+        </p:nvSpPr>
+        <p:spPr>
+          <a:xfrm>
+            <a:off x="7260336" y="2029968"/>
+            <a:ext cx="1371600" cy="411480"/>
+          </a:xfrm>
+          <a:prstGeom prst="rect">
+            <a:avLst/>
+          </a:prstGeom>
+          <a:noFill/>
+          <a:ln/>
+        </p:spPr>
+        <p:txBody>
+          <a:bodyPr wrap="square" lIns="0" tIns="0" rIns="0" bIns="0" rtlCol="0" anchor="ctr"/>
+          <a:lstStyle/>
+          <a:p>
+            <a:pPr algn="ctr" indent="0" marL="0">
+              <a:buNone/>
+            </a:pPr>
+            <a:r>
+              <a:rPr lang="en-US" sz="950" dirty="0">
+                <a:solidFill>
+                  <a:srgbClr val="76838F"/>
+                </a:solidFill>
+                <a:latin typeface="Calibri" pitchFamily="34" charset="0"/>
+                <a:ea typeface="Calibri" pitchFamily="34" charset="-122"/>
+                <a:cs typeface="Calibri" pitchFamily="34" charset="-120"/>
+              </a:rPr>
+              <a:t>plain git — the broker</a:t>
+            </a:r>
+            <a:endParaRPr lang="en-US" sz="950" dirty="0"/>
+          </a:p>
+        </p:txBody>
+      </p:sp>
+      <p:sp>
+        <p:nvSpPr>
+          <p:cNvPr id="23" name="Text 21"/>
+          <p:cNvSpPr/>
+          <p:nvPr/>
+        </p:nvSpPr>
+        <p:spPr>
+          <a:xfrm>
+            <a:off x="457200" y="2788920"/>
+            <a:ext cx="8229600" cy="274320"/>
+          </a:xfrm>
+          <a:prstGeom prst="rect">
+            <a:avLst/>
+          </a:prstGeom>
+          <a:noFill/>
+          <a:ln/>
+        </p:spPr>
+        <p:txBody>
+          <a:bodyPr wrap="square" lIns="0" tIns="0" rIns="0" bIns="0" rtlCol="0" anchor="ctr"/>
+          <a:lstStyle/>
+          <a:p>
+            <a:pPr algn="ctr" indent="0" marL="0">
+              <a:buNone/>
+            </a:pPr>
+            <a:r>
+              <a:rPr lang="en-US" sz="1100" i="1" dirty="0">
+                <a:solidFill>
+                  <a:srgbClr val="76838F"/>
+                </a:solidFill>
+                <a:latin typeface="Calibri" pitchFamily="34" charset="0"/>
+                <a:ea typeface="Calibri" pitchFamily="34" charset="-122"/>
+                <a:cs typeface="Calibri" pitchFamily="34" charset="-120"/>
+              </a:rPr>
+              <a:t>the repo feeds three gates</a:t>
+            </a:r>
+            <a:endParaRPr lang="en-US" sz="1100" dirty="0"/>
+          </a:p>
+        </p:txBody>
+      </p:sp>
+      <p:sp>
+        <p:nvSpPr>
+          <p:cNvPr id="24" name="Shape 22"/>
+          <p:cNvSpPr/>
+          <p:nvPr/>
+        </p:nvSpPr>
+        <p:spPr>
+          <a:xfrm>
+            <a:off x="1783080" y="3108960"/>
+            <a:ext cx="0" cy="228600"/>
+          </a:xfrm>
+          <a:prstGeom prst="line">
+            <a:avLst/>
+          </a:prstGeom>
+          <a:noFill/>
+          <a:ln w="15875">
+            <a:solidFill>
+              <a:srgbClr val="C9C2B5"/>
+            </a:solidFill>
+            <a:prstDash val="solid"/>
+          </a:ln>
+        </p:spPr>
+      </p:sp>
+      <p:sp>
+        <p:nvSpPr>
+          <p:cNvPr id="25" name="Shape 23"/>
+          <p:cNvSpPr/>
+          <p:nvPr/>
+        </p:nvSpPr>
+        <p:spPr>
+          <a:xfrm>
+            <a:off x="457200" y="3337560"/>
+            <a:ext cx="2651760" cy="914400"/>
+          </a:xfrm>
+          <a:prstGeom prst="rect">
+            <a:avLst/>
+          </a:prstGeom>
+          <a:solidFill>
+            <a:srgbClr val="EAE4D9"/>
+          </a:solidFill>
+          <a:ln w="9525">
+            <a:solidFill>
+              <a:srgbClr val="E4DFD6"/>
+            </a:solidFill>
+            <a:prstDash val="solid"/>
+          </a:ln>
+          <a:effectLst>
+            <a:outerShdw sx="100000" sy="100000" kx="0" ky="0" algn="bl" rotWithShape="0" blurRad="63500" dist="25400" dir="8100000">
+              <a:srgbClr val="000000">
+                <a:alpha val="12000"/>
+              </a:srgbClr>
+            </a:outerShdw>
+          </a:effectLst>
+        </p:spPr>
+      </p:sp>
+      <p:sp>
+        <p:nvSpPr>
+          <p:cNvPr id="26" name="Text 24"/>
+          <p:cNvSpPr/>
+          <p:nvPr/>
+        </p:nvSpPr>
+        <p:spPr>
+          <a:xfrm>
+            <a:off x="594360" y="3456432"/>
+            <a:ext cx="2377440" cy="274320"/>
+          </a:xfrm>
+          <a:prstGeom prst="rect">
+            <a:avLst/>
+          </a:prstGeom>
+          <a:noFill/>
+          <a:ln/>
+        </p:spPr>
+        <p:txBody>
+          <a:bodyPr wrap="square" lIns="0" tIns="0" rIns="0" bIns="0" rtlCol="0" anchor="ctr"/>
+          <a:lstStyle/>
+          <a:p>
+            <a:pPr indent="0" marL="0">
+              <a:buNone/>
+            </a:pPr>
+            <a:r>
+              <a:rPr lang="en-US" sz="1250" b="1" dirty="0">
+                <a:solidFill>
+                  <a:srgbClr val="C96F3B"/>
+                </a:solidFill>
+                <a:latin typeface="Trebuchet MS" pitchFamily="34" charset="0"/>
+                <a:ea typeface="Trebuchet MS" pitchFamily="34" charset="-122"/>
+                <a:cs typeface="Trebuchet MS" pitchFamily="34" charset="-120"/>
+              </a:rPr>
+              <a:t>PR / MR comment</a:t>
+            </a:r>
+            <a:endParaRPr lang="en-US" sz="1250" dirty="0"/>
+          </a:p>
+        </p:txBody>
+      </p:sp>
+      <p:sp>
+        <p:nvSpPr>
+          <p:cNvPr id="27" name="Text 25"/>
+          <p:cNvSpPr/>
+          <p:nvPr/>
+        </p:nvSpPr>
+        <p:spPr>
+          <a:xfrm>
+            <a:off x="594360" y="3730752"/>
+            <a:ext cx="2423160" cy="457200"/>
+          </a:xfrm>
+          <a:prstGeom prst="rect">
+            <a:avLst/>
+          </a:prstGeom>
+          <a:noFill/>
+          <a:ln/>
+        </p:spPr>
+        <p:txBody>
+          <a:bodyPr wrap="square" lIns="0" tIns="0" rIns="0" bIns="0" rtlCol="0" anchor="ctr"/>
+          <a:lstStyle/>
+          <a:p>
+            <a:pPr indent="0" marL="0">
+              <a:buNone/>
+            </a:pPr>
+            <a:r>
+              <a:rPr lang="en-US" sz="1050" dirty="0">
+                <a:solidFill>
+                  <a:srgbClr val="26313B"/>
+                </a:solidFill>
+                <a:latin typeface="Calibri" pitchFamily="34" charset="0"/>
+                <a:ea typeface="Calibri" pitchFamily="34" charset="-122"/>
+                <a:cs typeface="Calibri" pitchFamily="34" charset="-120"/>
+              </a:rPr>
+              <a:t>check — blocks breaking merges</a:t>
+            </a:r>
+            <a:endParaRPr lang="en-US" sz="1050" dirty="0"/>
+          </a:p>
+        </p:txBody>
+      </p:sp>
+      <p:sp>
+        <p:nvSpPr>
+          <p:cNvPr id="28" name="Shape 26"/>
+          <p:cNvSpPr/>
+          <p:nvPr/>
+        </p:nvSpPr>
+        <p:spPr>
+          <a:xfrm>
+            <a:off x="4572000" y="3108960"/>
+            <a:ext cx="0" cy="228600"/>
+          </a:xfrm>
+          <a:prstGeom prst="line">
+            <a:avLst/>
+          </a:prstGeom>
+          <a:noFill/>
+          <a:ln w="15875">
+            <a:solidFill>
+              <a:srgbClr val="C9C2B5"/>
+            </a:solidFill>
+            <a:prstDash val="solid"/>
+          </a:ln>
+        </p:spPr>
+      </p:sp>
+      <p:sp>
+        <p:nvSpPr>
+          <p:cNvPr id="29" name="Shape 27"/>
+          <p:cNvSpPr/>
+          <p:nvPr/>
+        </p:nvSpPr>
+        <p:spPr>
+          <a:xfrm>
+            <a:off x="3246120" y="3337560"/>
+            <a:ext cx="2651760" cy="914400"/>
+          </a:xfrm>
+          <a:prstGeom prst="rect">
+            <a:avLst/>
+          </a:prstGeom>
+          <a:solidFill>
+            <a:srgbClr val="EAE4D9"/>
+          </a:solidFill>
+          <a:ln w="9525">
+            <a:solidFill>
+              <a:srgbClr val="E4DFD6"/>
+            </a:solidFill>
+            <a:prstDash val="solid"/>
+          </a:ln>
+          <a:effectLst>
+            <a:outerShdw sx="100000" sy="100000" kx="0" ky="0" algn="bl" rotWithShape="0" blurRad="63500" dist="25400" dir="8100000">
+              <a:srgbClr val="000000">
+                <a:alpha val="12000"/>
+              </a:srgbClr>
+            </a:outerShdw>
+          </a:effectLst>
+        </p:spPr>
+      </p:sp>
+      <p:sp>
+        <p:nvSpPr>
+          <p:cNvPr id="30" name="Text 28"/>
+          <p:cNvSpPr/>
+          <p:nvPr/>
+        </p:nvSpPr>
+        <p:spPr>
+          <a:xfrm>
+            <a:off x="3383280" y="3456432"/>
+            <a:ext cx="2377440" cy="274320"/>
+          </a:xfrm>
+          <a:prstGeom prst="rect">
+            <a:avLst/>
+          </a:prstGeom>
+          <a:noFill/>
+          <a:ln/>
+        </p:spPr>
+        <p:txBody>
+          <a:bodyPr wrap="square" lIns="0" tIns="0" rIns="0" bIns="0" rtlCol="0" anchor="ctr"/>
+          <a:lstStyle/>
+          <a:p>
+            <a:pPr indent="0" marL="0">
+              <a:buNone/>
+            </a:pPr>
+            <a:r>
+              <a:rPr lang="en-US" sz="1250" b="1" dirty="0">
+                <a:solidFill>
+                  <a:srgbClr val="C96F3B"/>
+                </a:solidFill>
+                <a:latin typeface="Trebuchet MS" pitchFamily="34" charset="0"/>
+                <a:ea typeface="Trebuchet MS" pitchFamily="34" charset="-122"/>
+                <a:cs typeface="Trebuchet MS" pitchFamily="34" charset="-120"/>
+              </a:rPr>
+              <a:t>deploy gate</a:t>
+            </a:r>
+            <a:endParaRPr lang="en-US" sz="1250" dirty="0"/>
+          </a:p>
+        </p:txBody>
+      </p:sp>
+      <p:sp>
+        <p:nvSpPr>
+          <p:cNvPr id="31" name="Text 29"/>
+          <p:cNvSpPr/>
+          <p:nvPr/>
+        </p:nvSpPr>
+        <p:spPr>
+          <a:xfrm>
+            <a:off x="3383280" y="3730752"/>
+            <a:ext cx="2423160" cy="457200"/>
+          </a:xfrm>
+          <a:prstGeom prst="rect">
+            <a:avLst/>
+          </a:prstGeom>
+          <a:noFill/>
+          <a:ln/>
+        </p:spPr>
+        <p:txBody>
+          <a:bodyPr wrap="square" lIns="0" tIns="0" rIns="0" bIns="0" rtlCol="0" anchor="ctr"/>
+          <a:lstStyle/>
+          <a:p>
+            <a:pPr indent="0" marL="0">
+              <a:buNone/>
+            </a:pPr>
+            <a:r>
+              <a:rPr lang="en-US" sz="1050" dirty="0">
+                <a:solidFill>
+                  <a:srgbClr val="26313B"/>
+                </a:solidFill>
+                <a:latin typeface="Calibri" pitchFamily="34" charset="0"/>
+                <a:ea typeface="Calibri" pitchFamily="34" charset="-122"/>
+                <a:cs typeface="Calibri" pitchFamily="34" charset="-120"/>
+              </a:rPr>
+              <a:t>can-i-deploy — blocks unsafe rollouts</a:t>
+            </a:r>
+            <a:endParaRPr lang="en-US" sz="1050" dirty="0"/>
+          </a:p>
+        </p:txBody>
+      </p:sp>
+      <p:sp>
+        <p:nvSpPr>
+          <p:cNvPr id="32" name="Shape 30"/>
+          <p:cNvSpPr/>
+          <p:nvPr/>
+        </p:nvSpPr>
+        <p:spPr>
+          <a:xfrm>
+            <a:off x="7360920" y="3108960"/>
+            <a:ext cx="0" cy="228600"/>
+          </a:xfrm>
+          <a:prstGeom prst="line">
+            <a:avLst/>
+          </a:prstGeom>
+          <a:noFill/>
+          <a:ln w="15875">
+            <a:solidFill>
+              <a:srgbClr val="C9C2B5"/>
+            </a:solidFill>
+            <a:prstDash val="solid"/>
+          </a:ln>
+        </p:spPr>
+      </p:sp>
+      <p:sp>
+        <p:nvSpPr>
+          <p:cNvPr id="33" name="Shape 31"/>
+          <p:cNvSpPr/>
+          <p:nvPr/>
+        </p:nvSpPr>
+        <p:spPr>
+          <a:xfrm>
+            <a:off x="6035040" y="3337560"/>
+            <a:ext cx="2651760" cy="914400"/>
+          </a:xfrm>
+          <a:prstGeom prst="rect">
+            <a:avLst/>
+          </a:prstGeom>
+          <a:solidFill>
+            <a:srgbClr val="EAE4D9"/>
+          </a:solidFill>
+          <a:ln w="9525">
+            <a:solidFill>
+              <a:srgbClr val="E4DFD6"/>
+            </a:solidFill>
+            <a:prstDash val="solid"/>
+          </a:ln>
+          <a:effectLst>
+            <a:outerShdw sx="100000" sy="100000" kx="0" ky="0" algn="bl" rotWithShape="0" blurRad="63500" dist="25400" dir="8100000">
+              <a:srgbClr val="000000">
+                <a:alpha val="12000"/>
+              </a:srgbClr>
+            </a:outerShdw>
+          </a:effectLst>
+        </p:spPr>
+      </p:sp>
+      <p:sp>
+        <p:nvSpPr>
+          <p:cNvPr id="34" name="Text 32"/>
+          <p:cNvSpPr/>
+          <p:nvPr/>
+        </p:nvSpPr>
+        <p:spPr>
+          <a:xfrm>
+            <a:off x="6172200" y="3456432"/>
+            <a:ext cx="2377440" cy="274320"/>
+          </a:xfrm>
+          <a:prstGeom prst="rect">
+            <a:avLst/>
+          </a:prstGeom>
+          <a:noFill/>
+          <a:ln/>
+        </p:spPr>
+        <p:txBody>
+          <a:bodyPr wrap="square" lIns="0" tIns="0" rIns="0" bIns="0" rtlCol="0" anchor="ctr"/>
+          <a:lstStyle/>
+          <a:p>
+            <a:pPr indent="0" marL="0">
+              <a:buNone/>
+            </a:pPr>
+            <a:r>
+              <a:rPr lang="en-US" sz="1250" b="1" dirty="0">
+                <a:solidFill>
+                  <a:srgbClr val="C96F3B"/>
+                </a:solidFill>
+                <a:latin typeface="Trebuchet MS" pitchFamily="34" charset="0"/>
+                <a:ea typeface="Trebuchet MS" pitchFamily="34" charset="-122"/>
+                <a:cs typeface="Trebuchet MS" pitchFamily="34" charset="-120"/>
+              </a:rPr>
+              <a:t>matrix</a:t>
+            </a:r>
+            <a:endParaRPr lang="en-US" sz="1250" dirty="0"/>
+          </a:p>
+        </p:txBody>
+      </p:sp>
+      <p:sp>
+        <p:nvSpPr>
+          <p:cNvPr id="35" name="Text 33"/>
+          <p:cNvSpPr/>
+          <p:nvPr/>
+        </p:nvSpPr>
+        <p:spPr>
+          <a:xfrm>
+            <a:off x="6172200" y="3730752"/>
+            <a:ext cx="2423160" cy="457200"/>
+          </a:xfrm>
+          <a:prstGeom prst="rect">
+            <a:avLst/>
+          </a:prstGeom>
+          <a:noFill/>
+          <a:ln/>
+        </p:spPr>
+        <p:txBody>
+          <a:bodyPr wrap="square" lIns="0" tIns="0" rIns="0" bIns="0" rtlCol="0" anchor="ctr"/>
+          <a:lstStyle/>
+          <a:p>
+            <a:pPr indent="0" marL="0">
+              <a:buNone/>
+            </a:pPr>
+            <a:r>
+              <a:rPr lang="en-US" sz="1050" dirty="0">
+                <a:solidFill>
+                  <a:srgbClr val="26313B"/>
+                </a:solidFill>
+                <a:latin typeface="Calibri" pitchFamily="34" charset="0"/>
+                <a:ea typeface="Calibri" pitchFamily="34" charset="-122"/>
+                <a:cs typeface="Calibri" pitchFamily="34" charset="-120"/>
+              </a:rPr>
+              <a:t>org-wide deployed compatibility</a:t>
+            </a:r>
+            <a:endParaRPr lang="en-US" sz="1050" dirty="0"/>
+          </a:p>
+        </p:txBody>
+      </p:sp>
+      <p:sp>
+        <p:nvSpPr>
+          <p:cNvPr id="36" name="Text 34"/>
+          <p:cNvSpPr/>
+          <p:nvPr/>
+        </p:nvSpPr>
+        <p:spPr>
+          <a:xfrm>
+            <a:off x="457200" y="4526280"/>
+            <a:ext cx="8229600" cy="274320"/>
+          </a:xfrm>
+          <a:prstGeom prst="rect">
+            <a:avLst/>
+          </a:prstGeom>
+          <a:noFill/>
+          <a:ln/>
+        </p:spPr>
+        <p:txBody>
+          <a:bodyPr wrap="square" lIns="0" tIns="0" rIns="0" bIns="0" rtlCol="0" anchor="ctr"/>
+          <a:lstStyle/>
+          <a:p>
+            <a:pPr algn="ctr" indent="0" marL="0">
+              <a:buNone/>
+            </a:pPr>
+            <a:r>
+              <a:rPr lang="en-US" sz="1150" i="1" dirty="0">
+                <a:solidFill>
+                  <a:srgbClr val="76838F"/>
+                </a:solidFill>
+                <a:latin typeface="Calibri" pitchFamily="34" charset="0"/>
+                <a:ea typeface="Calibri" pitchFamily="34" charset="-122"/>
+                <a:cs typeface="Calibri" pitchFamily="34" charset="-120"/>
+              </a:rPr>
+              <a:t>Deterministic by contract: identical inputs produce byte-identical IR — on every machine, in every language.</a:t>
+            </a:r>
+            <a:endParaRPr lang="en-US" sz="1150" dirty="0"/>
+          </a:p>
+        </p:txBody>
+      </p:sp>
+    </p:spTree>
+  </p:cSld>
+  <p:clrMapOvr>
+    <a:masterClrMapping/>
+  </p:clrMapOvr>
+</p:sld>
+</file>
+
+<file path=ppt/slides/slide11.xml><?xml version="1.0" encoding="utf-8"?>
+<p:sld xmlns:a="http://schemas.openxmlformats.org/drawingml/2006/main" xmlns:r="http://schemas.openxmlformats.org/officeDocument/2006/relationships" xmlns:p="http://schemas.openxmlformats.org/presentationml/2006/main">
+  <p:cSld name="Slide 11">
+    <p:bg>
+      <p:bgPr>
+        <a:solidFill>
           <a:srgbClr val="1A242E"/>
         </a:solidFill>
       </p:bgPr>
@@ -6409,7 +7791,7 @@
                 <a:ea typeface="Trebuchet MS" pitchFamily="34" charset="-122"/>
                 <a:cs typeface="Trebuchet MS" pitchFamily="34" charset="-120"/>
               </a:rPr>
-              <a:t>One gate for every stack</a:t>
+              <a:t>The same scenario — the Pact way</a:t>
             </a:r>
             <a:endParaRPr lang="en-US" sz="3000" dirty="0"/>
           </a:p>
@@ -6448,7 +7830,7 @@
                 <a:ea typeface="Calibri" pitchFamily="34" charset="-122"/>
                 <a:cs typeface="Calibri" pitchFamily="34" charset="-120"/>
               </a:rPr>
-              <a:t>same logical type → byte-identical IR, enforced in CI</a:t>
+              <a:t>pact-examples/ · the order-service interaction, run live against a Pact Broker</a:t>
             </a:r>
             <a:endParaRPr lang="en-US" sz="1300" dirty="0"/>
           </a:p>
@@ -6462,8 +7844,8 @@
         </p:nvSpPr>
         <p:spPr>
           <a:xfrm>
-            <a:off x="457200" y="1261872"/>
-            <a:ext cx="4005072" cy="804672"/>
+            <a:off x="457200" y="1280160"/>
+            <a:ext cx="3931920" cy="2743200"/>
           </a:xfrm>
           <a:prstGeom prst="rect">
             <a:avLst/>
@@ -6488,50 +7870,30 @@
       </p:sp>
       <p:sp>
         <p:nvSpPr>
-          <p:cNvPr id="5" name="Shape 3"/>
-          <p:cNvSpPr/>
-          <p:nvPr/>
-        </p:nvSpPr>
-        <p:spPr>
-          <a:xfrm>
-            <a:off x="457200" y="1261872"/>
-            <a:ext cx="64008" cy="804672"/>
-          </a:xfrm>
-          <a:prstGeom prst="rect">
-            <a:avLst/>
-          </a:prstGeom>
-          <a:solidFill>
-            <a:srgbClr val="C96F3B"/>
-          </a:solidFill>
-          <a:ln/>
-        </p:spPr>
-      </p:sp>
-      <p:sp>
-        <p:nvSpPr>
-          <p:cNvPr id="6" name="Text 4"/>
-          <p:cNvSpPr/>
-          <p:nvPr/>
-        </p:nvSpPr>
-        <p:spPr>
-          <a:xfrm>
-            <a:off x="685800" y="1353312"/>
-            <a:ext cx="3611880" cy="256032"/>
-          </a:xfrm>
-          <a:prstGeom prst="rect">
-            <a:avLst/>
-          </a:prstGeom>
-          <a:noFill/>
-          <a:ln/>
-        </p:spPr>
-        <p:txBody>
-          <a:bodyPr wrap="square" lIns="0" tIns="0" rIns="0" bIns="0" rtlCol="0" anchor="ctr"/>
-          <a:lstStyle/>
-          <a:p>
-            <a:pPr indent="0" marL="0">
-              <a:buNone/>
-            </a:pPr>
-            <a:r>
-              <a:rPr lang="en-US" sz="1300" b="1" dirty="0">
+          <p:cNvPr id="5" name="Text 3"/>
+          <p:cNvSpPr/>
+          <p:nvPr/>
+        </p:nvSpPr>
+        <p:spPr>
+          <a:xfrm>
+            <a:off x="685800" y="1408176"/>
+            <a:ext cx="3520440" cy="274320"/>
+          </a:xfrm>
+          <a:prstGeom prst="rect">
+            <a:avLst/>
+          </a:prstGeom>
+          <a:noFill/>
+          <a:ln/>
+        </p:spPr>
+        <p:txBody>
+          <a:bodyPr wrap="square" lIns="0" tIns="0" rIns="0" bIns="0" rtlCol="0" anchor="ctr"/>
+          <a:lstStyle/>
+          <a:p>
+            <a:pPr indent="0" marL="0">
+              <a:buNone/>
+            </a:pPr>
+            <a:r>
+              <a:rPr lang="en-US" sz="1400" b="1" dirty="0">
                 <a:solidFill>
                   <a:srgbClr val="26313B"/>
                 </a:solidFill>
@@ -6539,11 +7901,31 @@
                 <a:ea typeface="Trebuchet MS" pitchFamily="34" charset="-122"/>
                 <a:cs typeface="Trebuchet MS" pitchFamily="34" charset="-120"/>
               </a:rPr>
-              <a:t>Java / Kotlin</a:t>
-            </a:r>
-            <a:endParaRPr lang="en-US" sz="1300" dirty="0"/>
-          </a:p>
-        </p:txBody>
+              <a:t>What Pact makes you run</a:t>
+            </a:r>
+            <a:endParaRPr lang="en-US" sz="1400" dirty="0"/>
+          </a:p>
+        </p:txBody>
+      </p:sp>
+      <p:sp>
+        <p:nvSpPr>
+          <p:cNvPr id="6" name="Shape 4"/>
+          <p:cNvSpPr/>
+          <p:nvPr/>
+        </p:nvSpPr>
+        <p:spPr>
+          <a:xfrm>
+            <a:off x="713232" y="1847088"/>
+            <a:ext cx="118872" cy="118872"/>
+          </a:xfrm>
+          <a:prstGeom prst="ellipse">
+            <a:avLst/>
+          </a:prstGeom>
+          <a:solidFill>
+            <a:srgbClr val="B23A3A"/>
+          </a:solidFill>
+          <a:ln/>
+        </p:spPr>
       </p:sp>
       <p:sp>
         <p:nvSpPr>
@@ -6553,32 +7935,71 @@
         </p:nvSpPr>
         <p:spPr>
           <a:xfrm>
-            <a:off x="685800" y="1618488"/>
-            <a:ext cx="3657600" cy="384048"/>
-          </a:xfrm>
-          <a:prstGeom prst="rect">
-            <a:avLst/>
-          </a:prstGeom>
-          <a:noFill/>
-          <a:ln/>
-        </p:spPr>
-        <p:txBody>
-          <a:bodyPr wrap="square" lIns="0" tIns="0" rIns="0" bIns="0" rtlCol="0" anchor="ctr"/>
-          <a:lstStyle/>
-          <a:p>
-            <a:pPr indent="0" marL="0">
-              <a:buNone/>
-            </a:pPr>
-            <a:r>
-              <a:rPr lang="en-US" sz="1050" dirty="0">
-                <a:solidFill>
-                  <a:srgbClr val="76838F"/>
+            <a:off x="960120" y="1773936"/>
+            <a:ext cx="3246120" cy="274320"/>
+          </a:xfrm>
+          <a:prstGeom prst="rect">
+            <a:avLst/>
+          </a:prstGeom>
+          <a:noFill/>
+          <a:ln/>
+        </p:spPr>
+        <p:txBody>
+          <a:bodyPr wrap="square" lIns="0" tIns="0" rIns="0" bIns="0" rtlCol="0" anchor="ctr"/>
+          <a:lstStyle/>
+          <a:p>
+            <a:pPr indent="0" marL="0">
+              <a:buNone/>
+            </a:pPr>
+            <a:r>
+              <a:rPr lang="en-US" sz="1250" b="1" dirty="0">
+                <a:solidFill>
+                  <a:srgbClr val="26313B"/>
                 </a:solidFill>
                 <a:latin typeface="Calibri" pitchFamily="34" charset="0"/>
                 <a:ea typeface="Calibri" pitchFamily="34" charset="-122"/>
                 <a:cs typeface="Calibri" pitchFamily="34" charset="-120"/>
               </a:rPr>
-              <a:t>Jackson introspection — naming strategies, @JsonIgnore, Optional, jakarta @Nonnull</a:t>
+              <a:t>consumer: mock server + matchers</a:t>
+            </a:r>
+            <a:endParaRPr lang="en-US" sz="1250" dirty="0"/>
+          </a:p>
+        </p:txBody>
+      </p:sp>
+      <p:sp>
+        <p:nvSpPr>
+          <p:cNvPr id="8" name="Text 6"/>
+          <p:cNvSpPr/>
+          <p:nvPr/>
+        </p:nvSpPr>
+        <p:spPr>
+          <a:xfrm>
+            <a:off x="960120" y="2020824"/>
+            <a:ext cx="3291840" cy="365760"/>
+          </a:xfrm>
+          <a:prstGeom prst="rect">
+            <a:avLst/>
+          </a:prstGeom>
+          <a:noFill/>
+          <a:ln/>
+        </p:spPr>
+        <p:txBody>
+          <a:bodyPr wrap="square" lIns="0" tIns="0" rIns="0" bIns="0" rtlCol="0" anchor="ctr"/>
+          <a:lstStyle/>
+          <a:p>
+            <a:pPr indent="0" marL="0">
+              <a:buNone/>
+            </a:pPr>
+            <a:r>
+              <a:rPr lang="en-US" sz="1050" dirty="0">
+                <a:solidFill>
+                  <a:srgbClr val="76838F"/>
+                </a:solidFill>
+                <a:latin typeface="Calibri" pitchFamily="34" charset="0"/>
+                <a:ea typeface="Calibri" pitchFamily="34" charset="-122"/>
+                <a:cs typeface="Calibri" pitchFamily="34" charset="-120"/>
+              </a:rPr>
+              <a:t>web-app — a hand-written interaction test (JS)</a:t>
             </a:r>
             <a:endParaRPr lang="en-US" sz="1050" dirty="0"/>
           </a:p>
@@ -6586,14 +8007,210 @@
       </p:sp>
       <p:sp>
         <p:nvSpPr>
-          <p:cNvPr id="8" name="Shape 6"/>
-          <p:cNvSpPr/>
-          <p:nvPr/>
-        </p:nvSpPr>
-        <p:spPr>
-          <a:xfrm>
-            <a:off x="4681728" y="1261872"/>
-            <a:ext cx="4005072" cy="804672"/>
+          <p:cNvPr id="9" name="Shape 7"/>
+          <p:cNvSpPr/>
+          <p:nvPr/>
+        </p:nvSpPr>
+        <p:spPr>
+          <a:xfrm>
+            <a:off x="713232" y="2560320"/>
+            <a:ext cx="118872" cy="118872"/>
+          </a:xfrm>
+          <a:prstGeom prst="ellipse">
+            <a:avLst/>
+          </a:prstGeom>
+          <a:solidFill>
+            <a:srgbClr val="B23A3A"/>
+          </a:solidFill>
+          <a:ln/>
+        </p:spPr>
+      </p:sp>
+      <p:sp>
+        <p:nvSpPr>
+          <p:cNvPr id="10" name="Text 8"/>
+          <p:cNvSpPr/>
+          <p:nvPr/>
+        </p:nvSpPr>
+        <p:spPr>
+          <a:xfrm>
+            <a:off x="960120" y="2487168"/>
+            <a:ext cx="3246120" cy="274320"/>
+          </a:xfrm>
+          <a:prstGeom prst="rect">
+            <a:avLst/>
+          </a:prstGeom>
+          <a:noFill/>
+          <a:ln/>
+        </p:spPr>
+        <p:txBody>
+          <a:bodyPr wrap="square" lIns="0" tIns="0" rIns="0" bIns="0" rtlCol="0" anchor="ctr"/>
+          <a:lstStyle/>
+          <a:p>
+            <a:pPr indent="0" marL="0">
+              <a:buNone/>
+            </a:pPr>
+            <a:r>
+              <a:rPr lang="en-US" sz="1250" b="1" dirty="0">
+                <a:solidFill>
+                  <a:srgbClr val="26313B"/>
+                </a:solidFill>
+                <a:latin typeface="Calibri" pitchFamily="34" charset="0"/>
+                <a:ea typeface="Calibri" pitchFamily="34" charset="-122"/>
+                <a:cs typeface="Calibri" pitchFamily="34" charset="-120"/>
+              </a:rPr>
+              <a:t>provider: replay + state handlers</a:t>
+            </a:r>
+            <a:endParaRPr lang="en-US" sz="1250" dirty="0"/>
+          </a:p>
+        </p:txBody>
+      </p:sp>
+      <p:sp>
+        <p:nvSpPr>
+          <p:cNvPr id="11" name="Text 9"/>
+          <p:cNvSpPr/>
+          <p:nvPr/>
+        </p:nvSpPr>
+        <p:spPr>
+          <a:xfrm>
+            <a:off x="960120" y="2734056"/>
+            <a:ext cx="3291840" cy="365760"/>
+          </a:xfrm>
+          <a:prstGeom prst="rect">
+            <a:avLst/>
+          </a:prstGeom>
+          <a:noFill/>
+          <a:ln/>
+        </p:spPr>
+        <p:txBody>
+          <a:bodyPr wrap="square" lIns="0" tIns="0" rIns="0" bIns="0" rtlCol="0" anchor="ctr"/>
+          <a:lstStyle/>
+          <a:p>
+            <a:pPr indent="0" marL="0">
+              <a:buNone/>
+            </a:pPr>
+            <a:r>
+              <a:rPr lang="en-US" sz="1050" dirty="0">
+                <a:solidFill>
+                  <a:srgbClr val="76838F"/>
+                </a:solidFill>
+                <a:latin typeface="Calibri" pitchFamily="34" charset="0"/>
+                <a:ea typeface="Calibri" pitchFamily="34" charset="-122"/>
+                <a:cs typeface="Calibri" pitchFamily="34" charset="-120"/>
+              </a:rPr>
+              <a:t>order-service — boots the service, one @State each (Java)</a:t>
+            </a:r>
+            <a:endParaRPr lang="en-US" sz="1050" dirty="0"/>
+          </a:p>
+        </p:txBody>
+      </p:sp>
+      <p:sp>
+        <p:nvSpPr>
+          <p:cNvPr id="12" name="Shape 10"/>
+          <p:cNvSpPr/>
+          <p:nvPr/>
+        </p:nvSpPr>
+        <p:spPr>
+          <a:xfrm>
+            <a:off x="713232" y="3273552"/>
+            <a:ext cx="118872" cy="118872"/>
+          </a:xfrm>
+          <a:prstGeom prst="ellipse">
+            <a:avLst/>
+          </a:prstGeom>
+          <a:solidFill>
+            <a:srgbClr val="B23A3A"/>
+          </a:solidFill>
+          <a:ln/>
+        </p:spPr>
+      </p:sp>
+      <p:sp>
+        <p:nvSpPr>
+          <p:cNvPr id="13" name="Text 11"/>
+          <p:cNvSpPr/>
+          <p:nvPr/>
+        </p:nvSpPr>
+        <p:spPr>
+          <a:xfrm>
+            <a:off x="960120" y="3200400"/>
+            <a:ext cx="3246120" cy="274320"/>
+          </a:xfrm>
+          <a:prstGeom prst="rect">
+            <a:avLst/>
+          </a:prstGeom>
+          <a:noFill/>
+          <a:ln/>
+        </p:spPr>
+        <p:txBody>
+          <a:bodyPr wrap="square" lIns="0" tIns="0" rIns="0" bIns="0" rtlCol="0" anchor="ctr"/>
+          <a:lstStyle/>
+          <a:p>
+            <a:pPr indent="0" marL="0">
+              <a:buNone/>
+            </a:pPr>
+            <a:r>
+              <a:rPr lang="en-US" sz="1250" b="1" dirty="0">
+                <a:solidFill>
+                  <a:srgbClr val="26313B"/>
+                </a:solidFill>
+                <a:latin typeface="Calibri" pitchFamily="34" charset="0"/>
+                <a:ea typeface="Calibri" pitchFamily="34" charset="-122"/>
+                <a:cs typeface="Calibri" pitchFamily="34" charset="-120"/>
+              </a:rPr>
+              <a:t>a broker service to operate</a:t>
+            </a:r>
+            <a:endParaRPr lang="en-US" sz="1250" dirty="0"/>
+          </a:p>
+        </p:txBody>
+      </p:sp>
+      <p:sp>
+        <p:nvSpPr>
+          <p:cNvPr id="14" name="Text 12"/>
+          <p:cNvSpPr/>
+          <p:nvPr/>
+        </p:nvSpPr>
+        <p:spPr>
+          <a:xfrm>
+            <a:off x="960120" y="3447288"/>
+            <a:ext cx="3291840" cy="365760"/>
+          </a:xfrm>
+          <a:prstGeom prst="rect">
+            <a:avLst/>
+          </a:prstGeom>
+          <a:noFill/>
+          <a:ln/>
+        </p:spPr>
+        <p:txBody>
+          <a:bodyPr wrap="square" lIns="0" tIns="0" rIns="0" bIns="0" rtlCol="0" anchor="ctr"/>
+          <a:lstStyle/>
+          <a:p>
+            <a:pPr indent="0" marL="0">
+              <a:buNone/>
+            </a:pPr>
+            <a:r>
+              <a:rPr lang="en-US" sz="1050" dirty="0">
+                <a:solidFill>
+                  <a:srgbClr val="76838F"/>
+                </a:solidFill>
+                <a:latin typeface="Calibri" pitchFamily="34" charset="0"/>
+                <a:ea typeface="Calibri" pitchFamily="34" charset="-122"/>
+                <a:cs typeface="Calibri" pitchFamily="34" charset="-120"/>
+              </a:rPr>
+              <a:t>192.168.1.191:9292 — publish, verify, query</a:t>
+            </a:r>
+            <a:endParaRPr lang="en-US" sz="1050" dirty="0"/>
+          </a:p>
+        </p:txBody>
+      </p:sp>
+      <p:sp>
+        <p:nvSpPr>
+          <p:cNvPr id="15" name="Shape 13"/>
+          <p:cNvSpPr/>
+          <p:nvPr/>
+        </p:nvSpPr>
+        <p:spPr>
+          <a:xfrm>
+            <a:off x="4754880" y="1280160"/>
+            <a:ext cx="3931920" cy="2743200"/>
           </a:xfrm>
           <a:prstGeom prst="rect">
             <a:avLst/>
@@ -6618,50 +8235,30 @@
       </p:sp>
       <p:sp>
         <p:nvSpPr>
-          <p:cNvPr id="9" name="Shape 7"/>
-          <p:cNvSpPr/>
-          <p:nvPr/>
-        </p:nvSpPr>
-        <p:spPr>
-          <a:xfrm>
-            <a:off x="4681728" y="1261872"/>
-            <a:ext cx="64008" cy="804672"/>
-          </a:xfrm>
-          <a:prstGeom prst="rect">
-            <a:avLst/>
-          </a:prstGeom>
-          <a:solidFill>
-            <a:srgbClr val="C96F3B"/>
-          </a:solidFill>
-          <a:ln/>
-        </p:spPr>
-      </p:sp>
-      <p:sp>
-        <p:nvSpPr>
-          <p:cNvPr id="10" name="Text 8"/>
-          <p:cNvSpPr/>
-          <p:nvPr/>
-        </p:nvSpPr>
-        <p:spPr>
-          <a:xfrm>
-            <a:off x="4910328" y="1353312"/>
-            <a:ext cx="3611880" cy="256032"/>
-          </a:xfrm>
-          <a:prstGeom prst="rect">
-            <a:avLst/>
-          </a:prstGeom>
-          <a:noFill/>
-          <a:ln/>
-        </p:spPr>
-        <p:txBody>
-          <a:bodyPr wrap="square" lIns="0" tIns="0" rIns="0" bIns="0" rtlCol="0" anchor="ctr"/>
-          <a:lstStyle/>
-          <a:p>
-            <a:pPr indent="0" marL="0">
-              <a:buNone/>
-            </a:pPr>
-            <a:r>
-              <a:rPr lang="en-US" sz="1300" b="1" dirty="0">
+          <p:cNvPr id="16" name="Text 14"/>
+          <p:cNvSpPr/>
+          <p:nvPr/>
+        </p:nvSpPr>
+        <p:spPr>
+          <a:xfrm>
+            <a:off x="4983480" y="1408176"/>
+            <a:ext cx="3520440" cy="274320"/>
+          </a:xfrm>
+          <a:prstGeom prst="rect">
+            <a:avLst/>
+          </a:prstGeom>
+          <a:noFill/>
+          <a:ln/>
+        </p:spPr>
+        <p:txBody>
+          <a:bodyPr wrap="square" lIns="0" tIns="0" rIns="0" bIns="0" rtlCol="0" anchor="ctr"/>
+          <a:lstStyle/>
+          <a:p>
+            <a:pPr indent="0" marL="0">
+              <a:buNone/>
+            </a:pPr>
+            <a:r>
+              <a:rPr lang="en-US" sz="1400" b="1" dirty="0">
                 <a:solidFill>
                   <a:srgbClr val="26313B"/>
                 </a:solidFill>
@@ -6669,38 +8266,97 @@
                 <a:ea typeface="Trebuchet MS" pitchFamily="34" charset="-122"/>
                 <a:cs typeface="Trebuchet MS" pitchFamily="34" charset="-120"/>
               </a:rPr>
-              <a:t>TypeScript + Zod</a:t>
-            </a:r>
-            <a:endParaRPr lang="en-US" sz="1300" dirty="0"/>
-          </a:p>
-        </p:txBody>
-      </p:sp>
-      <p:sp>
-        <p:nvSpPr>
-          <p:cNvPr id="11" name="Text 9"/>
-          <p:cNvSpPr/>
-          <p:nvPr/>
-        </p:nvSpPr>
-        <p:spPr>
-          <a:xfrm>
-            <a:off x="4910328" y="1618488"/>
-            <a:ext cx="3657600" cy="384048"/>
-          </a:xfrm>
-          <a:prstGeom prst="rect">
-            <a:avLst/>
-          </a:prstGeom>
-          <a:noFill/>
-          <a:ln/>
-        </p:spPr>
-        <p:txBody>
-          <a:bodyPr wrap="square" lIns="0" tIns="0" rIns="0" bIns="0" rtlCol="0" anchor="ctr"/>
-          <a:lstStyle/>
-          <a:p>
-            <a:pPr indent="0" marL="0">
-              <a:buNone/>
-            </a:pPr>
-            <a:r>
-              <a:rPr lang="en-US" sz="1050" dirty="0">
+              <a:t>The broker's answer — live</a:t>
+            </a:r>
+            <a:endParaRPr lang="en-US" sz="1400" dirty="0"/>
+          </a:p>
+        </p:txBody>
+      </p:sp>
+      <p:sp>
+        <p:nvSpPr>
+          <p:cNvPr id="17" name="Shape 15"/>
+          <p:cNvSpPr/>
+          <p:nvPr/>
+        </p:nvSpPr>
+        <p:spPr>
+          <a:xfrm>
+            <a:off x="4992624" y="1828800"/>
+            <a:ext cx="128016" cy="128016"/>
+          </a:xfrm>
+          <a:prstGeom prst="ellipse">
+            <a:avLst/>
+          </a:prstGeom>
+          <a:solidFill>
+            <a:srgbClr val="3E7C4F"/>
+          </a:solidFill>
+          <a:ln/>
+        </p:spPr>
+      </p:sp>
+      <p:sp>
+        <p:nvSpPr>
+          <p:cNvPr id="18" name="Text 16"/>
+          <p:cNvSpPr/>
+          <p:nvPr/>
+        </p:nvSpPr>
+        <p:spPr>
+          <a:xfrm>
+            <a:off x="5248656" y="1773936"/>
+            <a:ext cx="1783080" cy="274320"/>
+          </a:xfrm>
+          <a:prstGeom prst="rect">
+            <a:avLst/>
+          </a:prstGeom>
+          <a:noFill/>
+          <a:ln/>
+        </p:spPr>
+        <p:txBody>
+          <a:bodyPr wrap="square" lIns="0" tIns="0" rIns="0" bIns="0" rtlCol="0" anchor="ctr"/>
+          <a:lstStyle/>
+          <a:p>
+            <a:pPr indent="0" marL="0">
+              <a:buNone/>
+            </a:pPr>
+            <a:r>
+              <a:rPr lang="en-US" sz="1000" b="1" dirty="0">
+                <a:solidFill>
+                  <a:srgbClr val="26313B"/>
+                </a:solidFill>
+                <a:latin typeface="Consolas" pitchFamily="34" charset="0"/>
+                <a:ea typeface="Consolas" pitchFamily="34" charset="-122"/>
+                <a:cs typeface="Consolas" pitchFamily="34" charset="-120"/>
+              </a:rPr>
+              <a:t>web-app</a:t>
+            </a:r>
+            <a:endParaRPr lang="en-US" sz="1000" dirty="0"/>
+          </a:p>
+        </p:txBody>
+      </p:sp>
+      <p:sp>
+        <p:nvSpPr>
+          <p:cNvPr id="19" name="Text 17"/>
+          <p:cNvSpPr/>
+          <p:nvPr/>
+        </p:nvSpPr>
+        <p:spPr>
+          <a:xfrm>
+            <a:off x="7059168" y="1792224"/>
+            <a:ext cx="1627632" cy="274320"/>
+          </a:xfrm>
+          <a:prstGeom prst="rect">
+            <a:avLst/>
+          </a:prstGeom>
+          <a:noFill/>
+          <a:ln/>
+        </p:spPr>
+        <p:txBody>
+          <a:bodyPr wrap="square" lIns="0" tIns="0" rIns="0" bIns="0" rtlCol="0" anchor="ctr"/>
+          <a:lstStyle/>
+          <a:p>
+            <a:pPr indent="0" marL="0">
+              <a:buNone/>
+            </a:pPr>
+            <a:r>
+              <a:rPr lang="en-US" sz="900" dirty="0">
                 <a:solidFill>
                   <a:srgbClr val="76838F"/>
                 </a:solidFill>
@@ -6708,129 +8364,257 @@
                 <a:ea typeface="Calibri" pitchFamily="34" charset="-122"/>
                 <a:cs typeface="Calibri" pitchFamily="34" charset="-120"/>
               </a:rPr>
-              <a:t>compiler API · z.toJSONSchema — ?: vs | null kept distinct</a:t>
-            </a:r>
-            <a:endParaRPr lang="en-US" sz="1050" dirty="0"/>
-          </a:p>
-        </p:txBody>
-      </p:sp>
-      <p:sp>
-        <p:nvSpPr>
-          <p:cNvPr id="12" name="Shape 10"/>
-          <p:cNvSpPr/>
-          <p:nvPr/>
-        </p:nvSpPr>
-        <p:spPr>
-          <a:xfrm>
-            <a:off x="457200" y="2231136"/>
-            <a:ext cx="4005072" cy="804672"/>
-          </a:xfrm>
-          <a:prstGeom prst="rect">
+              <a:t>verified — green on 1.0.0 &amp; 2.0.0</a:t>
+            </a:r>
+            <a:endParaRPr lang="en-US" sz="900" dirty="0"/>
+          </a:p>
+        </p:txBody>
+      </p:sp>
+      <p:sp>
+        <p:nvSpPr>
+          <p:cNvPr id="20" name="Shape 18"/>
+          <p:cNvSpPr/>
+          <p:nvPr/>
+        </p:nvSpPr>
+        <p:spPr>
+          <a:xfrm>
+            <a:off x="4992624" y="2212848"/>
+            <a:ext cx="128016" cy="128016"/>
+          </a:xfrm>
+          <a:prstGeom prst="ellipse">
             <a:avLst/>
           </a:prstGeom>
           <a:solidFill>
-            <a:srgbClr val="FFFFFF"/>
+            <a:srgbClr val="B23A3A"/>
           </a:solidFill>
+          <a:ln/>
+        </p:spPr>
+      </p:sp>
+      <p:sp>
+        <p:nvSpPr>
+          <p:cNvPr id="21" name="Text 19"/>
+          <p:cNvSpPr/>
+          <p:nvPr/>
+        </p:nvSpPr>
+        <p:spPr>
+          <a:xfrm>
+            <a:off x="5248656" y="2157984"/>
+            <a:ext cx="1783080" cy="274320"/>
+          </a:xfrm>
+          <a:prstGeom prst="rect">
+            <a:avLst/>
+          </a:prstGeom>
+          <a:noFill/>
+          <a:ln/>
+        </p:spPr>
+        <p:txBody>
+          <a:bodyPr wrap="square" lIns="0" tIns="0" rIns="0" bIns="0" rtlCol="0" anchor="ctr"/>
+          <a:lstStyle/>
+          <a:p>
+            <a:pPr indent="0" marL="0">
+              <a:buNone/>
+            </a:pPr>
+            <a:r>
+              <a:rPr lang="en-US" sz="1000" b="1" dirty="0">
+                <a:solidFill>
+                  <a:srgbClr val="26313B"/>
+                </a:solidFill>
+                <a:latin typeface="Consolas" pitchFamily="34" charset="0"/>
+                <a:ea typeface="Consolas" pitchFamily="34" charset="-122"/>
+                <a:cs typeface="Consolas" pitchFamily="34" charset="-120"/>
+              </a:rPr>
+              <a:t>mobile-app</a:t>
+            </a:r>
+            <a:endParaRPr lang="en-US" sz="1000" dirty="0"/>
+          </a:p>
+        </p:txBody>
+      </p:sp>
+      <p:sp>
+        <p:nvSpPr>
+          <p:cNvPr id="22" name="Text 20"/>
+          <p:cNvSpPr/>
+          <p:nvPr/>
+        </p:nvSpPr>
+        <p:spPr>
+          <a:xfrm>
+            <a:off x="7059168" y="2176272"/>
+            <a:ext cx="1627632" cy="274320"/>
+          </a:xfrm>
+          <a:prstGeom prst="rect">
+            <a:avLst/>
+          </a:prstGeom>
+          <a:noFill/>
+          <a:ln/>
+        </p:spPr>
+        <p:txBody>
+          <a:bodyPr wrap="square" lIns="0" tIns="0" rIns="0" bIns="0" rtlCol="0" anchor="ctr"/>
+          <a:lstStyle/>
+          <a:p>
+            <a:pPr indent="0" marL="0">
+              <a:buNone/>
+            </a:pPr>
+            <a:r>
+              <a:rPr lang="en-US" sz="900" dirty="0">
+                <a:solidFill>
+                  <a:srgbClr val="76838F"/>
+                </a:solidFill>
+                <a:latin typeface="Calibri" pitchFamily="34" charset="0"/>
+                <a:ea typeface="Calibri" pitchFamily="34" charset="-122"/>
+                <a:cs typeface="Calibri" pitchFamily="34" charset="-120"/>
+              </a:rPr>
+              <a:t>failed — 2.0.0 drops loyalty_tier</a:t>
+            </a:r>
+            <a:endParaRPr lang="en-US" sz="900" dirty="0"/>
+          </a:p>
+        </p:txBody>
+      </p:sp>
+      <p:sp>
+        <p:nvSpPr>
+          <p:cNvPr id="23" name="Shape 21"/>
+          <p:cNvSpPr/>
+          <p:nvPr/>
+        </p:nvSpPr>
+        <p:spPr>
+          <a:xfrm>
+            <a:off x="4992624" y="2596896"/>
+            <a:ext cx="128016" cy="128016"/>
+          </a:xfrm>
+          <a:prstGeom prst="ellipse">
+            <a:avLst/>
+          </a:prstGeom>
+          <a:solidFill>
+            <a:srgbClr val="C9952B"/>
+          </a:solidFill>
+          <a:ln/>
+        </p:spPr>
+      </p:sp>
+      <p:sp>
+        <p:nvSpPr>
+          <p:cNvPr id="24" name="Text 22"/>
+          <p:cNvSpPr/>
+          <p:nvPr/>
+        </p:nvSpPr>
+        <p:spPr>
+          <a:xfrm>
+            <a:off x="5248656" y="2542032"/>
+            <a:ext cx="1783080" cy="274320"/>
+          </a:xfrm>
+          <a:prstGeom prst="rect">
+            <a:avLst/>
+          </a:prstGeom>
+          <a:noFill/>
+          <a:ln/>
+        </p:spPr>
+        <p:txBody>
+          <a:bodyPr wrap="square" lIns="0" tIns="0" rIns="0" bIns="0" rtlCol="0" anchor="ctr"/>
+          <a:lstStyle/>
+          <a:p>
+            <a:pPr indent="0" marL="0">
+              <a:buNone/>
+            </a:pPr>
+            <a:r>
+              <a:rPr lang="en-US" sz="1000" b="1" dirty="0">
+                <a:solidFill>
+                  <a:srgbClr val="26313B"/>
+                </a:solidFill>
+                <a:latin typeface="Consolas" pitchFamily="34" charset="0"/>
+                <a:ea typeface="Consolas" pitchFamily="34" charset="-122"/>
+                <a:cs typeface="Consolas" pitchFamily="34" charset="-120"/>
+              </a:rPr>
+              <a:t>reporting-service</a:t>
+            </a:r>
+            <a:endParaRPr lang="en-US" sz="1000" dirty="0"/>
+          </a:p>
+        </p:txBody>
+      </p:sp>
+      <p:sp>
+        <p:nvSpPr>
+          <p:cNvPr id="25" name="Text 23"/>
+          <p:cNvSpPr/>
+          <p:nvPr/>
+        </p:nvSpPr>
+        <p:spPr>
+          <a:xfrm>
+            <a:off x="7059168" y="2560320"/>
+            <a:ext cx="1627632" cy="274320"/>
+          </a:xfrm>
+          <a:prstGeom prst="rect">
+            <a:avLst/>
+          </a:prstGeom>
+          <a:noFill/>
+          <a:ln/>
+        </p:spPr>
+        <p:txBody>
+          <a:bodyPr wrap="square" lIns="0" tIns="0" rIns="0" bIns="0" rtlCol="0" anchor="ctr"/>
+          <a:lstStyle/>
+          <a:p>
+            <a:pPr indent="0" marL="0">
+              <a:buNone/>
+            </a:pPr>
+            <a:r>
+              <a:rPr lang="en-US" sz="900" dirty="0">
+                <a:solidFill>
+                  <a:srgbClr val="76838F"/>
+                </a:solidFill>
+                <a:latin typeface="Calibri" pitchFamily="34" charset="0"/>
+                <a:ea typeface="Calibri" pitchFamily="34" charset="-122"/>
+                <a:cs typeface="Calibri" pitchFamily="34" charset="-120"/>
+              </a:rPr>
+              <a:t>pending — never verified</a:t>
+            </a:r>
+            <a:endParaRPr lang="en-US" sz="900" dirty="0"/>
+          </a:p>
+        </p:txBody>
+      </p:sp>
+      <p:sp>
+        <p:nvSpPr>
+          <p:cNvPr id="26" name="Shape 24"/>
+          <p:cNvSpPr/>
+          <p:nvPr/>
+        </p:nvSpPr>
+        <p:spPr>
+          <a:xfrm>
+            <a:off x="4983480" y="3035808"/>
+            <a:ext cx="3474720" cy="0"/>
+          </a:xfrm>
+          <a:prstGeom prst="line">
+            <a:avLst/>
+          </a:prstGeom>
+          <a:noFill/>
           <a:ln w="9525">
             <a:solidFill>
-              <a:srgbClr val="E4DFD6"/>
+              <a:srgbClr val="ECE6DB"/>
             </a:solidFill>
             <a:prstDash val="solid"/>
           </a:ln>
-          <a:effectLst>
-            <a:outerShdw sx="100000" sy="100000" kx="0" ky="0" algn="bl" rotWithShape="0" blurRad="63500" dist="25400" dir="8100000">
-              <a:srgbClr val="000000">
-                <a:alpha val="12000"/>
-              </a:srgbClr>
-            </a:outerShdw>
-          </a:effectLst>
-        </p:spPr>
-      </p:sp>
-      <p:sp>
-        <p:nvSpPr>
-          <p:cNvPr id="13" name="Shape 11"/>
-          <p:cNvSpPr/>
-          <p:nvPr/>
-        </p:nvSpPr>
-        <p:spPr>
-          <a:xfrm>
-            <a:off x="457200" y="2231136"/>
-            <a:ext cx="64008" cy="804672"/>
-          </a:xfrm>
-          <a:prstGeom prst="rect">
-            <a:avLst/>
-          </a:prstGeom>
-          <a:solidFill>
-            <a:srgbClr val="C96F3B"/>
-          </a:solidFill>
-          <a:ln/>
-        </p:spPr>
-      </p:sp>
-      <p:sp>
-        <p:nvSpPr>
-          <p:cNvPr id="14" name="Text 12"/>
-          <p:cNvSpPr/>
-          <p:nvPr/>
-        </p:nvSpPr>
-        <p:spPr>
-          <a:xfrm>
-            <a:off x="685800" y="2322576"/>
-            <a:ext cx="3611880" cy="256032"/>
-          </a:xfrm>
-          <a:prstGeom prst="rect">
-            <a:avLst/>
-          </a:prstGeom>
-          <a:noFill/>
-          <a:ln/>
-        </p:spPr>
-        <p:txBody>
-          <a:bodyPr wrap="square" lIns="0" tIns="0" rIns="0" bIns="0" rtlCol="0" anchor="ctr"/>
-          <a:lstStyle/>
-          <a:p>
-            <a:pPr indent="0" marL="0">
-              <a:buNone/>
-            </a:pPr>
-            <a:r>
-              <a:rPr lang="en-US" sz="1300" b="1" dirty="0">
-                <a:solidFill>
-                  <a:srgbClr val="26313B"/>
-                </a:solidFill>
-                <a:latin typeface="Trebuchet MS" pitchFamily="34" charset="0"/>
-                <a:ea typeface="Trebuchet MS" pitchFamily="34" charset="-122"/>
-                <a:cs typeface="Trebuchet MS" pitchFamily="34" charset="-120"/>
-              </a:rPr>
-              <a:t>Go</a:t>
-            </a:r>
-            <a:endParaRPr lang="en-US" sz="1300" dirty="0"/>
-          </a:p>
-        </p:txBody>
-      </p:sp>
-      <p:sp>
-        <p:nvSpPr>
-          <p:cNvPr id="15" name="Text 13"/>
-          <p:cNvSpPr/>
-          <p:nvPr/>
-        </p:nvSpPr>
-        <p:spPr>
-          <a:xfrm>
-            <a:off x="685800" y="2587752"/>
-            <a:ext cx="3657600" cy="384048"/>
-          </a:xfrm>
-          <a:prstGeom prst="rect">
-            <a:avLst/>
-          </a:prstGeom>
-          <a:noFill/>
-          <a:ln/>
-        </p:spPr>
-        <p:txBody>
-          <a:bodyPr wrap="square" lIns="0" tIns="0" rIns="0" bIns="0" rtlCol="0" anchor="ctr"/>
-          <a:lstStyle/>
-          <a:p>
-            <a:pPr indent="0" marL="0">
-              <a:buNone/>
-            </a:pPr>
-            <a:r>
-              <a:rPr lang="en-US" sz="1050" dirty="0">
+        </p:spPr>
+      </p:sp>
+      <p:sp>
+        <p:nvSpPr>
+          <p:cNvPr id="27" name="Text 25"/>
+          <p:cNvSpPr/>
+          <p:nvPr/>
+        </p:nvSpPr>
+        <p:spPr>
+          <a:xfrm>
+            <a:off x="4983480" y="3108960"/>
+            <a:ext cx="3520440" cy="237744"/>
+          </a:xfrm>
+          <a:prstGeom prst="rect">
+            <a:avLst/>
+          </a:prstGeom>
+          <a:noFill/>
+          <a:ln/>
+        </p:spPr>
+        <p:txBody>
+          <a:bodyPr wrap="square" lIns="0" tIns="0" rIns="0" bIns="0" rtlCol="0" anchor="ctr"/>
+          <a:lstStyle/>
+          <a:p>
+            <a:pPr indent="0" marL="0">
+              <a:buNone/>
+            </a:pPr>
+            <a:r>
+              <a:rPr lang="en-US" sz="1050" i="1" dirty="0">
                 <a:solidFill>
                   <a:srgbClr val="76838F"/>
                 </a:solidFill>
@@ -6838,7 +8622,7 @@
                 <a:ea typeface="Calibri" pitchFamily="34" charset="-122"/>
                 <a:cs typeface="Calibri" pitchFamily="34" charset="-120"/>
               </a:rPr>
-              <a:t>reflection generated inside your module — internal/ packages just work</a:t>
+              <a:t>can-i-deploy order-service</a:t>
             </a:r>
             <a:endParaRPr lang="en-US" sz="1050" dirty="0"/>
           </a:p>
@@ -6846,462 +8630,306 @@
       </p:sp>
       <p:sp>
         <p:nvSpPr>
-          <p:cNvPr id="16" name="Shape 14"/>
-          <p:cNvSpPr/>
-          <p:nvPr/>
-        </p:nvSpPr>
-        <p:spPr>
-          <a:xfrm>
-            <a:off x="4681728" y="2231136"/>
-            <a:ext cx="4005072" cy="804672"/>
+          <p:cNvPr id="28" name="Text 26"/>
+          <p:cNvSpPr/>
+          <p:nvPr/>
+        </p:nvSpPr>
+        <p:spPr>
+          <a:xfrm>
+            <a:off x="5120640" y="3364992"/>
+            <a:ext cx="2468880" cy="219456"/>
+          </a:xfrm>
+          <a:prstGeom prst="rect">
+            <a:avLst/>
+          </a:prstGeom>
+          <a:noFill/>
+          <a:ln/>
+        </p:spPr>
+        <p:txBody>
+          <a:bodyPr wrap="square" lIns="0" tIns="0" rIns="0" bIns="0" rtlCol="0" anchor="ctr"/>
+          <a:lstStyle/>
+          <a:p>
+            <a:pPr indent="0" marL="0">
+              <a:buNone/>
+            </a:pPr>
+            <a:r>
+              <a:rPr lang="en-US" sz="1050" dirty="0">
+                <a:solidFill>
+                  <a:srgbClr val="26313B"/>
+                </a:solidFill>
+                <a:latin typeface="Consolas" pitchFamily="34" charset="0"/>
+                <a:ea typeface="Consolas" pitchFamily="34" charset="-122"/>
+                <a:cs typeface="Consolas" pitchFamily="34" charset="-120"/>
+              </a:rPr>
+              <a:t>2.0.0 → production</a:t>
+            </a:r>
+            <a:endParaRPr lang="en-US" sz="1050" dirty="0"/>
+          </a:p>
+        </p:txBody>
+      </p:sp>
+      <p:sp>
+        <p:nvSpPr>
+          <p:cNvPr id="29" name="Text 27"/>
+          <p:cNvSpPr/>
+          <p:nvPr/>
+        </p:nvSpPr>
+        <p:spPr>
+          <a:xfrm>
+            <a:off x="7635240" y="3364992"/>
+            <a:ext cx="868680" cy="219456"/>
+          </a:xfrm>
+          <a:prstGeom prst="rect">
+            <a:avLst/>
+          </a:prstGeom>
+          <a:noFill/>
+          <a:ln/>
+        </p:spPr>
+        <p:txBody>
+          <a:bodyPr wrap="square" lIns="0" tIns="0" rIns="0" bIns="0" rtlCol="0" anchor="ctr"/>
+          <a:lstStyle/>
+          <a:p>
+            <a:pPr algn="r" indent="0" marL="0">
+              <a:buNone/>
+            </a:pPr>
+            <a:r>
+              <a:rPr lang="en-US" sz="1050" b="1" dirty="0">
+                <a:solidFill>
+                  <a:srgbClr val="B23A3A"/>
+                </a:solidFill>
+                <a:latin typeface="Consolas" pitchFamily="34" charset="0"/>
+                <a:ea typeface="Consolas" pitchFamily="34" charset="-122"/>
+                <a:cs typeface="Consolas" pitchFamily="34" charset="-120"/>
+              </a:rPr>
+              <a:t>NO</a:t>
+            </a:r>
+            <a:endParaRPr lang="en-US" sz="1050" dirty="0"/>
+          </a:p>
+        </p:txBody>
+      </p:sp>
+      <p:sp>
+        <p:nvSpPr>
+          <p:cNvPr id="30" name="Text 28"/>
+          <p:cNvSpPr/>
+          <p:nvPr/>
+        </p:nvSpPr>
+        <p:spPr>
+          <a:xfrm>
+            <a:off x="5120640" y="3593592"/>
+            <a:ext cx="2468880" cy="219456"/>
+          </a:xfrm>
+          <a:prstGeom prst="rect">
+            <a:avLst/>
+          </a:prstGeom>
+          <a:noFill/>
+          <a:ln/>
+        </p:spPr>
+        <p:txBody>
+          <a:bodyPr wrap="square" lIns="0" tIns="0" rIns="0" bIns="0" rtlCol="0" anchor="ctr"/>
+          <a:lstStyle/>
+          <a:p>
+            <a:pPr indent="0" marL="0">
+              <a:buNone/>
+            </a:pPr>
+            <a:r>
+              <a:rPr lang="en-US" sz="1050" dirty="0">
+                <a:solidFill>
+                  <a:srgbClr val="26313B"/>
+                </a:solidFill>
+                <a:latin typeface="Consolas" pitchFamily="34" charset="0"/>
+                <a:ea typeface="Consolas" pitchFamily="34" charset="-122"/>
+                <a:cs typeface="Consolas" pitchFamily="34" charset="-120"/>
+              </a:rPr>
+              <a:t>2.0.0 → staging</a:t>
+            </a:r>
+            <a:endParaRPr lang="en-US" sz="1050" dirty="0"/>
+          </a:p>
+        </p:txBody>
+      </p:sp>
+      <p:sp>
+        <p:nvSpPr>
+          <p:cNvPr id="31" name="Text 29"/>
+          <p:cNvSpPr/>
+          <p:nvPr/>
+        </p:nvSpPr>
+        <p:spPr>
+          <a:xfrm>
+            <a:off x="7635240" y="3593592"/>
+            <a:ext cx="868680" cy="219456"/>
+          </a:xfrm>
+          <a:prstGeom prst="rect">
+            <a:avLst/>
+          </a:prstGeom>
+          <a:noFill/>
+          <a:ln/>
+        </p:spPr>
+        <p:txBody>
+          <a:bodyPr wrap="square" lIns="0" tIns="0" rIns="0" bIns="0" rtlCol="0" anchor="ctr"/>
+          <a:lstStyle/>
+          <a:p>
+            <a:pPr algn="r" indent="0" marL="0">
+              <a:buNone/>
+            </a:pPr>
+            <a:r>
+              <a:rPr lang="en-US" sz="1050" b="1" dirty="0">
+                <a:solidFill>
+                  <a:srgbClr val="3E7C4F"/>
+                </a:solidFill>
+                <a:latin typeface="Consolas" pitchFamily="34" charset="0"/>
+                <a:ea typeface="Consolas" pitchFamily="34" charset="-122"/>
+                <a:cs typeface="Consolas" pitchFamily="34" charset="-120"/>
+              </a:rPr>
+              <a:t>YES</a:t>
+            </a:r>
+            <a:endParaRPr lang="en-US" sz="1050" dirty="0"/>
+          </a:p>
+        </p:txBody>
+      </p:sp>
+      <p:sp>
+        <p:nvSpPr>
+          <p:cNvPr id="32" name="Text 30"/>
+          <p:cNvSpPr/>
+          <p:nvPr/>
+        </p:nvSpPr>
+        <p:spPr>
+          <a:xfrm>
+            <a:off x="5120640" y="3822192"/>
+            <a:ext cx="2468880" cy="219456"/>
+          </a:xfrm>
+          <a:prstGeom prst="rect">
+            <a:avLst/>
+          </a:prstGeom>
+          <a:noFill/>
+          <a:ln/>
+        </p:spPr>
+        <p:txBody>
+          <a:bodyPr wrap="square" lIns="0" tIns="0" rIns="0" bIns="0" rtlCol="0" anchor="ctr"/>
+          <a:lstStyle/>
+          <a:p>
+            <a:pPr indent="0" marL="0">
+              <a:buNone/>
+            </a:pPr>
+            <a:r>
+              <a:rPr lang="en-US" sz="1050" dirty="0">
+                <a:solidFill>
+                  <a:srgbClr val="26313B"/>
+                </a:solidFill>
+                <a:latin typeface="Consolas" pitchFamily="34" charset="0"/>
+                <a:ea typeface="Consolas" pitchFamily="34" charset="-122"/>
+                <a:cs typeface="Consolas" pitchFamily="34" charset="-120"/>
+              </a:rPr>
+              <a:t>1.0.0 → production</a:t>
+            </a:r>
+            <a:endParaRPr lang="en-US" sz="1050" dirty="0"/>
+          </a:p>
+        </p:txBody>
+      </p:sp>
+      <p:sp>
+        <p:nvSpPr>
+          <p:cNvPr id="33" name="Text 31"/>
+          <p:cNvSpPr/>
+          <p:nvPr/>
+        </p:nvSpPr>
+        <p:spPr>
+          <a:xfrm>
+            <a:off x="7635240" y="3822192"/>
+            <a:ext cx="868680" cy="219456"/>
+          </a:xfrm>
+          <a:prstGeom prst="rect">
+            <a:avLst/>
+          </a:prstGeom>
+          <a:noFill/>
+          <a:ln/>
+        </p:spPr>
+        <p:txBody>
+          <a:bodyPr wrap="square" lIns="0" tIns="0" rIns="0" bIns="0" rtlCol="0" anchor="ctr"/>
+          <a:lstStyle/>
+          <a:p>
+            <a:pPr algn="r" indent="0" marL="0">
+              <a:buNone/>
+            </a:pPr>
+            <a:r>
+              <a:rPr lang="en-US" sz="1050" b="1" dirty="0">
+                <a:solidFill>
+                  <a:srgbClr val="3E7C4F"/>
+                </a:solidFill>
+                <a:latin typeface="Consolas" pitchFamily="34" charset="0"/>
+                <a:ea typeface="Consolas" pitchFamily="34" charset="-122"/>
+                <a:cs typeface="Consolas" pitchFamily="34" charset="-120"/>
+              </a:rPr>
+              <a:t>YES</a:t>
+            </a:r>
+            <a:endParaRPr lang="en-US" sz="1050" dirty="0"/>
+          </a:p>
+        </p:txBody>
+      </p:sp>
+      <p:sp>
+        <p:nvSpPr>
+          <p:cNvPr id="34" name="Shape 32"/>
+          <p:cNvSpPr/>
+          <p:nvPr/>
+        </p:nvSpPr>
+        <p:spPr>
+          <a:xfrm>
+            <a:off x="457200" y="4160520"/>
+            <a:ext cx="8229600" cy="713232"/>
           </a:xfrm>
           <a:prstGeom prst="rect">
             <a:avLst/>
           </a:prstGeom>
           <a:solidFill>
-            <a:srgbClr val="FFFFFF"/>
+            <a:srgbClr val="22303C"/>
           </a:solidFill>
-          <a:ln w="9525">
-            <a:solidFill>
-              <a:srgbClr val="E4DFD6"/>
-            </a:solidFill>
-            <a:prstDash val="solid"/>
-          </a:ln>
-          <a:effectLst>
-            <a:outerShdw sx="100000" sy="100000" kx="0" ky="0" algn="bl" rotWithShape="0" blurRad="63500" dist="25400" dir="8100000">
-              <a:srgbClr val="000000">
-                <a:alpha val="12000"/>
-              </a:srgbClr>
-            </a:outerShdw>
-          </a:effectLst>
-        </p:spPr>
-      </p:sp>
-      <p:sp>
-        <p:nvSpPr>
-          <p:cNvPr id="17" name="Shape 15"/>
-          <p:cNvSpPr/>
-          <p:nvPr/>
-        </p:nvSpPr>
-        <p:spPr>
-          <a:xfrm>
-            <a:off x="4681728" y="2231136"/>
-            <a:ext cx="64008" cy="804672"/>
-          </a:xfrm>
-          <a:prstGeom prst="rect">
-            <a:avLst/>
-          </a:prstGeom>
-          <a:solidFill>
-            <a:srgbClr val="C96F3B"/>
-          </a:solidFill>
-          <a:ln/>
-        </p:spPr>
-      </p:sp>
-      <p:sp>
-        <p:nvSpPr>
-          <p:cNvPr id="18" name="Text 16"/>
-          <p:cNvSpPr/>
-          <p:nvPr/>
-        </p:nvSpPr>
-        <p:spPr>
-          <a:xfrm>
-            <a:off x="4910328" y="2322576"/>
-            <a:ext cx="3611880" cy="256032"/>
-          </a:xfrm>
-          <a:prstGeom prst="rect">
-            <a:avLst/>
-          </a:prstGeom>
-          <a:noFill/>
-          <a:ln/>
-        </p:spPr>
-        <p:txBody>
-          <a:bodyPr wrap="square" lIns="0" tIns="0" rIns="0" bIns="0" rtlCol="0" anchor="ctr"/>
-          <a:lstStyle/>
-          <a:p>
-            <a:pPr indent="0" marL="0">
-              <a:buNone/>
-            </a:pPr>
-            <a:r>
-              <a:rPr lang="en-US" sz="1300" b="1" dirty="0">
-                <a:solidFill>
-                  <a:srgbClr val="26313B"/>
-                </a:solidFill>
-                <a:latin typeface="Trebuchet MS" pitchFamily="34" charset="0"/>
-                <a:ea typeface="Trebuchet MS" pitchFamily="34" charset="-122"/>
-                <a:cs typeface="Trebuchet MS" pitchFamily="34" charset="-120"/>
-              </a:rPr>
-              <a:t>Python</a:t>
-            </a:r>
-            <a:endParaRPr lang="en-US" sz="1300" dirty="0"/>
-          </a:p>
-        </p:txBody>
-      </p:sp>
-      <p:sp>
-        <p:nvSpPr>
-          <p:cNvPr id="19" name="Text 17"/>
-          <p:cNvSpPr/>
-          <p:nvPr/>
-        </p:nvSpPr>
-        <p:spPr>
-          <a:xfrm>
-            <a:off x="4910328" y="2587752"/>
-            <a:ext cx="3657600" cy="384048"/>
-          </a:xfrm>
-          <a:prstGeom prst="rect">
-            <a:avLst/>
-          </a:prstGeom>
-          <a:noFill/>
-          <a:ln/>
-        </p:spPr>
-        <p:txBody>
-          <a:bodyPr wrap="square" lIns="0" tIns="0" rIns="0" bIns="0" rtlCol="0" anchor="ctr"/>
-          <a:lstStyle/>
-          <a:p>
-            <a:pPr indent="0" marL="0">
-              <a:buNone/>
-            </a:pPr>
-            <a:r>
-              <a:rPr lang="en-US" sz="1050" dirty="0">
-                <a:solidFill>
-                  <a:srgbClr val="76838F"/>
+          <a:ln/>
+        </p:spPr>
+      </p:sp>
+      <p:sp>
+        <p:nvSpPr>
+          <p:cNvPr id="35" name="Text 33"/>
+          <p:cNvSpPr/>
+          <p:nvPr/>
+        </p:nvSpPr>
+        <p:spPr>
+          <a:xfrm>
+            <a:off x="731520" y="4160520"/>
+            <a:ext cx="7680960" cy="713232"/>
+          </a:xfrm>
+          <a:prstGeom prst="rect">
+            <a:avLst/>
+          </a:prstGeom>
+          <a:noFill/>
+          <a:ln/>
+        </p:spPr>
+        <p:txBody>
+          <a:bodyPr wrap="square" lIns="0" tIns="0" rIns="0" bIns="0" rtlCol="0" anchor="ctr"/>
+          <a:lstStyle/>
+          <a:p>
+            <a:pPr indent="0" marL="0">
+              <a:buNone/>
+            </a:pPr>
+            <a:r>
+              <a:rPr lang="en-US" sz="1250" b="1" dirty="0">
+                <a:solidFill>
+                  <a:srgbClr val="F4F1EC"/>
                 </a:solidFill>
                 <a:latin typeface="Calibri" pitchFamily="34" charset="0"/>
                 <a:ea typeface="Calibri" pitchFamily="34" charset="-122"/>
                 <a:cs typeface="Calibri" pitchFamily="34" charset="-120"/>
               </a:rPr>
-              <a:t>pydantic v2, external extractor on the frozen protocol v1 (~200 lines)</a:t>
-            </a:r>
-            <a:endParaRPr lang="en-US" sz="1050" dirty="0"/>
-          </a:p>
-        </p:txBody>
-      </p:sp>
-      <p:sp>
-        <p:nvSpPr>
-          <p:cNvPr id="20" name="Shape 18"/>
-          <p:cNvSpPr/>
-          <p:nvPr/>
-        </p:nvSpPr>
-        <p:spPr>
-          <a:xfrm>
-            <a:off x="457200" y="3200400"/>
-            <a:ext cx="4005072" cy="804672"/>
-          </a:xfrm>
-          <a:prstGeom prst="rect">
-            <a:avLst/>
-          </a:prstGeom>
-          <a:solidFill>
-            <a:srgbClr val="FFFFFF"/>
-          </a:solidFill>
-          <a:ln w="9525">
-            <a:solidFill>
-              <a:srgbClr val="E4DFD6"/>
-            </a:solidFill>
-            <a:prstDash val="solid"/>
-          </a:ln>
-          <a:effectLst>
-            <a:outerShdw sx="100000" sy="100000" kx="0" ky="0" algn="bl" rotWithShape="0" blurRad="63500" dist="25400" dir="8100000">
-              <a:srgbClr val="000000">
-                <a:alpha val="12000"/>
-              </a:srgbClr>
-            </a:outerShdw>
-          </a:effectLst>
-        </p:spPr>
-      </p:sp>
-      <p:sp>
-        <p:nvSpPr>
-          <p:cNvPr id="21" name="Shape 19"/>
-          <p:cNvSpPr/>
-          <p:nvPr/>
-        </p:nvSpPr>
-        <p:spPr>
-          <a:xfrm>
-            <a:off x="457200" y="3200400"/>
-            <a:ext cx="64008" cy="804672"/>
-          </a:xfrm>
-          <a:prstGeom prst="rect">
-            <a:avLst/>
-          </a:prstGeom>
-          <a:solidFill>
-            <a:srgbClr val="C96F3B"/>
-          </a:solidFill>
-          <a:ln/>
-        </p:spPr>
-      </p:sp>
-      <p:sp>
-        <p:nvSpPr>
-          <p:cNvPr id="22" name="Text 20"/>
-          <p:cNvSpPr/>
-          <p:nvPr/>
-        </p:nvSpPr>
-        <p:spPr>
-          <a:xfrm>
-            <a:off x="685800" y="3291840"/>
-            <a:ext cx="3611880" cy="256032"/>
-          </a:xfrm>
-          <a:prstGeom prst="rect">
-            <a:avLst/>
-          </a:prstGeom>
-          <a:noFill/>
-          <a:ln/>
-        </p:spPr>
-        <p:txBody>
-          <a:bodyPr wrap="square" lIns="0" tIns="0" rIns="0" bIns="0" rtlCol="0" anchor="ctr"/>
-          <a:lstStyle/>
-          <a:p>
-            <a:pPr indent="0" marL="0">
-              <a:buNone/>
-            </a:pPr>
-            <a:r>
-              <a:rPr lang="en-US" sz="1300" b="1" dirty="0">
-                <a:solidFill>
-                  <a:srgbClr val="26313B"/>
-                </a:solidFill>
-                <a:latin typeface="Trebuchet MS" pitchFamily="34" charset="0"/>
-                <a:ea typeface="Trebuchet MS" pitchFamily="34" charset="-122"/>
-                <a:cs typeface="Trebuchet MS" pitchFamily="34" charset="-120"/>
-              </a:rPr>
-              <a:t>proto3 · Avro · GraphQL</a:t>
-            </a:r>
-            <a:endParaRPr lang="en-US" sz="1300" dirty="0"/>
-          </a:p>
-        </p:txBody>
-      </p:sp>
-      <p:sp>
-        <p:nvSpPr>
-          <p:cNvPr id="23" name="Text 21"/>
-          <p:cNvSpPr/>
-          <p:nvPr/>
-        </p:nvSpPr>
-        <p:spPr>
-          <a:xfrm>
-            <a:off x="685800" y="3557016"/>
-            <a:ext cx="3657600" cy="384048"/>
-          </a:xfrm>
-          <a:prstGeom prst="rect">
-            <a:avLst/>
-          </a:prstGeom>
-          <a:noFill/>
-          <a:ln/>
-        </p:spPr>
-        <p:txBody>
-          <a:bodyPr wrap="square" lIns="0" tIns="0" rIns="0" bIns="0" rtlCol="0" anchor="ctr"/>
-          <a:lstStyle/>
-          <a:p>
-            <a:pPr indent="0" marL="0">
-              <a:buNone/>
-            </a:pPr>
-            <a:r>
-              <a:rPr lang="en-US" sz="1050" dirty="0">
-                <a:solidFill>
-                  <a:srgbClr val="76838F"/>
+              <a:t>Pact reaches this with a broker you run, publish to, and verify against.  </a:t>
+            </a:r>
+            <a:pPr indent="0" marL="0">
+              <a:buNone/>
+            </a:pPr>
+            <a:r>
+              <a:rPr lang="en-US" sz="1250" dirty="0">
+                <a:solidFill>
+                  <a:srgbClr val="9FB0BD"/>
                 </a:solidFill>
                 <a:latin typeface="Calibri" pitchFamily="34" charset="0"/>
                 <a:ea typeface="Calibri" pitchFamily="34" charset="-122"/>
                 <a:cs typeface="Calibri" pitchFamily="34" charset="-120"/>
               </a:rPr>
-              <a:t>schema files imported directly — the artifact IS the contract</a:t>
-            </a:r>
-            <a:endParaRPr lang="en-US" sz="1050" dirty="0"/>
-          </a:p>
-        </p:txBody>
-      </p:sp>
-      <p:sp>
-        <p:nvSpPr>
-          <p:cNvPr id="24" name="Shape 22"/>
-          <p:cNvSpPr/>
-          <p:nvPr/>
-        </p:nvSpPr>
-        <p:spPr>
-          <a:xfrm>
-            <a:off x="4681728" y="3200400"/>
-            <a:ext cx="4005072" cy="804672"/>
-          </a:xfrm>
-          <a:prstGeom prst="rect">
-            <a:avLst/>
-          </a:prstGeom>
-          <a:solidFill>
-            <a:srgbClr val="FFFFFF"/>
-          </a:solidFill>
-          <a:ln w="9525">
-            <a:solidFill>
-              <a:srgbClr val="E4DFD6"/>
-            </a:solidFill>
-            <a:prstDash val="solid"/>
-          </a:ln>
-          <a:effectLst>
-            <a:outerShdw sx="100000" sy="100000" kx="0" ky="0" algn="bl" rotWithShape="0" blurRad="63500" dist="25400" dir="8100000">
-              <a:srgbClr val="000000">
-                <a:alpha val="12000"/>
-              </a:srgbClr>
-            </a:outerShdw>
-          </a:effectLst>
-        </p:spPr>
-      </p:sp>
-      <p:sp>
-        <p:nvSpPr>
-          <p:cNvPr id="25" name="Shape 23"/>
-          <p:cNvSpPr/>
-          <p:nvPr/>
-        </p:nvSpPr>
-        <p:spPr>
-          <a:xfrm>
-            <a:off x="4681728" y="3200400"/>
-            <a:ext cx="64008" cy="804672"/>
-          </a:xfrm>
-          <a:prstGeom prst="rect">
-            <a:avLst/>
-          </a:prstGeom>
-          <a:solidFill>
-            <a:srgbClr val="C96F3B"/>
-          </a:solidFill>
-          <a:ln/>
-        </p:spPr>
-      </p:sp>
-      <p:sp>
-        <p:nvSpPr>
-          <p:cNvPr id="26" name="Text 24"/>
-          <p:cNvSpPr/>
-          <p:nvPr/>
-        </p:nvSpPr>
-        <p:spPr>
-          <a:xfrm>
-            <a:off x="4910328" y="3291840"/>
-            <a:ext cx="3611880" cy="256032"/>
-          </a:xfrm>
-          <a:prstGeom prst="rect">
-            <a:avLst/>
-          </a:prstGeom>
-          <a:noFill/>
-          <a:ln/>
-        </p:spPr>
-        <p:txBody>
-          <a:bodyPr wrap="square" lIns="0" tIns="0" rIns="0" bIns="0" rtlCol="0" anchor="ctr"/>
-          <a:lstStyle/>
-          <a:p>
-            <a:pPr indent="0" marL="0">
-              <a:buNone/>
-            </a:pPr>
-            <a:r>
-              <a:rPr lang="en-US" sz="1300" b="1" dirty="0">
-                <a:solidFill>
-                  <a:srgbClr val="26313B"/>
-                </a:solidFill>
-                <a:latin typeface="Trebuchet MS" pitchFamily="34" charset="0"/>
-                <a:ea typeface="Trebuchet MS" pitchFamily="34" charset="-122"/>
-                <a:cs typeface="Trebuchet MS" pitchFamily="34" charset="-120"/>
-              </a:rPr>
-              <a:t>GraphQL queries</a:t>
-            </a:r>
-            <a:endParaRPr lang="en-US" sz="1300" dirty="0"/>
-          </a:p>
-        </p:txBody>
-      </p:sp>
-      <p:sp>
-        <p:nvSpPr>
-          <p:cNvPr id="27" name="Text 25"/>
-          <p:cNvSpPr/>
-          <p:nvPr/>
-        </p:nvSpPr>
-        <p:spPr>
-          <a:xfrm>
-            <a:off x="4910328" y="3557016"/>
-            <a:ext cx="3657600" cy="384048"/>
-          </a:xfrm>
-          <a:prstGeom prst="rect">
-            <a:avLst/>
-          </a:prstGeom>
-          <a:noFill/>
-          <a:ln/>
-        </p:spPr>
-        <p:txBody>
-          <a:bodyPr wrap="square" lIns="0" tIns="0" rIns="0" bIns="0" rtlCol="0" anchor="ctr"/>
-          <a:lstStyle/>
-          <a:p>
-            <a:pPr indent="0" marL="0">
-              <a:buNone/>
-            </a:pPr>
-            <a:r>
-              <a:rPr lang="en-US" sz="1050" dirty="0">
-                <a:solidFill>
-                  <a:srgbClr val="76838F"/>
-                </a:solidFill>
-                <a:latin typeface="Calibri" pitchFamily="34" charset="0"/>
-                <a:ea typeface="Calibri" pitchFamily="34" charset="-122"/>
-                <a:cs typeface="Calibri" pitchFamily="34" charset="-120"/>
-              </a:rPr>
-              <a:t>persisted operations = the consumer's exact field usage</a:t>
-            </a:r>
-            <a:endParaRPr lang="en-US" sz="1050" dirty="0"/>
-          </a:p>
-        </p:txBody>
-      </p:sp>
-      <p:sp>
-        <p:nvSpPr>
-          <p:cNvPr id="28" name="Shape 26"/>
-          <p:cNvSpPr/>
-          <p:nvPr/>
-        </p:nvSpPr>
-        <p:spPr>
-          <a:xfrm>
-            <a:off x="457200" y="4261104"/>
-            <a:ext cx="8229600" cy="603504"/>
-          </a:xfrm>
-          <a:prstGeom prst="rect">
-            <a:avLst/>
-          </a:prstGeom>
-          <a:solidFill>
-            <a:srgbClr val="22303C"/>
-          </a:solidFill>
-          <a:ln/>
-        </p:spPr>
-      </p:sp>
-      <p:sp>
-        <p:nvSpPr>
-          <p:cNvPr id="29" name="Text 27"/>
-          <p:cNvSpPr/>
-          <p:nvPr/>
-        </p:nvSpPr>
-        <p:spPr>
-          <a:xfrm>
-            <a:off x="731520" y="4261104"/>
-            <a:ext cx="7680960" cy="603504"/>
-          </a:xfrm>
-          <a:prstGeom prst="rect">
-            <a:avLst/>
-          </a:prstGeom>
-          <a:noFill/>
-          <a:ln/>
-        </p:spPr>
-        <p:txBody>
-          <a:bodyPr wrap="square" lIns="0" tIns="0" rIns="0" bIns="0" rtlCol="0" anchor="ctr"/>
-          <a:lstStyle/>
-          <a:p>
-            <a:pPr indent="0" marL="0">
-              <a:buNone/>
-            </a:pPr>
-            <a:r>
-              <a:rPr lang="en-US" sz="1250" b="1" dirty="0">
-                <a:solidFill>
-                  <a:srgbClr val="F4F1EC"/>
-                </a:solidFill>
-                <a:latin typeface="Calibri" pitchFamily="34" charset="0"/>
-                <a:ea typeface="Calibri" pitchFamily="34" charset="-122"/>
-                <a:cs typeface="Calibri" pitchFamily="34" charset="-120"/>
-              </a:rPr>
-              <a:t>14-case conformance corpus:  </a:t>
-            </a:r>
-            <a:pPr indent="0" marL="0">
-              <a:buNone/>
-            </a:pPr>
-            <a:r>
-              <a:rPr lang="en-US" sz="1250" dirty="0">
-                <a:solidFill>
-                  <a:srgbClr val="9FB0BD"/>
-                </a:solidFill>
-                <a:latin typeface="Calibri" pitchFamily="34" charset="0"/>
-                <a:ea typeface="Calibri" pitchFamily="34" charset="-122"/>
-                <a:cs typeface="Calibri" pitchFamily="34" charset="-120"/>
-              </a:rPr>
-              <a:t>Java, TS, Go and Python produce hash-identical IR; the same kit certifies community extractors.</a:t>
+              <a:t>wirefit prints the same deploy matrix from a git repo (slide 6) — same answer, zero servers.</a:t>
             </a:r>
             <a:endParaRPr lang="en-US" sz="1250" dirty="0"/>
           </a:p>
@@ -7372,7 +9000,7 @@
                 <a:ea typeface="Trebuchet MS" pitchFamily="34" charset="-122"/>
                 <a:cs typeface="Trebuchet MS" pitchFamily="34" charset="-120"/>
               </a:rPr>
-              <a:t>A gate teams don't turn off</a:t>
+              <a:t>One gate for every stack</a:t>
             </a:r>
             <a:endParaRPr lang="en-US" sz="3000" dirty="0"/>
           </a:p>
@@ -7411,7 +9039,7 @@
                 <a:ea typeface="Calibri" pitchFamily="34" charset="-122"/>
                 <a:cs typeface="Calibri" pitchFamily="34" charset="-120"/>
               </a:rPr>
-              <a:t>escape hatches that stay auditable</a:t>
+              <a:t>same logical type → byte-identical IR, enforced in CI</a:t>
             </a:r>
             <a:endParaRPr lang="en-US" sz="1300" dirty="0"/>
           </a:p>
@@ -7425,8 +9053,788 @@
         </p:nvSpPr>
         <p:spPr>
           <a:xfrm>
-            <a:off x="457200" y="1280160"/>
-            <a:ext cx="1737360" cy="713232"/>
+            <a:off x="457200" y="1261872"/>
+            <a:ext cx="4005072" cy="804672"/>
+          </a:xfrm>
+          <a:prstGeom prst="rect">
+            <a:avLst/>
+          </a:prstGeom>
+          <a:solidFill>
+            <a:srgbClr val="FFFFFF"/>
+          </a:solidFill>
+          <a:ln w="9525">
+            <a:solidFill>
+              <a:srgbClr val="E4DFD6"/>
+            </a:solidFill>
+            <a:prstDash val="solid"/>
+          </a:ln>
+          <a:effectLst>
+            <a:outerShdw sx="100000" sy="100000" kx="0" ky="0" algn="bl" rotWithShape="0" blurRad="63500" dist="25400" dir="8100000">
+              <a:srgbClr val="000000">
+                <a:alpha val="12000"/>
+              </a:srgbClr>
+            </a:outerShdw>
+          </a:effectLst>
+        </p:spPr>
+      </p:sp>
+      <p:sp>
+        <p:nvSpPr>
+          <p:cNvPr id="5" name="Shape 3"/>
+          <p:cNvSpPr/>
+          <p:nvPr/>
+        </p:nvSpPr>
+        <p:spPr>
+          <a:xfrm>
+            <a:off x="457200" y="1261872"/>
+            <a:ext cx="64008" cy="804672"/>
+          </a:xfrm>
+          <a:prstGeom prst="rect">
+            <a:avLst/>
+          </a:prstGeom>
+          <a:solidFill>
+            <a:srgbClr val="C96F3B"/>
+          </a:solidFill>
+          <a:ln/>
+        </p:spPr>
+      </p:sp>
+      <p:sp>
+        <p:nvSpPr>
+          <p:cNvPr id="6" name="Text 4"/>
+          <p:cNvSpPr/>
+          <p:nvPr/>
+        </p:nvSpPr>
+        <p:spPr>
+          <a:xfrm>
+            <a:off x="685800" y="1353312"/>
+            <a:ext cx="3611880" cy="256032"/>
+          </a:xfrm>
+          <a:prstGeom prst="rect">
+            <a:avLst/>
+          </a:prstGeom>
+          <a:noFill/>
+          <a:ln/>
+        </p:spPr>
+        <p:txBody>
+          <a:bodyPr wrap="square" lIns="0" tIns="0" rIns="0" bIns="0" rtlCol="0" anchor="ctr"/>
+          <a:lstStyle/>
+          <a:p>
+            <a:pPr indent="0" marL="0">
+              <a:buNone/>
+            </a:pPr>
+            <a:r>
+              <a:rPr lang="en-US" sz="1300" b="1" dirty="0">
+                <a:solidFill>
+                  <a:srgbClr val="26313B"/>
+                </a:solidFill>
+                <a:latin typeface="Trebuchet MS" pitchFamily="34" charset="0"/>
+                <a:ea typeface="Trebuchet MS" pitchFamily="34" charset="-122"/>
+                <a:cs typeface="Trebuchet MS" pitchFamily="34" charset="-120"/>
+              </a:rPr>
+              <a:t>Java / Kotlin</a:t>
+            </a:r>
+            <a:endParaRPr lang="en-US" sz="1300" dirty="0"/>
+          </a:p>
+        </p:txBody>
+      </p:sp>
+      <p:sp>
+        <p:nvSpPr>
+          <p:cNvPr id="7" name="Text 5"/>
+          <p:cNvSpPr/>
+          <p:nvPr/>
+        </p:nvSpPr>
+        <p:spPr>
+          <a:xfrm>
+            <a:off x="685800" y="1618488"/>
+            <a:ext cx="3657600" cy="384048"/>
+          </a:xfrm>
+          <a:prstGeom prst="rect">
+            <a:avLst/>
+          </a:prstGeom>
+          <a:noFill/>
+          <a:ln/>
+        </p:spPr>
+        <p:txBody>
+          <a:bodyPr wrap="square" lIns="0" tIns="0" rIns="0" bIns="0" rtlCol="0" anchor="ctr"/>
+          <a:lstStyle/>
+          <a:p>
+            <a:pPr indent="0" marL="0">
+              <a:buNone/>
+            </a:pPr>
+            <a:r>
+              <a:rPr lang="en-US" sz="1050" dirty="0">
+                <a:solidFill>
+                  <a:srgbClr val="76838F"/>
+                </a:solidFill>
+                <a:latin typeface="Calibri" pitchFamily="34" charset="0"/>
+                <a:ea typeface="Calibri" pitchFamily="34" charset="-122"/>
+                <a:cs typeface="Calibri" pitchFamily="34" charset="-120"/>
+              </a:rPr>
+              <a:t>Jackson introspection — naming strategies, @JsonIgnore, Optional, jakarta @Nonnull</a:t>
+            </a:r>
+            <a:endParaRPr lang="en-US" sz="1050" dirty="0"/>
+          </a:p>
+        </p:txBody>
+      </p:sp>
+      <p:sp>
+        <p:nvSpPr>
+          <p:cNvPr id="8" name="Shape 6"/>
+          <p:cNvSpPr/>
+          <p:nvPr/>
+        </p:nvSpPr>
+        <p:spPr>
+          <a:xfrm>
+            <a:off x="4681728" y="1261872"/>
+            <a:ext cx="4005072" cy="804672"/>
+          </a:xfrm>
+          <a:prstGeom prst="rect">
+            <a:avLst/>
+          </a:prstGeom>
+          <a:solidFill>
+            <a:srgbClr val="FFFFFF"/>
+          </a:solidFill>
+          <a:ln w="9525">
+            <a:solidFill>
+              <a:srgbClr val="E4DFD6"/>
+            </a:solidFill>
+            <a:prstDash val="solid"/>
+          </a:ln>
+          <a:effectLst>
+            <a:outerShdw sx="100000" sy="100000" kx="0" ky="0" algn="bl" rotWithShape="0" blurRad="63500" dist="25400" dir="8100000">
+              <a:srgbClr val="000000">
+                <a:alpha val="12000"/>
+              </a:srgbClr>
+            </a:outerShdw>
+          </a:effectLst>
+        </p:spPr>
+      </p:sp>
+      <p:sp>
+        <p:nvSpPr>
+          <p:cNvPr id="9" name="Shape 7"/>
+          <p:cNvSpPr/>
+          <p:nvPr/>
+        </p:nvSpPr>
+        <p:spPr>
+          <a:xfrm>
+            <a:off x="4681728" y="1261872"/>
+            <a:ext cx="64008" cy="804672"/>
+          </a:xfrm>
+          <a:prstGeom prst="rect">
+            <a:avLst/>
+          </a:prstGeom>
+          <a:solidFill>
+            <a:srgbClr val="C96F3B"/>
+          </a:solidFill>
+          <a:ln/>
+        </p:spPr>
+      </p:sp>
+      <p:sp>
+        <p:nvSpPr>
+          <p:cNvPr id="10" name="Text 8"/>
+          <p:cNvSpPr/>
+          <p:nvPr/>
+        </p:nvSpPr>
+        <p:spPr>
+          <a:xfrm>
+            <a:off x="4910328" y="1353312"/>
+            <a:ext cx="3611880" cy="256032"/>
+          </a:xfrm>
+          <a:prstGeom prst="rect">
+            <a:avLst/>
+          </a:prstGeom>
+          <a:noFill/>
+          <a:ln/>
+        </p:spPr>
+        <p:txBody>
+          <a:bodyPr wrap="square" lIns="0" tIns="0" rIns="0" bIns="0" rtlCol="0" anchor="ctr"/>
+          <a:lstStyle/>
+          <a:p>
+            <a:pPr indent="0" marL="0">
+              <a:buNone/>
+            </a:pPr>
+            <a:r>
+              <a:rPr lang="en-US" sz="1300" b="1" dirty="0">
+                <a:solidFill>
+                  <a:srgbClr val="26313B"/>
+                </a:solidFill>
+                <a:latin typeface="Trebuchet MS" pitchFamily="34" charset="0"/>
+                <a:ea typeface="Trebuchet MS" pitchFamily="34" charset="-122"/>
+                <a:cs typeface="Trebuchet MS" pitchFamily="34" charset="-120"/>
+              </a:rPr>
+              <a:t>TypeScript + Zod</a:t>
+            </a:r>
+            <a:endParaRPr lang="en-US" sz="1300" dirty="0"/>
+          </a:p>
+        </p:txBody>
+      </p:sp>
+      <p:sp>
+        <p:nvSpPr>
+          <p:cNvPr id="11" name="Text 9"/>
+          <p:cNvSpPr/>
+          <p:nvPr/>
+        </p:nvSpPr>
+        <p:spPr>
+          <a:xfrm>
+            <a:off x="4910328" y="1618488"/>
+            <a:ext cx="3657600" cy="384048"/>
+          </a:xfrm>
+          <a:prstGeom prst="rect">
+            <a:avLst/>
+          </a:prstGeom>
+          <a:noFill/>
+          <a:ln/>
+        </p:spPr>
+        <p:txBody>
+          <a:bodyPr wrap="square" lIns="0" tIns="0" rIns="0" bIns="0" rtlCol="0" anchor="ctr"/>
+          <a:lstStyle/>
+          <a:p>
+            <a:pPr indent="0" marL="0">
+              <a:buNone/>
+            </a:pPr>
+            <a:r>
+              <a:rPr lang="en-US" sz="1050" dirty="0">
+                <a:solidFill>
+                  <a:srgbClr val="76838F"/>
+                </a:solidFill>
+                <a:latin typeface="Calibri" pitchFamily="34" charset="0"/>
+                <a:ea typeface="Calibri" pitchFamily="34" charset="-122"/>
+                <a:cs typeface="Calibri" pitchFamily="34" charset="-120"/>
+              </a:rPr>
+              <a:t>compiler API · z.toJSONSchema — ?: vs | null kept distinct</a:t>
+            </a:r>
+            <a:endParaRPr lang="en-US" sz="1050" dirty="0"/>
+          </a:p>
+        </p:txBody>
+      </p:sp>
+      <p:sp>
+        <p:nvSpPr>
+          <p:cNvPr id="12" name="Shape 10"/>
+          <p:cNvSpPr/>
+          <p:nvPr/>
+        </p:nvSpPr>
+        <p:spPr>
+          <a:xfrm>
+            <a:off x="457200" y="2231136"/>
+            <a:ext cx="4005072" cy="804672"/>
+          </a:xfrm>
+          <a:prstGeom prst="rect">
+            <a:avLst/>
+          </a:prstGeom>
+          <a:solidFill>
+            <a:srgbClr val="FFFFFF"/>
+          </a:solidFill>
+          <a:ln w="9525">
+            <a:solidFill>
+              <a:srgbClr val="E4DFD6"/>
+            </a:solidFill>
+            <a:prstDash val="solid"/>
+          </a:ln>
+          <a:effectLst>
+            <a:outerShdw sx="100000" sy="100000" kx="0" ky="0" algn="bl" rotWithShape="0" blurRad="63500" dist="25400" dir="8100000">
+              <a:srgbClr val="000000">
+                <a:alpha val="12000"/>
+              </a:srgbClr>
+            </a:outerShdw>
+          </a:effectLst>
+        </p:spPr>
+      </p:sp>
+      <p:sp>
+        <p:nvSpPr>
+          <p:cNvPr id="13" name="Shape 11"/>
+          <p:cNvSpPr/>
+          <p:nvPr/>
+        </p:nvSpPr>
+        <p:spPr>
+          <a:xfrm>
+            <a:off x="457200" y="2231136"/>
+            <a:ext cx="64008" cy="804672"/>
+          </a:xfrm>
+          <a:prstGeom prst="rect">
+            <a:avLst/>
+          </a:prstGeom>
+          <a:solidFill>
+            <a:srgbClr val="C96F3B"/>
+          </a:solidFill>
+          <a:ln/>
+        </p:spPr>
+      </p:sp>
+      <p:sp>
+        <p:nvSpPr>
+          <p:cNvPr id="14" name="Text 12"/>
+          <p:cNvSpPr/>
+          <p:nvPr/>
+        </p:nvSpPr>
+        <p:spPr>
+          <a:xfrm>
+            <a:off x="685800" y="2322576"/>
+            <a:ext cx="3611880" cy="256032"/>
+          </a:xfrm>
+          <a:prstGeom prst="rect">
+            <a:avLst/>
+          </a:prstGeom>
+          <a:noFill/>
+          <a:ln/>
+        </p:spPr>
+        <p:txBody>
+          <a:bodyPr wrap="square" lIns="0" tIns="0" rIns="0" bIns="0" rtlCol="0" anchor="ctr"/>
+          <a:lstStyle/>
+          <a:p>
+            <a:pPr indent="0" marL="0">
+              <a:buNone/>
+            </a:pPr>
+            <a:r>
+              <a:rPr lang="en-US" sz="1300" b="1" dirty="0">
+                <a:solidFill>
+                  <a:srgbClr val="26313B"/>
+                </a:solidFill>
+                <a:latin typeface="Trebuchet MS" pitchFamily="34" charset="0"/>
+                <a:ea typeface="Trebuchet MS" pitchFamily="34" charset="-122"/>
+                <a:cs typeface="Trebuchet MS" pitchFamily="34" charset="-120"/>
+              </a:rPr>
+              <a:t>Go</a:t>
+            </a:r>
+            <a:endParaRPr lang="en-US" sz="1300" dirty="0"/>
+          </a:p>
+        </p:txBody>
+      </p:sp>
+      <p:sp>
+        <p:nvSpPr>
+          <p:cNvPr id="15" name="Text 13"/>
+          <p:cNvSpPr/>
+          <p:nvPr/>
+        </p:nvSpPr>
+        <p:spPr>
+          <a:xfrm>
+            <a:off x="685800" y="2587752"/>
+            <a:ext cx="3657600" cy="384048"/>
+          </a:xfrm>
+          <a:prstGeom prst="rect">
+            <a:avLst/>
+          </a:prstGeom>
+          <a:noFill/>
+          <a:ln/>
+        </p:spPr>
+        <p:txBody>
+          <a:bodyPr wrap="square" lIns="0" tIns="0" rIns="0" bIns="0" rtlCol="0" anchor="ctr"/>
+          <a:lstStyle/>
+          <a:p>
+            <a:pPr indent="0" marL="0">
+              <a:buNone/>
+            </a:pPr>
+            <a:r>
+              <a:rPr lang="en-US" sz="1050" dirty="0">
+                <a:solidFill>
+                  <a:srgbClr val="76838F"/>
+                </a:solidFill>
+                <a:latin typeface="Calibri" pitchFamily="34" charset="0"/>
+                <a:ea typeface="Calibri" pitchFamily="34" charset="-122"/>
+                <a:cs typeface="Calibri" pitchFamily="34" charset="-120"/>
+              </a:rPr>
+              <a:t>reflection generated inside your module — internal/ packages just work</a:t>
+            </a:r>
+            <a:endParaRPr lang="en-US" sz="1050" dirty="0"/>
+          </a:p>
+        </p:txBody>
+      </p:sp>
+      <p:sp>
+        <p:nvSpPr>
+          <p:cNvPr id="16" name="Shape 14"/>
+          <p:cNvSpPr/>
+          <p:nvPr/>
+        </p:nvSpPr>
+        <p:spPr>
+          <a:xfrm>
+            <a:off x="4681728" y="2231136"/>
+            <a:ext cx="4005072" cy="804672"/>
+          </a:xfrm>
+          <a:prstGeom prst="rect">
+            <a:avLst/>
+          </a:prstGeom>
+          <a:solidFill>
+            <a:srgbClr val="FFFFFF"/>
+          </a:solidFill>
+          <a:ln w="9525">
+            <a:solidFill>
+              <a:srgbClr val="E4DFD6"/>
+            </a:solidFill>
+            <a:prstDash val="solid"/>
+          </a:ln>
+          <a:effectLst>
+            <a:outerShdw sx="100000" sy="100000" kx="0" ky="0" algn="bl" rotWithShape="0" blurRad="63500" dist="25400" dir="8100000">
+              <a:srgbClr val="000000">
+                <a:alpha val="12000"/>
+              </a:srgbClr>
+            </a:outerShdw>
+          </a:effectLst>
+        </p:spPr>
+      </p:sp>
+      <p:sp>
+        <p:nvSpPr>
+          <p:cNvPr id="17" name="Shape 15"/>
+          <p:cNvSpPr/>
+          <p:nvPr/>
+        </p:nvSpPr>
+        <p:spPr>
+          <a:xfrm>
+            <a:off x="4681728" y="2231136"/>
+            <a:ext cx="64008" cy="804672"/>
+          </a:xfrm>
+          <a:prstGeom prst="rect">
+            <a:avLst/>
+          </a:prstGeom>
+          <a:solidFill>
+            <a:srgbClr val="C96F3B"/>
+          </a:solidFill>
+          <a:ln/>
+        </p:spPr>
+      </p:sp>
+      <p:sp>
+        <p:nvSpPr>
+          <p:cNvPr id="18" name="Text 16"/>
+          <p:cNvSpPr/>
+          <p:nvPr/>
+        </p:nvSpPr>
+        <p:spPr>
+          <a:xfrm>
+            <a:off x="4910328" y="2322576"/>
+            <a:ext cx="3611880" cy="256032"/>
+          </a:xfrm>
+          <a:prstGeom prst="rect">
+            <a:avLst/>
+          </a:prstGeom>
+          <a:noFill/>
+          <a:ln/>
+        </p:spPr>
+        <p:txBody>
+          <a:bodyPr wrap="square" lIns="0" tIns="0" rIns="0" bIns="0" rtlCol="0" anchor="ctr"/>
+          <a:lstStyle/>
+          <a:p>
+            <a:pPr indent="0" marL="0">
+              <a:buNone/>
+            </a:pPr>
+            <a:r>
+              <a:rPr lang="en-US" sz="1300" b="1" dirty="0">
+                <a:solidFill>
+                  <a:srgbClr val="26313B"/>
+                </a:solidFill>
+                <a:latin typeface="Trebuchet MS" pitchFamily="34" charset="0"/>
+                <a:ea typeface="Trebuchet MS" pitchFamily="34" charset="-122"/>
+                <a:cs typeface="Trebuchet MS" pitchFamily="34" charset="-120"/>
+              </a:rPr>
+              <a:t>Python</a:t>
+            </a:r>
+            <a:endParaRPr lang="en-US" sz="1300" dirty="0"/>
+          </a:p>
+        </p:txBody>
+      </p:sp>
+      <p:sp>
+        <p:nvSpPr>
+          <p:cNvPr id="19" name="Text 17"/>
+          <p:cNvSpPr/>
+          <p:nvPr/>
+        </p:nvSpPr>
+        <p:spPr>
+          <a:xfrm>
+            <a:off x="4910328" y="2587752"/>
+            <a:ext cx="3657600" cy="384048"/>
+          </a:xfrm>
+          <a:prstGeom prst="rect">
+            <a:avLst/>
+          </a:prstGeom>
+          <a:noFill/>
+          <a:ln/>
+        </p:spPr>
+        <p:txBody>
+          <a:bodyPr wrap="square" lIns="0" tIns="0" rIns="0" bIns="0" rtlCol="0" anchor="ctr"/>
+          <a:lstStyle/>
+          <a:p>
+            <a:pPr indent="0" marL="0">
+              <a:buNone/>
+            </a:pPr>
+            <a:r>
+              <a:rPr lang="en-US" sz="1050" dirty="0">
+                <a:solidFill>
+                  <a:srgbClr val="76838F"/>
+                </a:solidFill>
+                <a:latin typeface="Calibri" pitchFamily="34" charset="0"/>
+                <a:ea typeface="Calibri" pitchFamily="34" charset="-122"/>
+                <a:cs typeface="Calibri" pitchFamily="34" charset="-120"/>
+              </a:rPr>
+              <a:t>pydantic v2, external extractor on the frozen protocol v1 (~200 lines)</a:t>
+            </a:r>
+            <a:endParaRPr lang="en-US" sz="1050" dirty="0"/>
+          </a:p>
+        </p:txBody>
+      </p:sp>
+      <p:sp>
+        <p:nvSpPr>
+          <p:cNvPr id="20" name="Shape 18"/>
+          <p:cNvSpPr/>
+          <p:nvPr/>
+        </p:nvSpPr>
+        <p:spPr>
+          <a:xfrm>
+            <a:off x="457200" y="3200400"/>
+            <a:ext cx="4005072" cy="804672"/>
+          </a:xfrm>
+          <a:prstGeom prst="rect">
+            <a:avLst/>
+          </a:prstGeom>
+          <a:solidFill>
+            <a:srgbClr val="FFFFFF"/>
+          </a:solidFill>
+          <a:ln w="9525">
+            <a:solidFill>
+              <a:srgbClr val="E4DFD6"/>
+            </a:solidFill>
+            <a:prstDash val="solid"/>
+          </a:ln>
+          <a:effectLst>
+            <a:outerShdw sx="100000" sy="100000" kx="0" ky="0" algn="bl" rotWithShape="0" blurRad="63500" dist="25400" dir="8100000">
+              <a:srgbClr val="000000">
+                <a:alpha val="12000"/>
+              </a:srgbClr>
+            </a:outerShdw>
+          </a:effectLst>
+        </p:spPr>
+      </p:sp>
+      <p:sp>
+        <p:nvSpPr>
+          <p:cNvPr id="21" name="Shape 19"/>
+          <p:cNvSpPr/>
+          <p:nvPr/>
+        </p:nvSpPr>
+        <p:spPr>
+          <a:xfrm>
+            <a:off x="457200" y="3200400"/>
+            <a:ext cx="64008" cy="804672"/>
+          </a:xfrm>
+          <a:prstGeom prst="rect">
+            <a:avLst/>
+          </a:prstGeom>
+          <a:solidFill>
+            <a:srgbClr val="C96F3B"/>
+          </a:solidFill>
+          <a:ln/>
+        </p:spPr>
+      </p:sp>
+      <p:sp>
+        <p:nvSpPr>
+          <p:cNvPr id="22" name="Text 20"/>
+          <p:cNvSpPr/>
+          <p:nvPr/>
+        </p:nvSpPr>
+        <p:spPr>
+          <a:xfrm>
+            <a:off x="685800" y="3291840"/>
+            <a:ext cx="3611880" cy="256032"/>
+          </a:xfrm>
+          <a:prstGeom prst="rect">
+            <a:avLst/>
+          </a:prstGeom>
+          <a:noFill/>
+          <a:ln/>
+        </p:spPr>
+        <p:txBody>
+          <a:bodyPr wrap="square" lIns="0" tIns="0" rIns="0" bIns="0" rtlCol="0" anchor="ctr"/>
+          <a:lstStyle/>
+          <a:p>
+            <a:pPr indent="0" marL="0">
+              <a:buNone/>
+            </a:pPr>
+            <a:r>
+              <a:rPr lang="en-US" sz="1300" b="1" dirty="0">
+                <a:solidFill>
+                  <a:srgbClr val="26313B"/>
+                </a:solidFill>
+                <a:latin typeface="Trebuchet MS" pitchFamily="34" charset="0"/>
+                <a:ea typeface="Trebuchet MS" pitchFamily="34" charset="-122"/>
+                <a:cs typeface="Trebuchet MS" pitchFamily="34" charset="-120"/>
+              </a:rPr>
+              <a:t>proto3 · Avro · GraphQL</a:t>
+            </a:r>
+            <a:endParaRPr lang="en-US" sz="1300" dirty="0"/>
+          </a:p>
+        </p:txBody>
+      </p:sp>
+      <p:sp>
+        <p:nvSpPr>
+          <p:cNvPr id="23" name="Text 21"/>
+          <p:cNvSpPr/>
+          <p:nvPr/>
+        </p:nvSpPr>
+        <p:spPr>
+          <a:xfrm>
+            <a:off x="685800" y="3557016"/>
+            <a:ext cx="3657600" cy="384048"/>
+          </a:xfrm>
+          <a:prstGeom prst="rect">
+            <a:avLst/>
+          </a:prstGeom>
+          <a:noFill/>
+          <a:ln/>
+        </p:spPr>
+        <p:txBody>
+          <a:bodyPr wrap="square" lIns="0" tIns="0" rIns="0" bIns="0" rtlCol="0" anchor="ctr"/>
+          <a:lstStyle/>
+          <a:p>
+            <a:pPr indent="0" marL="0">
+              <a:buNone/>
+            </a:pPr>
+            <a:r>
+              <a:rPr lang="en-US" sz="1050" dirty="0">
+                <a:solidFill>
+                  <a:srgbClr val="76838F"/>
+                </a:solidFill>
+                <a:latin typeface="Calibri" pitchFamily="34" charset="0"/>
+                <a:ea typeface="Calibri" pitchFamily="34" charset="-122"/>
+                <a:cs typeface="Calibri" pitchFamily="34" charset="-120"/>
+              </a:rPr>
+              <a:t>schema files imported directly — the artifact IS the contract</a:t>
+            </a:r>
+            <a:endParaRPr lang="en-US" sz="1050" dirty="0"/>
+          </a:p>
+        </p:txBody>
+      </p:sp>
+      <p:sp>
+        <p:nvSpPr>
+          <p:cNvPr id="24" name="Shape 22"/>
+          <p:cNvSpPr/>
+          <p:nvPr/>
+        </p:nvSpPr>
+        <p:spPr>
+          <a:xfrm>
+            <a:off x="4681728" y="3200400"/>
+            <a:ext cx="4005072" cy="804672"/>
+          </a:xfrm>
+          <a:prstGeom prst="rect">
+            <a:avLst/>
+          </a:prstGeom>
+          <a:solidFill>
+            <a:srgbClr val="FFFFFF"/>
+          </a:solidFill>
+          <a:ln w="9525">
+            <a:solidFill>
+              <a:srgbClr val="E4DFD6"/>
+            </a:solidFill>
+            <a:prstDash val="solid"/>
+          </a:ln>
+          <a:effectLst>
+            <a:outerShdw sx="100000" sy="100000" kx="0" ky="0" algn="bl" rotWithShape="0" blurRad="63500" dist="25400" dir="8100000">
+              <a:srgbClr val="000000">
+                <a:alpha val="12000"/>
+              </a:srgbClr>
+            </a:outerShdw>
+          </a:effectLst>
+        </p:spPr>
+      </p:sp>
+      <p:sp>
+        <p:nvSpPr>
+          <p:cNvPr id="25" name="Shape 23"/>
+          <p:cNvSpPr/>
+          <p:nvPr/>
+        </p:nvSpPr>
+        <p:spPr>
+          <a:xfrm>
+            <a:off x="4681728" y="3200400"/>
+            <a:ext cx="64008" cy="804672"/>
+          </a:xfrm>
+          <a:prstGeom prst="rect">
+            <a:avLst/>
+          </a:prstGeom>
+          <a:solidFill>
+            <a:srgbClr val="C96F3B"/>
+          </a:solidFill>
+          <a:ln/>
+        </p:spPr>
+      </p:sp>
+      <p:sp>
+        <p:nvSpPr>
+          <p:cNvPr id="26" name="Text 24"/>
+          <p:cNvSpPr/>
+          <p:nvPr/>
+        </p:nvSpPr>
+        <p:spPr>
+          <a:xfrm>
+            <a:off x="4910328" y="3291840"/>
+            <a:ext cx="3611880" cy="256032"/>
+          </a:xfrm>
+          <a:prstGeom prst="rect">
+            <a:avLst/>
+          </a:prstGeom>
+          <a:noFill/>
+          <a:ln/>
+        </p:spPr>
+        <p:txBody>
+          <a:bodyPr wrap="square" lIns="0" tIns="0" rIns="0" bIns="0" rtlCol="0" anchor="ctr"/>
+          <a:lstStyle/>
+          <a:p>
+            <a:pPr indent="0" marL="0">
+              <a:buNone/>
+            </a:pPr>
+            <a:r>
+              <a:rPr lang="en-US" sz="1300" b="1" dirty="0">
+                <a:solidFill>
+                  <a:srgbClr val="26313B"/>
+                </a:solidFill>
+                <a:latin typeface="Trebuchet MS" pitchFamily="34" charset="0"/>
+                <a:ea typeface="Trebuchet MS" pitchFamily="34" charset="-122"/>
+                <a:cs typeface="Trebuchet MS" pitchFamily="34" charset="-120"/>
+              </a:rPr>
+              <a:t>GraphQL queries</a:t>
+            </a:r>
+            <a:endParaRPr lang="en-US" sz="1300" dirty="0"/>
+          </a:p>
+        </p:txBody>
+      </p:sp>
+      <p:sp>
+        <p:nvSpPr>
+          <p:cNvPr id="27" name="Text 25"/>
+          <p:cNvSpPr/>
+          <p:nvPr/>
+        </p:nvSpPr>
+        <p:spPr>
+          <a:xfrm>
+            <a:off x="4910328" y="3557016"/>
+            <a:ext cx="3657600" cy="384048"/>
+          </a:xfrm>
+          <a:prstGeom prst="rect">
+            <a:avLst/>
+          </a:prstGeom>
+          <a:noFill/>
+          <a:ln/>
+        </p:spPr>
+        <p:txBody>
+          <a:bodyPr wrap="square" lIns="0" tIns="0" rIns="0" bIns="0" rtlCol="0" anchor="ctr"/>
+          <a:lstStyle/>
+          <a:p>
+            <a:pPr indent="0" marL="0">
+              <a:buNone/>
+            </a:pPr>
+            <a:r>
+              <a:rPr lang="en-US" sz="1050" dirty="0">
+                <a:solidFill>
+                  <a:srgbClr val="76838F"/>
+                </a:solidFill>
+                <a:latin typeface="Calibri" pitchFamily="34" charset="0"/>
+                <a:ea typeface="Calibri" pitchFamily="34" charset="-122"/>
+                <a:cs typeface="Calibri" pitchFamily="34" charset="-120"/>
+              </a:rPr>
+              <a:t>persisted operations = the consumer's exact field usage</a:t>
+            </a:r>
+            <a:endParaRPr lang="en-US" sz="1050" dirty="0"/>
+          </a:p>
+        </p:txBody>
+      </p:sp>
+      <p:sp>
+        <p:nvSpPr>
+          <p:cNvPr id="28" name="Shape 26"/>
+          <p:cNvSpPr/>
+          <p:nvPr/>
+        </p:nvSpPr>
+        <p:spPr>
+          <a:xfrm>
+            <a:off x="457200" y="4261104"/>
+            <a:ext cx="8229600" cy="603504"/>
           </a:xfrm>
           <a:prstGeom prst="rect">
             <a:avLst/>
@@ -7439,373 +9847,54 @@
       </p:sp>
       <p:sp>
         <p:nvSpPr>
-          <p:cNvPr id="5" name="Text 3"/>
-          <p:cNvSpPr/>
-          <p:nvPr/>
-        </p:nvSpPr>
-        <p:spPr>
-          <a:xfrm>
-            <a:off x="457200" y="1280160"/>
-            <a:ext cx="1737360" cy="713232"/>
-          </a:xfrm>
-          <a:prstGeom prst="rect">
-            <a:avLst/>
-          </a:prstGeom>
-          <a:noFill/>
-          <a:ln/>
-        </p:spPr>
-        <p:txBody>
-          <a:bodyPr wrap="square" lIns="0" tIns="0" rIns="0" bIns="0" rtlCol="0" anchor="ctr"/>
-          <a:lstStyle/>
-          <a:p>
-            <a:pPr algn="ctr" indent="0" marL="0">
-              <a:buNone/>
-            </a:pPr>
-            <a:r>
-              <a:rPr lang="en-US" sz="1350" b="1" dirty="0">
+          <p:cNvPr id="29" name="Text 27"/>
+          <p:cNvSpPr/>
+          <p:nvPr/>
+        </p:nvSpPr>
+        <p:spPr>
+          <a:xfrm>
+            <a:off x="731520" y="4261104"/>
+            <a:ext cx="7680960" cy="603504"/>
+          </a:xfrm>
+          <a:prstGeom prst="rect">
+            <a:avLst/>
+          </a:prstGeom>
+          <a:noFill/>
+          <a:ln/>
+        </p:spPr>
+        <p:txBody>
+          <a:bodyPr wrap="square" lIns="0" tIns="0" rIns="0" bIns="0" rtlCol="0" anchor="ctr"/>
+          <a:lstStyle/>
+          <a:p>
+            <a:pPr indent="0" marL="0">
+              <a:buNone/>
+            </a:pPr>
+            <a:r>
+              <a:rPr lang="en-US" sz="1250" b="1" dirty="0">
                 <a:solidFill>
                   <a:srgbClr val="F4F1EC"/>
-                </a:solidFill>
-                <a:latin typeface="Trebuchet MS" pitchFamily="34" charset="0"/>
-                <a:ea typeface="Trebuchet MS" pitchFamily="34" charset="-122"/>
-                <a:cs typeface="Trebuchet MS" pitchFamily="34" charset="-120"/>
-              </a:rPr>
-              <a:t>overrides</a:t>
-            </a:r>
-            <a:endParaRPr lang="en-US" sz="1350" dirty="0"/>
-          </a:p>
-        </p:txBody>
-      </p:sp>
-      <p:sp>
-        <p:nvSpPr>
-          <p:cNvPr id="6" name="Text 4"/>
-          <p:cNvSpPr/>
-          <p:nvPr/>
-        </p:nvSpPr>
-        <p:spPr>
-          <a:xfrm>
-            <a:off x="2423160" y="1280160"/>
-            <a:ext cx="6217920" cy="713232"/>
-          </a:xfrm>
-          <a:prstGeom prst="rect">
-            <a:avLst/>
-          </a:prstGeom>
-          <a:noFill/>
-          <a:ln/>
-        </p:spPr>
-        <p:txBody>
-          <a:bodyPr wrap="square" lIns="0" tIns="0" rIns="0" bIns="0" rtlCol="0" anchor="ctr"/>
-          <a:lstStyle/>
-          <a:p>
-            <a:pPr indent="0" marL="0">
-              <a:buNone/>
-            </a:pPr>
-            <a:r>
-              <a:rPr lang="en-US" sz="1150" dirty="0">
-                <a:solidFill>
-                  <a:srgbClr val="26313B"/>
                 </a:solidFill>
                 <a:latin typeface="Calibri" pitchFamily="34" charset="0"/>
                 <a:ea typeface="Calibri" pitchFamily="34" charset="-122"/>
                 <a:cs typeface="Calibri" pitchFamily="34" charset="-120"/>
               </a:rPr>
-              <a:t>One finding, one interaction — with mandatory justification and expiry (max 180 days). Stale or expired overrides fail the build. Rendered in the PR comment: exceptions are never silent.</a:t>
-            </a:r>
-            <a:endParaRPr lang="en-US" sz="1150" dirty="0"/>
-          </a:p>
-        </p:txBody>
-      </p:sp>
-      <p:sp>
-        <p:nvSpPr>
-          <p:cNvPr id="7" name="Shape 5"/>
-          <p:cNvSpPr/>
-          <p:nvPr/>
-        </p:nvSpPr>
-        <p:spPr>
-          <a:xfrm>
-            <a:off x="457200" y="2185416"/>
-            <a:ext cx="1737360" cy="713232"/>
-          </a:xfrm>
-          <a:prstGeom prst="rect">
-            <a:avLst/>
-          </a:prstGeom>
-          <a:solidFill>
-            <a:srgbClr val="22303C"/>
-          </a:solidFill>
-          <a:ln/>
-        </p:spPr>
-      </p:sp>
-      <p:sp>
-        <p:nvSpPr>
-          <p:cNvPr id="8" name="Text 6"/>
-          <p:cNvSpPr/>
-          <p:nvPr/>
-        </p:nvSpPr>
-        <p:spPr>
-          <a:xfrm>
-            <a:off x="457200" y="2185416"/>
-            <a:ext cx="1737360" cy="713232"/>
-          </a:xfrm>
-          <a:prstGeom prst="rect">
-            <a:avLst/>
-          </a:prstGeom>
-          <a:noFill/>
-          <a:ln/>
-        </p:spPr>
-        <p:txBody>
-          <a:bodyPr wrap="square" lIns="0" tIns="0" rIns="0" bIns="0" rtlCol="0" anchor="ctr"/>
-          <a:lstStyle/>
-          <a:p>
-            <a:pPr algn="ctr" indent="0" marL="0">
-              <a:buNone/>
-            </a:pPr>
-            <a:r>
-              <a:rPr lang="en-US" sz="1350" b="1" dirty="0">
-                <a:solidFill>
-                  <a:srgbClr val="F4F1EC"/>
-                </a:solidFill>
-                <a:latin typeface="Trebuchet MS" pitchFamily="34" charset="0"/>
-                <a:ea typeface="Trebuchet MS" pitchFamily="34" charset="-122"/>
-                <a:cs typeface="Trebuchet MS" pitchFamily="34" charset="-120"/>
-              </a:rPr>
-              <a:t>org policy</a:t>
-            </a:r>
-            <a:endParaRPr lang="en-US" sz="1350" dirty="0"/>
-          </a:p>
-        </p:txBody>
-      </p:sp>
-      <p:sp>
-        <p:nvSpPr>
-          <p:cNvPr id="9" name="Text 7"/>
-          <p:cNvSpPr/>
-          <p:nvPr/>
-        </p:nvSpPr>
-        <p:spPr>
-          <a:xfrm>
-            <a:off x="2423160" y="2185416"/>
-            <a:ext cx="6217920" cy="713232"/>
-          </a:xfrm>
-          <a:prstGeom prst="rect">
-            <a:avLst/>
-          </a:prstGeom>
-          <a:noFill/>
-          <a:ln/>
-        </p:spPr>
-        <p:txBody>
-          <a:bodyPr wrap="square" lIns="0" tIns="0" rIns="0" bIns="0" rtlCol="0" anchor="ctr"/>
-          <a:lstStyle/>
-          <a:p>
-            <a:pPr indent="0" marL="0">
-              <a:buNone/>
-            </a:pPr>
-            <a:r>
-              <a:rPr lang="en-US" sz="1150" dirty="0">
-                <a:solidFill>
-                  <a:srgbClr val="26313B"/>
+              <a:t>14-case conformance corpus:  </a:t>
+            </a:r>
+            <a:pPr indent="0" marL="0">
+              <a:buNone/>
+            </a:pPr>
+            <a:r>
+              <a:rPr lang="en-US" sz="1250" dirty="0">
+                <a:solidFill>
+                  <a:srgbClr val="9FB0BD"/>
                 </a:solidFill>
                 <a:latin typeface="Calibri" pitchFamily="34" charset="0"/>
                 <a:ea typeface="Calibri" pitchFamily="34" charset="-122"/>
                 <a:cs typeface="Calibri" pitchFamily="34" charset="-120"/>
               </a:rPr>
-              <a:t>policy.yaml in the contracts repo: reclassify any rule org-wide, or mark it overridable: false. Governed by that repo's own code review.</a:t>
-            </a:r>
-            <a:endParaRPr lang="en-US" sz="1150" dirty="0"/>
-          </a:p>
-        </p:txBody>
-      </p:sp>
-      <p:sp>
-        <p:nvSpPr>
-          <p:cNvPr id="10" name="Shape 8"/>
-          <p:cNvSpPr/>
-          <p:nvPr/>
-        </p:nvSpPr>
-        <p:spPr>
-          <a:xfrm>
-            <a:off x="457200" y="3090672"/>
-            <a:ext cx="1737360" cy="713232"/>
-          </a:xfrm>
-          <a:prstGeom prst="rect">
-            <a:avLst/>
-          </a:prstGeom>
-          <a:solidFill>
-            <a:srgbClr val="22303C"/>
-          </a:solidFill>
-          <a:ln/>
-        </p:spPr>
-      </p:sp>
-      <p:sp>
-        <p:nvSpPr>
-          <p:cNvPr id="11" name="Text 9"/>
-          <p:cNvSpPr/>
-          <p:nvPr/>
-        </p:nvSpPr>
-        <p:spPr>
-          <a:xfrm>
-            <a:off x="457200" y="3090672"/>
-            <a:ext cx="1737360" cy="713232"/>
-          </a:xfrm>
-          <a:prstGeom prst="rect">
-            <a:avLst/>
-          </a:prstGeom>
-          <a:noFill/>
-          <a:ln/>
-        </p:spPr>
-        <p:txBody>
-          <a:bodyPr wrap="square" lIns="0" tIns="0" rIns="0" bIns="0" rtlCol="0" anchor="ctr"/>
-          <a:lstStyle/>
-          <a:p>
-            <a:pPr algn="ctr" indent="0" marL="0">
-              <a:buNone/>
-            </a:pPr>
-            <a:r>
-              <a:rPr lang="en-US" sz="1350" b="1" dirty="0">
-                <a:solidFill>
-                  <a:srgbClr val="F4F1EC"/>
-                </a:solidFill>
-                <a:latin typeface="Trebuchet MS" pitchFamily="34" charset="0"/>
-                <a:ea typeface="Trebuchet MS" pitchFamily="34" charset="-122"/>
-                <a:cs typeface="Trebuchet MS" pitchFamily="34" charset="-120"/>
-              </a:rPr>
-              <a:t>mirror check</a:t>
-            </a:r>
-            <a:endParaRPr lang="en-US" sz="1350" dirty="0"/>
-          </a:p>
-        </p:txBody>
-      </p:sp>
-      <p:sp>
-        <p:nvSpPr>
-          <p:cNvPr id="12" name="Text 10"/>
-          <p:cNvSpPr/>
-          <p:nvPr/>
-        </p:nvSpPr>
-        <p:spPr>
-          <a:xfrm>
-            <a:off x="2423160" y="3090672"/>
-            <a:ext cx="6217920" cy="713232"/>
-          </a:xfrm>
-          <a:prstGeom prst="rect">
-            <a:avLst/>
-          </a:prstGeom>
-          <a:noFill/>
-          <a:ln/>
-        </p:spPr>
-        <p:txBody>
-          <a:bodyPr wrap="square" lIns="0" tIns="0" rIns="0" bIns="0" rtlCol="0" anchor="ctr"/>
-          <a:lstStyle/>
-          <a:p>
-            <a:pPr indent="0" marL="0">
-              <a:buNone/>
-            </a:pPr>
-            <a:r>
-              <a:rPr lang="en-US" sz="1150" dirty="0">
-                <a:solidFill>
-                  <a:srgbClr val="26313B"/>
-                </a:solidFill>
-                <a:latin typeface="Calibri" pitchFamily="34" charset="0"/>
-                <a:ea typeface="Calibri" pitchFamily="34" charset="-122"/>
-                <a:cs typeface="Calibri" pitchFamily="34" charset="-120"/>
-              </a:rPr>
-              <a:t>dto + schema on one interaction must agree byte-for-byte. Drift between code and schema file is unoverridable — exit 1, field-level report.</a:t>
-            </a:r>
-            <a:endParaRPr lang="en-US" sz="1150" dirty="0"/>
-          </a:p>
-        </p:txBody>
-      </p:sp>
-      <p:sp>
-        <p:nvSpPr>
-          <p:cNvPr id="13" name="Shape 11"/>
-          <p:cNvSpPr/>
-          <p:nvPr/>
-        </p:nvSpPr>
-        <p:spPr>
-          <a:xfrm>
-            <a:off x="457200" y="3995928"/>
-            <a:ext cx="1737360" cy="713232"/>
-          </a:xfrm>
-          <a:prstGeom prst="rect">
-            <a:avLst/>
-          </a:prstGeom>
-          <a:solidFill>
-            <a:srgbClr val="22303C"/>
-          </a:solidFill>
-          <a:ln/>
-        </p:spPr>
-      </p:sp>
-      <p:sp>
-        <p:nvSpPr>
-          <p:cNvPr id="14" name="Text 12"/>
-          <p:cNvSpPr/>
-          <p:nvPr/>
-        </p:nvSpPr>
-        <p:spPr>
-          <a:xfrm>
-            <a:off x="457200" y="3995928"/>
-            <a:ext cx="1737360" cy="713232"/>
-          </a:xfrm>
-          <a:prstGeom prst="rect">
-            <a:avLst/>
-          </a:prstGeom>
-          <a:noFill/>
-          <a:ln/>
-        </p:spPr>
-        <p:txBody>
-          <a:bodyPr wrap="square" lIns="0" tIns="0" rIns="0" bIns="0" rtlCol="0" anchor="ctr"/>
-          <a:lstStyle/>
-          <a:p>
-            <a:pPr algn="ctr" indent="0" marL="0">
-              <a:buNone/>
-            </a:pPr>
-            <a:r>
-              <a:rPr lang="en-US" sz="1350" b="1" dirty="0">
-                <a:solidFill>
-                  <a:srgbClr val="F4F1EC"/>
-                </a:solidFill>
-                <a:latin typeface="Trebuchet MS" pitchFamily="34" charset="0"/>
-                <a:ea typeface="Trebuchet MS" pitchFamily="34" charset="-122"/>
-                <a:cs typeface="Trebuchet MS" pitchFamily="34" charset="-120"/>
-              </a:rPr>
-              <a:t>never guess</a:t>
-            </a:r>
-            <a:endParaRPr lang="en-US" sz="1350" dirty="0"/>
-          </a:p>
-        </p:txBody>
-      </p:sp>
-      <p:sp>
-        <p:nvSpPr>
-          <p:cNvPr id="15" name="Text 13"/>
-          <p:cNvSpPr/>
-          <p:nvPr/>
-        </p:nvSpPr>
-        <p:spPr>
-          <a:xfrm>
-            <a:off x="2423160" y="3995928"/>
-            <a:ext cx="6217920" cy="713232"/>
-          </a:xfrm>
-          <a:prstGeom prst="rect">
-            <a:avLst/>
-          </a:prstGeom>
-          <a:noFill/>
-          <a:ln/>
-        </p:spPr>
-        <p:txBody>
-          <a:bodyPr wrap="square" lIns="0" tIns="0" rIns="0" bIns="0" rtlCol="0" anchor="ctr"/>
-          <a:lstStyle/>
-          <a:p>
-            <a:pPr indent="0" marL="0">
-              <a:buNone/>
-            </a:pPr>
-            <a:r>
-              <a:rPr lang="en-US" sz="1150" dirty="0">
-                <a:solidFill>
-                  <a:srgbClr val="26313B"/>
-                </a:solidFill>
-                <a:latin typeface="Calibri" pitchFamily="34" charset="0"/>
-                <a:ea typeface="Calibri" pitchFamily="34" charset="-122"/>
-                <a:cs typeface="Calibri" pitchFamily="34" charset="-120"/>
-              </a:rPr>
-              <a:t>any, tuples, uint64, open inheritance, non-null Avro unions… are loud, named errors — not silently wrong schemas.</a:t>
-            </a:r>
-            <a:endParaRPr lang="en-US" sz="1150" dirty="0"/>
+              <a:t>Java, TS, Go and Python produce hash-identical IR; the same kit certifies community extractors.</a:t>
+            </a:r>
+            <a:endParaRPr lang="en-US" sz="1250" dirty="0"/>
           </a:p>
         </p:txBody>
       </p:sp>
@@ -7874,7 +9963,7 @@
                 <a:ea typeface="Trebuchet MS" pitchFamily="34" charset="-122"/>
                 <a:cs typeface="Trebuchet MS" pitchFamily="34" charset="-120"/>
               </a:rPr>
-              <a:t>How it hangs together</a:t>
+              <a:t>A gate teams don't turn off</a:t>
             </a:r>
             <a:endParaRPr lang="en-US" sz="3000" dirty="0"/>
           </a:p>
@@ -7913,7 +10002,7 @@
                 <a:ea typeface="Calibri" pitchFamily="34" charset="-122"/>
                 <a:cs typeface="Calibri" pitchFamily="34" charset="-120"/>
               </a:rPr>
-              <a:t>every box is a file or a process you already run</a:t>
+              <a:t>escape hatches that stay auditable</a:t>
             </a:r>
             <a:endParaRPr lang="en-US" sz="1300" dirty="0"/>
           </a:p>
@@ -7927,28 +10016,16 @@
         </p:nvSpPr>
         <p:spPr>
           <a:xfrm>
-            <a:off x="457200" y="1417320"/>
-            <a:ext cx="1481328" cy="1097280"/>
+            <a:off x="457200" y="1280160"/>
+            <a:ext cx="1737360" cy="713232"/>
           </a:xfrm>
           <a:prstGeom prst="rect">
             <a:avLst/>
           </a:prstGeom>
           <a:solidFill>
-            <a:srgbClr val="FFFFFF"/>
+            <a:srgbClr val="22303C"/>
           </a:solidFill>
-          <a:ln w="9525">
-            <a:solidFill>
-              <a:srgbClr val="E4DFD6"/>
-            </a:solidFill>
-            <a:prstDash val="solid"/>
-          </a:ln>
-          <a:effectLst>
-            <a:outerShdw sx="100000" sy="100000" kx="0" ky="0" algn="bl" rotWithShape="0" blurRad="63500" dist="25400" dir="8100000">
-              <a:srgbClr val="000000">
-                <a:alpha val="12000"/>
-              </a:srgbClr>
-            </a:outerShdw>
-          </a:effectLst>
+          <a:ln/>
         </p:spPr>
       </p:sp>
       <p:sp>
@@ -7959,8 +10036,8 @@
         </p:nvSpPr>
         <p:spPr>
           <a:xfrm>
-            <a:off x="512064" y="1554480"/>
-            <a:ext cx="1371600" cy="502920"/>
+            <a:off x="457200" y="1280160"/>
+            <a:ext cx="1737360" cy="713232"/>
           </a:xfrm>
           <a:prstGeom prst="rect">
             <a:avLst/>
@@ -7976,17 +10053,17 @@
               <a:buNone/>
             </a:pPr>
             <a:r>
-              <a:rPr lang="en-US" sz="1150" b="1" dirty="0">
-                <a:solidFill>
-                  <a:srgbClr val="26313B"/>
+              <a:rPr lang="en-US" sz="1350" b="1" dirty="0">
+                <a:solidFill>
+                  <a:srgbClr val="F4F1EC"/>
                 </a:solidFill>
                 <a:latin typeface="Trebuchet MS" pitchFamily="34" charset="0"/>
                 <a:ea typeface="Trebuchet MS" pitchFamily="34" charset="-122"/>
                 <a:cs typeface="Trebuchet MS" pitchFamily="34" charset="-120"/>
               </a:rPr>
-              <a:t>DTOs &amp; schemas</a:t>
-            </a:r>
-            <a:endParaRPr lang="en-US" sz="1150" dirty="0"/>
+              <a:t>overrides</a:t>
+            </a:r>
+            <a:endParaRPr lang="en-US" sz="1350" dirty="0"/>
           </a:p>
         </p:txBody>
       </p:sp>
@@ -7998,47 +10075,67 @@
         </p:nvSpPr>
         <p:spPr>
           <a:xfrm>
-            <a:off x="512064" y="2029968"/>
-            <a:ext cx="1371600" cy="411480"/>
-          </a:xfrm>
-          <a:prstGeom prst="rect">
-            <a:avLst/>
-          </a:prstGeom>
-          <a:noFill/>
-          <a:ln/>
-        </p:spPr>
-        <p:txBody>
-          <a:bodyPr wrap="square" lIns="0" tIns="0" rIns="0" bIns="0" rtlCol="0" anchor="ctr"/>
-          <a:lstStyle/>
-          <a:p>
-            <a:pPr algn="ctr" indent="0" marL="0">
-              <a:buNone/>
-            </a:pPr>
-            <a:r>
-              <a:rPr lang="en-US" sz="950" dirty="0">
-                <a:solidFill>
-                  <a:srgbClr val="76838F"/>
+            <a:off x="2423160" y="1280160"/>
+            <a:ext cx="6217920" cy="713232"/>
+          </a:xfrm>
+          <a:prstGeom prst="rect">
+            <a:avLst/>
+          </a:prstGeom>
+          <a:noFill/>
+          <a:ln/>
+        </p:spPr>
+        <p:txBody>
+          <a:bodyPr wrap="square" lIns="0" tIns="0" rIns="0" bIns="0" rtlCol="0" anchor="ctr"/>
+          <a:lstStyle/>
+          <a:p>
+            <a:pPr indent="0" marL="0">
+              <a:buNone/>
+            </a:pPr>
+            <a:r>
+              <a:rPr lang="en-US" sz="1150" dirty="0">
+                <a:solidFill>
+                  <a:srgbClr val="26313B"/>
                 </a:solidFill>
                 <a:latin typeface="Calibri" pitchFamily="34" charset="0"/>
                 <a:ea typeface="Calibri" pitchFamily="34" charset="-122"/>
                 <a:cs typeface="Calibri" pitchFamily="34" charset="-120"/>
               </a:rPr>
-              <a:t>your code, untouched</a:t>
-            </a:r>
-            <a:endParaRPr lang="en-US" sz="950" dirty="0"/>
-          </a:p>
-        </p:txBody>
-      </p:sp>
-      <p:sp>
-        <p:nvSpPr>
-          <p:cNvPr id="7" name="Text 5"/>
-          <p:cNvSpPr/>
-          <p:nvPr/>
-        </p:nvSpPr>
-        <p:spPr>
-          <a:xfrm>
-            <a:off x="1920240" y="1828800"/>
-            <a:ext cx="260604" cy="365760"/>
+              <a:t>One finding, one interaction — with mandatory justification and expiry (max 180 days). Stale or expired overrides fail the build. Rendered in the PR comment: exceptions are never silent.</a:t>
+            </a:r>
+            <a:endParaRPr lang="en-US" sz="1150" dirty="0"/>
+          </a:p>
+        </p:txBody>
+      </p:sp>
+      <p:sp>
+        <p:nvSpPr>
+          <p:cNvPr id="7" name="Shape 5"/>
+          <p:cNvSpPr/>
+          <p:nvPr/>
+        </p:nvSpPr>
+        <p:spPr>
+          <a:xfrm>
+            <a:off x="457200" y="2185416"/>
+            <a:ext cx="1737360" cy="713232"/>
+          </a:xfrm>
+          <a:prstGeom prst="rect">
+            <a:avLst/>
+          </a:prstGeom>
+          <a:solidFill>
+            <a:srgbClr val="22303C"/>
+          </a:solidFill>
+          <a:ln/>
+        </p:spPr>
+      </p:sp>
+      <p:sp>
+        <p:nvSpPr>
+          <p:cNvPr id="8" name="Text 6"/>
+          <p:cNvSpPr/>
+          <p:nvPr/>
+        </p:nvSpPr>
+        <p:spPr>
+          <a:xfrm>
+            <a:off x="457200" y="2185416"/>
+            <a:ext cx="1737360" cy="713232"/>
           </a:xfrm>
           <a:prstGeom prst="rect">
             <a:avLst/>
@@ -8054,62 +10151,89 @@
               <a:buNone/>
             </a:pPr>
             <a:r>
-              <a:rPr lang="en-US" sz="1500" dirty="0">
-                <a:solidFill>
-                  <a:srgbClr val="C96F3B"/>
+              <a:rPr lang="en-US" sz="1350" b="1" dirty="0">
+                <a:solidFill>
+                  <a:srgbClr val="F4F1EC"/>
+                </a:solidFill>
+                <a:latin typeface="Trebuchet MS" pitchFamily="34" charset="0"/>
+                <a:ea typeface="Trebuchet MS" pitchFamily="34" charset="-122"/>
+                <a:cs typeface="Trebuchet MS" pitchFamily="34" charset="-120"/>
+              </a:rPr>
+              <a:t>org policy</a:t>
+            </a:r>
+            <a:endParaRPr lang="en-US" sz="1350" dirty="0"/>
+          </a:p>
+        </p:txBody>
+      </p:sp>
+      <p:sp>
+        <p:nvSpPr>
+          <p:cNvPr id="9" name="Text 7"/>
+          <p:cNvSpPr/>
+          <p:nvPr/>
+        </p:nvSpPr>
+        <p:spPr>
+          <a:xfrm>
+            <a:off x="2423160" y="2185416"/>
+            <a:ext cx="6217920" cy="713232"/>
+          </a:xfrm>
+          <a:prstGeom prst="rect">
+            <a:avLst/>
+          </a:prstGeom>
+          <a:noFill/>
+          <a:ln/>
+        </p:spPr>
+        <p:txBody>
+          <a:bodyPr wrap="square" lIns="0" tIns="0" rIns="0" bIns="0" rtlCol="0" anchor="ctr"/>
+          <a:lstStyle/>
+          <a:p>
+            <a:pPr indent="0" marL="0">
+              <a:buNone/>
+            </a:pPr>
+            <a:r>
+              <a:rPr lang="en-US" sz="1150" dirty="0">
+                <a:solidFill>
+                  <a:srgbClr val="26313B"/>
                 </a:solidFill>
                 <a:latin typeface="Calibri" pitchFamily="34" charset="0"/>
                 <a:ea typeface="Calibri" pitchFamily="34" charset="-122"/>
                 <a:cs typeface="Calibri" pitchFamily="34" charset="-120"/>
               </a:rPr>
-              <a:t>→</a:t>
-            </a:r>
-            <a:endParaRPr lang="en-US" sz="1500" dirty="0"/>
-          </a:p>
-        </p:txBody>
-      </p:sp>
-      <p:sp>
-        <p:nvSpPr>
-          <p:cNvPr id="8" name="Shape 6"/>
-          <p:cNvSpPr/>
-          <p:nvPr/>
-        </p:nvSpPr>
-        <p:spPr>
-          <a:xfrm>
-            <a:off x="2144268" y="1417320"/>
-            <a:ext cx="1481328" cy="1097280"/>
+              <a:t>policy.yaml in the contracts repo: reclassify any rule org-wide, or mark it overridable: false. Governed by that repo's own code review.</a:t>
+            </a:r>
+            <a:endParaRPr lang="en-US" sz="1150" dirty="0"/>
+          </a:p>
+        </p:txBody>
+      </p:sp>
+      <p:sp>
+        <p:nvSpPr>
+          <p:cNvPr id="10" name="Shape 8"/>
+          <p:cNvSpPr/>
+          <p:nvPr/>
+        </p:nvSpPr>
+        <p:spPr>
+          <a:xfrm>
+            <a:off x="457200" y="3090672"/>
+            <a:ext cx="1737360" cy="713232"/>
           </a:xfrm>
           <a:prstGeom prst="rect">
             <a:avLst/>
           </a:prstGeom>
           <a:solidFill>
-            <a:srgbClr val="FFFFFF"/>
+            <a:srgbClr val="22303C"/>
           </a:solidFill>
-          <a:ln w="9525">
-            <a:solidFill>
-              <a:srgbClr val="E4DFD6"/>
-            </a:solidFill>
-            <a:prstDash val="solid"/>
-          </a:ln>
-          <a:effectLst>
-            <a:outerShdw sx="100000" sy="100000" kx="0" ky="0" algn="bl" rotWithShape="0" blurRad="63500" dist="25400" dir="8100000">
-              <a:srgbClr val="000000">
-                <a:alpha val="12000"/>
-              </a:srgbClr>
-            </a:outerShdw>
-          </a:effectLst>
-        </p:spPr>
-      </p:sp>
-      <p:sp>
-        <p:nvSpPr>
-          <p:cNvPr id="9" name="Text 7"/>
-          <p:cNvSpPr/>
-          <p:nvPr/>
-        </p:nvSpPr>
-        <p:spPr>
-          <a:xfrm>
-            <a:off x="2199132" y="1554480"/>
-            <a:ext cx="1371600" cy="502920"/>
+          <a:ln/>
+        </p:spPr>
+      </p:sp>
+      <p:sp>
+        <p:nvSpPr>
+          <p:cNvPr id="11" name="Text 9"/>
+          <p:cNvSpPr/>
+          <p:nvPr/>
+        </p:nvSpPr>
+        <p:spPr>
+          <a:xfrm>
+            <a:off x="457200" y="3090672"/>
+            <a:ext cx="1737360" cy="713232"/>
           </a:xfrm>
           <a:prstGeom prst="rect">
             <a:avLst/>
@@ -8125,69 +10249,89 @@
               <a:buNone/>
             </a:pPr>
             <a:r>
-              <a:rPr lang="en-US" sz="1150" b="1" dirty="0">
-                <a:solidFill>
-                  <a:srgbClr val="26313B"/>
+              <a:rPr lang="en-US" sz="1350" b="1" dirty="0">
+                <a:solidFill>
+                  <a:srgbClr val="F4F1EC"/>
                 </a:solidFill>
                 <a:latin typeface="Trebuchet MS" pitchFamily="34" charset="0"/>
                 <a:ea typeface="Trebuchet MS" pitchFamily="34" charset="-122"/>
                 <a:cs typeface="Trebuchet MS" pitchFamily="34" charset="-120"/>
               </a:rPr>
-              <a:t>extractors</a:t>
-            </a:r>
-            <a:endParaRPr lang="en-US" sz="1150" dirty="0"/>
-          </a:p>
-        </p:txBody>
-      </p:sp>
-      <p:sp>
-        <p:nvSpPr>
-          <p:cNvPr id="10" name="Text 8"/>
-          <p:cNvSpPr/>
-          <p:nvPr/>
-        </p:nvSpPr>
-        <p:spPr>
-          <a:xfrm>
-            <a:off x="2199132" y="2029968"/>
-            <a:ext cx="1371600" cy="411480"/>
-          </a:xfrm>
-          <a:prstGeom prst="rect">
-            <a:avLst/>
-          </a:prstGeom>
-          <a:noFill/>
-          <a:ln/>
-        </p:spPr>
-        <p:txBody>
-          <a:bodyPr wrap="square" lIns="0" tIns="0" rIns="0" bIns="0" rtlCol="0" anchor="ctr"/>
-          <a:lstStyle/>
-          <a:p>
-            <a:pPr algn="ctr" indent="0" marL="0">
-              <a:buNone/>
-            </a:pPr>
-            <a:r>
-              <a:rPr lang="en-US" sz="950" dirty="0">
-                <a:solidFill>
-                  <a:srgbClr val="76838F"/>
+              <a:t>mirror check</a:t>
+            </a:r>
+            <a:endParaRPr lang="en-US" sz="1350" dirty="0"/>
+          </a:p>
+        </p:txBody>
+      </p:sp>
+      <p:sp>
+        <p:nvSpPr>
+          <p:cNvPr id="12" name="Text 10"/>
+          <p:cNvSpPr/>
+          <p:nvPr/>
+        </p:nvSpPr>
+        <p:spPr>
+          <a:xfrm>
+            <a:off x="2423160" y="3090672"/>
+            <a:ext cx="6217920" cy="713232"/>
+          </a:xfrm>
+          <a:prstGeom prst="rect">
+            <a:avLst/>
+          </a:prstGeom>
+          <a:noFill/>
+          <a:ln/>
+        </p:spPr>
+        <p:txBody>
+          <a:bodyPr wrap="square" lIns="0" tIns="0" rIns="0" bIns="0" rtlCol="0" anchor="ctr"/>
+          <a:lstStyle/>
+          <a:p>
+            <a:pPr indent="0" marL="0">
+              <a:buNone/>
+            </a:pPr>
+            <a:r>
+              <a:rPr lang="en-US" sz="1150" dirty="0">
+                <a:solidFill>
+                  <a:srgbClr val="26313B"/>
                 </a:solidFill>
                 <a:latin typeface="Calibri" pitchFamily="34" charset="0"/>
                 <a:ea typeface="Calibri" pitchFamily="34" charset="-122"/>
                 <a:cs typeface="Calibri" pitchFamily="34" charset="-120"/>
               </a:rPr>
-              <a:t>per language · protocol v1</a:t>
-            </a:r>
-            <a:endParaRPr lang="en-US" sz="950" dirty="0"/>
-          </a:p>
-        </p:txBody>
-      </p:sp>
-      <p:sp>
-        <p:nvSpPr>
-          <p:cNvPr id="11" name="Text 9"/>
-          <p:cNvSpPr/>
-          <p:nvPr/>
-        </p:nvSpPr>
-        <p:spPr>
-          <a:xfrm>
-            <a:off x="3607308" y="1828800"/>
-            <a:ext cx="260604" cy="365760"/>
+              <a:t>dto + schema on one interaction must agree byte-for-byte. Drift between code and schema file is unoverridable — exit 1, field-level report.</a:t>
+            </a:r>
+            <a:endParaRPr lang="en-US" sz="1150" dirty="0"/>
+          </a:p>
+        </p:txBody>
+      </p:sp>
+      <p:sp>
+        <p:nvSpPr>
+          <p:cNvPr id="13" name="Shape 11"/>
+          <p:cNvSpPr/>
+          <p:nvPr/>
+        </p:nvSpPr>
+        <p:spPr>
+          <a:xfrm>
+            <a:off x="457200" y="3995928"/>
+            <a:ext cx="1737360" cy="713232"/>
+          </a:xfrm>
+          <a:prstGeom prst="rect">
+            <a:avLst/>
+          </a:prstGeom>
+          <a:solidFill>
+            <a:srgbClr val="22303C"/>
+          </a:solidFill>
+          <a:ln/>
+        </p:spPr>
+      </p:sp>
+      <p:sp>
+        <p:nvSpPr>
+          <p:cNvPr id="14" name="Text 12"/>
+          <p:cNvSpPr/>
+          <p:nvPr/>
+        </p:nvSpPr>
+        <p:spPr>
+          <a:xfrm>
+            <a:off x="457200" y="3995928"/>
+            <a:ext cx="1737360" cy="713232"/>
           </a:xfrm>
           <a:prstGeom prst="rect">
             <a:avLst/>
@@ -8203,900 +10347,54 @@
               <a:buNone/>
             </a:pPr>
             <a:r>
-              <a:rPr lang="en-US" sz="1500" dirty="0">
-                <a:solidFill>
-                  <a:srgbClr val="C96F3B"/>
+              <a:rPr lang="en-US" sz="1350" b="1" dirty="0">
+                <a:solidFill>
+                  <a:srgbClr val="F4F1EC"/>
+                </a:solidFill>
+                <a:latin typeface="Trebuchet MS" pitchFamily="34" charset="0"/>
+                <a:ea typeface="Trebuchet MS" pitchFamily="34" charset="-122"/>
+                <a:cs typeface="Trebuchet MS" pitchFamily="34" charset="-120"/>
+              </a:rPr>
+              <a:t>never guess</a:t>
+            </a:r>
+            <a:endParaRPr lang="en-US" sz="1350" dirty="0"/>
+          </a:p>
+        </p:txBody>
+      </p:sp>
+      <p:sp>
+        <p:nvSpPr>
+          <p:cNvPr id="15" name="Text 13"/>
+          <p:cNvSpPr/>
+          <p:nvPr/>
+        </p:nvSpPr>
+        <p:spPr>
+          <a:xfrm>
+            <a:off x="2423160" y="3995928"/>
+            <a:ext cx="6217920" cy="713232"/>
+          </a:xfrm>
+          <a:prstGeom prst="rect">
+            <a:avLst/>
+          </a:prstGeom>
+          <a:noFill/>
+          <a:ln/>
+        </p:spPr>
+        <p:txBody>
+          <a:bodyPr wrap="square" lIns="0" tIns="0" rIns="0" bIns="0" rtlCol="0" anchor="ctr"/>
+          <a:lstStyle/>
+          <a:p>
+            <a:pPr indent="0" marL="0">
+              <a:buNone/>
+            </a:pPr>
+            <a:r>
+              <a:rPr lang="en-US" sz="1150" dirty="0">
+                <a:solidFill>
+                  <a:srgbClr val="26313B"/>
                 </a:solidFill>
                 <a:latin typeface="Calibri" pitchFamily="34" charset="0"/>
                 <a:ea typeface="Calibri" pitchFamily="34" charset="-122"/>
                 <a:cs typeface="Calibri" pitchFamily="34" charset="-120"/>
               </a:rPr>
-              <a:t>→</a:t>
-            </a:r>
-            <a:endParaRPr lang="en-US" sz="1500" dirty="0"/>
-          </a:p>
-        </p:txBody>
-      </p:sp>
-      <p:sp>
-        <p:nvSpPr>
-          <p:cNvPr id="12" name="Shape 10"/>
-          <p:cNvSpPr/>
-          <p:nvPr/>
-        </p:nvSpPr>
-        <p:spPr>
-          <a:xfrm>
-            <a:off x="3831336" y="1417320"/>
-            <a:ext cx="1481328" cy="1097280"/>
-          </a:xfrm>
-          <a:prstGeom prst="rect">
-            <a:avLst/>
-          </a:prstGeom>
-          <a:solidFill>
-            <a:srgbClr val="FFFFFF"/>
-          </a:solidFill>
-          <a:ln w="9525">
-            <a:solidFill>
-              <a:srgbClr val="E4DFD6"/>
-            </a:solidFill>
-            <a:prstDash val="solid"/>
-          </a:ln>
-          <a:effectLst>
-            <a:outerShdw sx="100000" sy="100000" kx="0" ky="0" algn="bl" rotWithShape="0" blurRad="63500" dist="25400" dir="8100000">
-              <a:srgbClr val="000000">
-                <a:alpha val="12000"/>
-              </a:srgbClr>
-            </a:outerShdw>
-          </a:effectLst>
-        </p:spPr>
-      </p:sp>
-      <p:sp>
-        <p:nvSpPr>
-          <p:cNvPr id="13" name="Text 11"/>
-          <p:cNvSpPr/>
-          <p:nvPr/>
-        </p:nvSpPr>
-        <p:spPr>
-          <a:xfrm>
-            <a:off x="3886200" y="1554480"/>
-            <a:ext cx="1371600" cy="502920"/>
-          </a:xfrm>
-          <a:prstGeom prst="rect">
-            <a:avLst/>
-          </a:prstGeom>
-          <a:noFill/>
-          <a:ln/>
-        </p:spPr>
-        <p:txBody>
-          <a:bodyPr wrap="square" lIns="0" tIns="0" rIns="0" bIns="0" rtlCol="0" anchor="ctr"/>
-          <a:lstStyle/>
-          <a:p>
-            <a:pPr algn="ctr" indent="0" marL="0">
-              <a:buNone/>
-            </a:pPr>
-            <a:r>
-              <a:rPr lang="en-US" sz="1150" b="1" dirty="0">
-                <a:solidFill>
-                  <a:srgbClr val="26313B"/>
-                </a:solidFill>
-                <a:latin typeface="Trebuchet MS" pitchFamily="34" charset="0"/>
-                <a:ea typeface="Trebuchet MS" pitchFamily="34" charset="-122"/>
-                <a:cs typeface="Trebuchet MS" pitchFamily="34" charset="-120"/>
-              </a:rPr>
-              <a:t>canonical IR</a:t>
-            </a:r>
-            <a:endParaRPr lang="en-US" sz="1150" dirty="0"/>
-          </a:p>
-        </p:txBody>
-      </p:sp>
-      <p:sp>
-        <p:nvSpPr>
-          <p:cNvPr id="14" name="Text 12"/>
-          <p:cNvSpPr/>
-          <p:nvPr/>
-        </p:nvSpPr>
-        <p:spPr>
-          <a:xfrm>
-            <a:off x="3886200" y="2029968"/>
-            <a:ext cx="1371600" cy="411480"/>
-          </a:xfrm>
-          <a:prstGeom prst="rect">
-            <a:avLst/>
-          </a:prstGeom>
-          <a:noFill/>
-          <a:ln/>
-        </p:spPr>
-        <p:txBody>
-          <a:bodyPr wrap="square" lIns="0" tIns="0" rIns="0" bIns="0" rtlCol="0" anchor="ctr"/>
-          <a:lstStyle/>
-          <a:p>
-            <a:pPr algn="ctr" indent="0" marL="0">
-              <a:buNone/>
-            </a:pPr>
-            <a:r>
-              <a:rPr lang="en-US" sz="950" dirty="0">
-                <a:solidFill>
-                  <a:srgbClr val="76838F"/>
-                </a:solidFill>
-                <a:latin typeface="Calibri" pitchFamily="34" charset="0"/>
-                <a:ea typeface="Calibri" pitchFamily="34" charset="-122"/>
-                <a:cs typeface="Calibri" pitchFamily="34" charset="-120"/>
-              </a:rPr>
-              <a:t>hashed · deterministic</a:t>
-            </a:r>
-            <a:endParaRPr lang="en-US" sz="950" dirty="0"/>
-          </a:p>
-        </p:txBody>
-      </p:sp>
-      <p:sp>
-        <p:nvSpPr>
-          <p:cNvPr id="15" name="Text 13"/>
-          <p:cNvSpPr/>
-          <p:nvPr/>
-        </p:nvSpPr>
-        <p:spPr>
-          <a:xfrm>
-            <a:off x="5294376" y="1828800"/>
-            <a:ext cx="260604" cy="365760"/>
-          </a:xfrm>
-          <a:prstGeom prst="rect">
-            <a:avLst/>
-          </a:prstGeom>
-          <a:noFill/>
-          <a:ln/>
-        </p:spPr>
-        <p:txBody>
-          <a:bodyPr wrap="square" lIns="0" tIns="0" rIns="0" bIns="0" rtlCol="0" anchor="ctr"/>
-          <a:lstStyle/>
-          <a:p>
-            <a:pPr algn="ctr" indent="0" marL="0">
-              <a:buNone/>
-            </a:pPr>
-            <a:r>
-              <a:rPr lang="en-US" sz="1500" dirty="0">
-                <a:solidFill>
-                  <a:srgbClr val="C96F3B"/>
-                </a:solidFill>
-                <a:latin typeface="Calibri" pitchFamily="34" charset="0"/>
-                <a:ea typeface="Calibri" pitchFamily="34" charset="-122"/>
-                <a:cs typeface="Calibri" pitchFamily="34" charset="-120"/>
-              </a:rPr>
-              <a:t>→</a:t>
-            </a:r>
-            <a:endParaRPr lang="en-US" sz="1500" dirty="0"/>
-          </a:p>
-        </p:txBody>
-      </p:sp>
-      <p:sp>
-        <p:nvSpPr>
-          <p:cNvPr id="16" name="Shape 14"/>
-          <p:cNvSpPr/>
-          <p:nvPr/>
-        </p:nvSpPr>
-        <p:spPr>
-          <a:xfrm>
-            <a:off x="5518404" y="1417320"/>
-            <a:ext cx="1481328" cy="1097280"/>
-          </a:xfrm>
-          <a:prstGeom prst="rect">
-            <a:avLst/>
-          </a:prstGeom>
-          <a:solidFill>
-            <a:srgbClr val="FFFFFF"/>
-          </a:solidFill>
-          <a:ln w="9525">
-            <a:solidFill>
-              <a:srgbClr val="E4DFD6"/>
-            </a:solidFill>
-            <a:prstDash val="solid"/>
-          </a:ln>
-          <a:effectLst>
-            <a:outerShdw sx="100000" sy="100000" kx="0" ky="0" algn="bl" rotWithShape="0" blurRad="63500" dist="25400" dir="8100000">
-              <a:srgbClr val="000000">
-                <a:alpha val="12000"/>
-              </a:srgbClr>
-            </a:outerShdw>
-          </a:effectLst>
-        </p:spPr>
-      </p:sp>
-      <p:sp>
-        <p:nvSpPr>
-          <p:cNvPr id="17" name="Text 15"/>
-          <p:cNvSpPr/>
-          <p:nvPr/>
-        </p:nvSpPr>
-        <p:spPr>
-          <a:xfrm>
-            <a:off x="5573268" y="1554480"/>
-            <a:ext cx="1371600" cy="502920"/>
-          </a:xfrm>
-          <a:prstGeom prst="rect">
-            <a:avLst/>
-          </a:prstGeom>
-          <a:noFill/>
-          <a:ln/>
-        </p:spPr>
-        <p:txBody>
-          <a:bodyPr wrap="square" lIns="0" tIns="0" rIns="0" bIns="0" rtlCol="0" anchor="ctr"/>
-          <a:lstStyle/>
-          <a:p>
-            <a:pPr algn="ctr" indent="0" marL="0">
-              <a:buNone/>
-            </a:pPr>
-            <a:r>
-              <a:rPr lang="en-US" sz="1150" b="1" dirty="0">
-                <a:solidFill>
-                  <a:srgbClr val="26313B"/>
-                </a:solidFill>
-                <a:latin typeface="Trebuchet MS" pitchFamily="34" charset="0"/>
-                <a:ea typeface="Trebuchet MS" pitchFamily="34" charset="-122"/>
-                <a:cs typeface="Trebuchet MS" pitchFamily="34" charset="-120"/>
-              </a:rPr>
-              <a:t>diff engine</a:t>
-            </a:r>
-            <a:endParaRPr lang="en-US" sz="1150" dirty="0"/>
-          </a:p>
-        </p:txBody>
-      </p:sp>
-      <p:sp>
-        <p:nvSpPr>
-          <p:cNvPr id="18" name="Text 16"/>
-          <p:cNvSpPr/>
-          <p:nvPr/>
-        </p:nvSpPr>
-        <p:spPr>
-          <a:xfrm>
-            <a:off x="5573268" y="2029968"/>
-            <a:ext cx="1371600" cy="411480"/>
-          </a:xfrm>
-          <a:prstGeom prst="rect">
-            <a:avLst/>
-          </a:prstGeom>
-          <a:noFill/>
-          <a:ln/>
-        </p:spPr>
-        <p:txBody>
-          <a:bodyPr wrap="square" lIns="0" tIns="0" rIns="0" bIns="0" rtlCol="0" anchor="ctr"/>
-          <a:lstStyle/>
-          <a:p>
-            <a:pPr algn="ctr" indent="0" marL="0">
-              <a:buNone/>
-            </a:pPr>
-            <a:r>
-              <a:rPr lang="en-US" sz="950" dirty="0">
-                <a:solidFill>
-                  <a:srgbClr val="76838F"/>
-                </a:solidFill>
-                <a:latin typeface="Calibri" pitchFamily="34" charset="0"/>
-                <a:ea typeface="Calibri" pitchFamily="34" charset="-122"/>
-                <a:cs typeface="Calibri" pitchFamily="34" charset="-120"/>
-              </a:rPr>
-              <a:t>direction-aware rules</a:t>
-            </a:r>
-            <a:endParaRPr lang="en-US" sz="950" dirty="0"/>
-          </a:p>
-        </p:txBody>
-      </p:sp>
-      <p:sp>
-        <p:nvSpPr>
-          <p:cNvPr id="19" name="Text 17"/>
-          <p:cNvSpPr/>
-          <p:nvPr/>
-        </p:nvSpPr>
-        <p:spPr>
-          <a:xfrm>
-            <a:off x="6981444" y="1828800"/>
-            <a:ext cx="260604" cy="365760"/>
-          </a:xfrm>
-          <a:prstGeom prst="rect">
-            <a:avLst/>
-          </a:prstGeom>
-          <a:noFill/>
-          <a:ln/>
-        </p:spPr>
-        <p:txBody>
-          <a:bodyPr wrap="square" lIns="0" tIns="0" rIns="0" bIns="0" rtlCol="0" anchor="ctr"/>
-          <a:lstStyle/>
-          <a:p>
-            <a:pPr algn="ctr" indent="0" marL="0">
-              <a:buNone/>
-            </a:pPr>
-            <a:r>
-              <a:rPr lang="en-US" sz="1500" dirty="0">
-                <a:solidFill>
-                  <a:srgbClr val="C96F3B"/>
-                </a:solidFill>
-                <a:latin typeface="Calibri" pitchFamily="34" charset="0"/>
-                <a:ea typeface="Calibri" pitchFamily="34" charset="-122"/>
-                <a:cs typeface="Calibri" pitchFamily="34" charset="-120"/>
-              </a:rPr>
-              <a:t>→</a:t>
-            </a:r>
-            <a:endParaRPr lang="en-US" sz="1500" dirty="0"/>
-          </a:p>
-        </p:txBody>
-      </p:sp>
-      <p:sp>
-        <p:nvSpPr>
-          <p:cNvPr id="20" name="Shape 18"/>
-          <p:cNvSpPr/>
-          <p:nvPr/>
-        </p:nvSpPr>
-        <p:spPr>
-          <a:xfrm>
-            <a:off x="7205472" y="1417320"/>
-            <a:ext cx="1481328" cy="1097280"/>
-          </a:xfrm>
-          <a:prstGeom prst="rect">
-            <a:avLst/>
-          </a:prstGeom>
-          <a:solidFill>
-            <a:srgbClr val="FFFFFF"/>
-          </a:solidFill>
-          <a:ln w="9525">
-            <a:solidFill>
-              <a:srgbClr val="E4DFD6"/>
-            </a:solidFill>
-            <a:prstDash val="solid"/>
-          </a:ln>
-          <a:effectLst>
-            <a:outerShdw sx="100000" sy="100000" kx="0" ky="0" algn="bl" rotWithShape="0" blurRad="63500" dist="25400" dir="8100000">
-              <a:srgbClr val="000000">
-                <a:alpha val="12000"/>
-              </a:srgbClr>
-            </a:outerShdw>
-          </a:effectLst>
-        </p:spPr>
-      </p:sp>
-      <p:sp>
-        <p:nvSpPr>
-          <p:cNvPr id="21" name="Text 19"/>
-          <p:cNvSpPr/>
-          <p:nvPr/>
-        </p:nvSpPr>
-        <p:spPr>
-          <a:xfrm>
-            <a:off x="7260336" y="1554480"/>
-            <a:ext cx="1371600" cy="502920"/>
-          </a:xfrm>
-          <a:prstGeom prst="rect">
-            <a:avLst/>
-          </a:prstGeom>
-          <a:noFill/>
-          <a:ln/>
-        </p:spPr>
-        <p:txBody>
-          <a:bodyPr wrap="square" lIns="0" tIns="0" rIns="0" bIns="0" rtlCol="0" anchor="ctr"/>
-          <a:lstStyle/>
-          <a:p>
-            <a:pPr algn="ctr" indent="0" marL="0">
-              <a:buNone/>
-            </a:pPr>
-            <a:r>
-              <a:rPr lang="en-US" sz="1150" b="1" dirty="0">
-                <a:solidFill>
-                  <a:srgbClr val="26313B"/>
-                </a:solidFill>
-                <a:latin typeface="Trebuchet MS" pitchFamily="34" charset="0"/>
-                <a:ea typeface="Trebuchet MS" pitchFamily="34" charset="-122"/>
-                <a:cs typeface="Trebuchet MS" pitchFamily="34" charset="-120"/>
-              </a:rPr>
-              <a:t>contracts repo</a:t>
-            </a:r>
-            <a:endParaRPr lang="en-US" sz="1150" dirty="0"/>
-          </a:p>
-        </p:txBody>
-      </p:sp>
-      <p:sp>
-        <p:nvSpPr>
-          <p:cNvPr id="22" name="Text 20"/>
-          <p:cNvSpPr/>
-          <p:nvPr/>
-        </p:nvSpPr>
-        <p:spPr>
-          <a:xfrm>
-            <a:off x="7260336" y="2029968"/>
-            <a:ext cx="1371600" cy="411480"/>
-          </a:xfrm>
-          <a:prstGeom prst="rect">
-            <a:avLst/>
-          </a:prstGeom>
-          <a:noFill/>
-          <a:ln/>
-        </p:spPr>
-        <p:txBody>
-          <a:bodyPr wrap="square" lIns="0" tIns="0" rIns="0" bIns="0" rtlCol="0" anchor="ctr"/>
-          <a:lstStyle/>
-          <a:p>
-            <a:pPr algn="ctr" indent="0" marL="0">
-              <a:buNone/>
-            </a:pPr>
-            <a:r>
-              <a:rPr lang="en-US" sz="950" dirty="0">
-                <a:solidFill>
-                  <a:srgbClr val="76838F"/>
-                </a:solidFill>
-                <a:latin typeface="Calibri" pitchFamily="34" charset="0"/>
-                <a:ea typeface="Calibri" pitchFamily="34" charset="-122"/>
-                <a:cs typeface="Calibri" pitchFamily="34" charset="-120"/>
-              </a:rPr>
-              <a:t>plain git — the broker</a:t>
-            </a:r>
-            <a:endParaRPr lang="en-US" sz="950" dirty="0"/>
-          </a:p>
-        </p:txBody>
-      </p:sp>
-      <p:sp>
-        <p:nvSpPr>
-          <p:cNvPr id="23" name="Text 21"/>
-          <p:cNvSpPr/>
-          <p:nvPr/>
-        </p:nvSpPr>
-        <p:spPr>
-          <a:xfrm>
-            <a:off x="457200" y="2788920"/>
-            <a:ext cx="8229600" cy="274320"/>
-          </a:xfrm>
-          <a:prstGeom prst="rect">
-            <a:avLst/>
-          </a:prstGeom>
-          <a:noFill/>
-          <a:ln/>
-        </p:spPr>
-        <p:txBody>
-          <a:bodyPr wrap="square" lIns="0" tIns="0" rIns="0" bIns="0" rtlCol="0" anchor="ctr"/>
-          <a:lstStyle/>
-          <a:p>
-            <a:pPr algn="ctr" indent="0" marL="0">
-              <a:buNone/>
-            </a:pPr>
-            <a:r>
-              <a:rPr lang="en-US" sz="1100" i="1" dirty="0">
-                <a:solidFill>
-                  <a:srgbClr val="76838F"/>
-                </a:solidFill>
-                <a:latin typeface="Calibri" pitchFamily="34" charset="0"/>
-                <a:ea typeface="Calibri" pitchFamily="34" charset="-122"/>
-                <a:cs typeface="Calibri" pitchFamily="34" charset="-120"/>
-              </a:rPr>
-              <a:t>the repo feeds three gates</a:t>
-            </a:r>
-            <a:endParaRPr lang="en-US" sz="1100" dirty="0"/>
-          </a:p>
-        </p:txBody>
-      </p:sp>
-      <p:sp>
-        <p:nvSpPr>
-          <p:cNvPr id="24" name="Shape 22"/>
-          <p:cNvSpPr/>
-          <p:nvPr/>
-        </p:nvSpPr>
-        <p:spPr>
-          <a:xfrm>
-            <a:off x="1783080" y="3108960"/>
-            <a:ext cx="0" cy="228600"/>
-          </a:xfrm>
-          <a:prstGeom prst="line">
-            <a:avLst/>
-          </a:prstGeom>
-          <a:noFill/>
-          <a:ln w="15875">
-            <a:solidFill>
-              <a:srgbClr val="C9C2B5"/>
-            </a:solidFill>
-            <a:prstDash val="solid"/>
-          </a:ln>
-        </p:spPr>
-      </p:sp>
-      <p:sp>
-        <p:nvSpPr>
-          <p:cNvPr id="25" name="Shape 23"/>
-          <p:cNvSpPr/>
-          <p:nvPr/>
-        </p:nvSpPr>
-        <p:spPr>
-          <a:xfrm>
-            <a:off x="457200" y="3337560"/>
-            <a:ext cx="2651760" cy="914400"/>
-          </a:xfrm>
-          <a:prstGeom prst="rect">
-            <a:avLst/>
-          </a:prstGeom>
-          <a:solidFill>
-            <a:srgbClr val="EAE4D9"/>
-          </a:solidFill>
-          <a:ln w="9525">
-            <a:solidFill>
-              <a:srgbClr val="E4DFD6"/>
-            </a:solidFill>
-            <a:prstDash val="solid"/>
-          </a:ln>
-          <a:effectLst>
-            <a:outerShdw sx="100000" sy="100000" kx="0" ky="0" algn="bl" rotWithShape="0" blurRad="63500" dist="25400" dir="8100000">
-              <a:srgbClr val="000000">
-                <a:alpha val="12000"/>
-              </a:srgbClr>
-            </a:outerShdw>
-          </a:effectLst>
-        </p:spPr>
-      </p:sp>
-      <p:sp>
-        <p:nvSpPr>
-          <p:cNvPr id="26" name="Text 24"/>
-          <p:cNvSpPr/>
-          <p:nvPr/>
-        </p:nvSpPr>
-        <p:spPr>
-          <a:xfrm>
-            <a:off x="594360" y="3456432"/>
-            <a:ext cx="2377440" cy="274320"/>
-          </a:xfrm>
-          <a:prstGeom prst="rect">
-            <a:avLst/>
-          </a:prstGeom>
-          <a:noFill/>
-          <a:ln/>
-        </p:spPr>
-        <p:txBody>
-          <a:bodyPr wrap="square" lIns="0" tIns="0" rIns="0" bIns="0" rtlCol="0" anchor="ctr"/>
-          <a:lstStyle/>
-          <a:p>
-            <a:pPr indent="0" marL="0">
-              <a:buNone/>
-            </a:pPr>
-            <a:r>
-              <a:rPr lang="en-US" sz="1250" b="1" dirty="0">
-                <a:solidFill>
-                  <a:srgbClr val="C96F3B"/>
-                </a:solidFill>
-                <a:latin typeface="Trebuchet MS" pitchFamily="34" charset="0"/>
-                <a:ea typeface="Trebuchet MS" pitchFamily="34" charset="-122"/>
-                <a:cs typeface="Trebuchet MS" pitchFamily="34" charset="-120"/>
-              </a:rPr>
-              <a:t>PR / MR comment</a:t>
-            </a:r>
-            <a:endParaRPr lang="en-US" sz="1250" dirty="0"/>
-          </a:p>
-        </p:txBody>
-      </p:sp>
-      <p:sp>
-        <p:nvSpPr>
-          <p:cNvPr id="27" name="Text 25"/>
-          <p:cNvSpPr/>
-          <p:nvPr/>
-        </p:nvSpPr>
-        <p:spPr>
-          <a:xfrm>
-            <a:off x="594360" y="3730752"/>
-            <a:ext cx="2423160" cy="457200"/>
-          </a:xfrm>
-          <a:prstGeom prst="rect">
-            <a:avLst/>
-          </a:prstGeom>
-          <a:noFill/>
-          <a:ln/>
-        </p:spPr>
-        <p:txBody>
-          <a:bodyPr wrap="square" lIns="0" tIns="0" rIns="0" bIns="0" rtlCol="0" anchor="ctr"/>
-          <a:lstStyle/>
-          <a:p>
-            <a:pPr indent="0" marL="0">
-              <a:buNone/>
-            </a:pPr>
-            <a:r>
-              <a:rPr lang="en-US" sz="1050" dirty="0">
-                <a:solidFill>
-                  <a:srgbClr val="26313B"/>
-                </a:solidFill>
-                <a:latin typeface="Calibri" pitchFamily="34" charset="0"/>
-                <a:ea typeface="Calibri" pitchFamily="34" charset="-122"/>
-                <a:cs typeface="Calibri" pitchFamily="34" charset="-120"/>
-              </a:rPr>
-              <a:t>check — blocks breaking merges</a:t>
-            </a:r>
-            <a:endParaRPr lang="en-US" sz="1050" dirty="0"/>
-          </a:p>
-        </p:txBody>
-      </p:sp>
-      <p:sp>
-        <p:nvSpPr>
-          <p:cNvPr id="28" name="Shape 26"/>
-          <p:cNvSpPr/>
-          <p:nvPr/>
-        </p:nvSpPr>
-        <p:spPr>
-          <a:xfrm>
-            <a:off x="4572000" y="3108960"/>
-            <a:ext cx="0" cy="228600"/>
-          </a:xfrm>
-          <a:prstGeom prst="line">
-            <a:avLst/>
-          </a:prstGeom>
-          <a:noFill/>
-          <a:ln w="15875">
-            <a:solidFill>
-              <a:srgbClr val="C9C2B5"/>
-            </a:solidFill>
-            <a:prstDash val="solid"/>
-          </a:ln>
-        </p:spPr>
-      </p:sp>
-      <p:sp>
-        <p:nvSpPr>
-          <p:cNvPr id="29" name="Shape 27"/>
-          <p:cNvSpPr/>
-          <p:nvPr/>
-        </p:nvSpPr>
-        <p:spPr>
-          <a:xfrm>
-            <a:off x="3246120" y="3337560"/>
-            <a:ext cx="2651760" cy="914400"/>
-          </a:xfrm>
-          <a:prstGeom prst="rect">
-            <a:avLst/>
-          </a:prstGeom>
-          <a:solidFill>
-            <a:srgbClr val="EAE4D9"/>
-          </a:solidFill>
-          <a:ln w="9525">
-            <a:solidFill>
-              <a:srgbClr val="E4DFD6"/>
-            </a:solidFill>
-            <a:prstDash val="solid"/>
-          </a:ln>
-          <a:effectLst>
-            <a:outerShdw sx="100000" sy="100000" kx="0" ky="0" algn="bl" rotWithShape="0" blurRad="63500" dist="25400" dir="8100000">
-              <a:srgbClr val="000000">
-                <a:alpha val="12000"/>
-              </a:srgbClr>
-            </a:outerShdw>
-          </a:effectLst>
-        </p:spPr>
-      </p:sp>
-      <p:sp>
-        <p:nvSpPr>
-          <p:cNvPr id="30" name="Text 28"/>
-          <p:cNvSpPr/>
-          <p:nvPr/>
-        </p:nvSpPr>
-        <p:spPr>
-          <a:xfrm>
-            <a:off x="3383280" y="3456432"/>
-            <a:ext cx="2377440" cy="274320"/>
-          </a:xfrm>
-          <a:prstGeom prst="rect">
-            <a:avLst/>
-          </a:prstGeom>
-          <a:noFill/>
-          <a:ln/>
-        </p:spPr>
-        <p:txBody>
-          <a:bodyPr wrap="square" lIns="0" tIns="0" rIns="0" bIns="0" rtlCol="0" anchor="ctr"/>
-          <a:lstStyle/>
-          <a:p>
-            <a:pPr indent="0" marL="0">
-              <a:buNone/>
-            </a:pPr>
-            <a:r>
-              <a:rPr lang="en-US" sz="1250" b="1" dirty="0">
-                <a:solidFill>
-                  <a:srgbClr val="C96F3B"/>
-                </a:solidFill>
-                <a:latin typeface="Trebuchet MS" pitchFamily="34" charset="0"/>
-                <a:ea typeface="Trebuchet MS" pitchFamily="34" charset="-122"/>
-                <a:cs typeface="Trebuchet MS" pitchFamily="34" charset="-120"/>
-              </a:rPr>
-              <a:t>deploy gate</a:t>
-            </a:r>
-            <a:endParaRPr lang="en-US" sz="1250" dirty="0"/>
-          </a:p>
-        </p:txBody>
-      </p:sp>
-      <p:sp>
-        <p:nvSpPr>
-          <p:cNvPr id="31" name="Text 29"/>
-          <p:cNvSpPr/>
-          <p:nvPr/>
-        </p:nvSpPr>
-        <p:spPr>
-          <a:xfrm>
-            <a:off x="3383280" y="3730752"/>
-            <a:ext cx="2423160" cy="457200"/>
-          </a:xfrm>
-          <a:prstGeom prst="rect">
-            <a:avLst/>
-          </a:prstGeom>
-          <a:noFill/>
-          <a:ln/>
-        </p:spPr>
-        <p:txBody>
-          <a:bodyPr wrap="square" lIns="0" tIns="0" rIns="0" bIns="0" rtlCol="0" anchor="ctr"/>
-          <a:lstStyle/>
-          <a:p>
-            <a:pPr indent="0" marL="0">
-              <a:buNone/>
-            </a:pPr>
-            <a:r>
-              <a:rPr lang="en-US" sz="1050" dirty="0">
-                <a:solidFill>
-                  <a:srgbClr val="26313B"/>
-                </a:solidFill>
-                <a:latin typeface="Calibri" pitchFamily="34" charset="0"/>
-                <a:ea typeface="Calibri" pitchFamily="34" charset="-122"/>
-                <a:cs typeface="Calibri" pitchFamily="34" charset="-120"/>
-              </a:rPr>
-              <a:t>can-i-deploy — blocks unsafe rollouts</a:t>
-            </a:r>
-            <a:endParaRPr lang="en-US" sz="1050" dirty="0"/>
-          </a:p>
-        </p:txBody>
-      </p:sp>
-      <p:sp>
-        <p:nvSpPr>
-          <p:cNvPr id="32" name="Shape 30"/>
-          <p:cNvSpPr/>
-          <p:nvPr/>
-        </p:nvSpPr>
-        <p:spPr>
-          <a:xfrm>
-            <a:off x="7360920" y="3108960"/>
-            <a:ext cx="0" cy="228600"/>
-          </a:xfrm>
-          <a:prstGeom prst="line">
-            <a:avLst/>
-          </a:prstGeom>
-          <a:noFill/>
-          <a:ln w="15875">
-            <a:solidFill>
-              <a:srgbClr val="C9C2B5"/>
-            </a:solidFill>
-            <a:prstDash val="solid"/>
-          </a:ln>
-        </p:spPr>
-      </p:sp>
-      <p:sp>
-        <p:nvSpPr>
-          <p:cNvPr id="33" name="Shape 31"/>
-          <p:cNvSpPr/>
-          <p:nvPr/>
-        </p:nvSpPr>
-        <p:spPr>
-          <a:xfrm>
-            <a:off x="6035040" y="3337560"/>
-            <a:ext cx="2651760" cy="914400"/>
-          </a:xfrm>
-          <a:prstGeom prst="rect">
-            <a:avLst/>
-          </a:prstGeom>
-          <a:solidFill>
-            <a:srgbClr val="EAE4D9"/>
-          </a:solidFill>
-          <a:ln w="9525">
-            <a:solidFill>
-              <a:srgbClr val="E4DFD6"/>
-            </a:solidFill>
-            <a:prstDash val="solid"/>
-          </a:ln>
-          <a:effectLst>
-            <a:outerShdw sx="100000" sy="100000" kx="0" ky="0" algn="bl" rotWithShape="0" blurRad="63500" dist="25400" dir="8100000">
-              <a:srgbClr val="000000">
-                <a:alpha val="12000"/>
-              </a:srgbClr>
-            </a:outerShdw>
-          </a:effectLst>
-        </p:spPr>
-      </p:sp>
-      <p:sp>
-        <p:nvSpPr>
-          <p:cNvPr id="34" name="Text 32"/>
-          <p:cNvSpPr/>
-          <p:nvPr/>
-        </p:nvSpPr>
-        <p:spPr>
-          <a:xfrm>
-            <a:off x="6172200" y="3456432"/>
-            <a:ext cx="2377440" cy="274320"/>
-          </a:xfrm>
-          <a:prstGeom prst="rect">
-            <a:avLst/>
-          </a:prstGeom>
-          <a:noFill/>
-          <a:ln/>
-        </p:spPr>
-        <p:txBody>
-          <a:bodyPr wrap="square" lIns="0" tIns="0" rIns="0" bIns="0" rtlCol="0" anchor="ctr"/>
-          <a:lstStyle/>
-          <a:p>
-            <a:pPr indent="0" marL="0">
-              <a:buNone/>
-            </a:pPr>
-            <a:r>
-              <a:rPr lang="en-US" sz="1250" b="1" dirty="0">
-                <a:solidFill>
-                  <a:srgbClr val="C96F3B"/>
-                </a:solidFill>
-                <a:latin typeface="Trebuchet MS" pitchFamily="34" charset="0"/>
-                <a:ea typeface="Trebuchet MS" pitchFamily="34" charset="-122"/>
-                <a:cs typeface="Trebuchet MS" pitchFamily="34" charset="-120"/>
-              </a:rPr>
-              <a:t>matrix</a:t>
-            </a:r>
-            <a:endParaRPr lang="en-US" sz="1250" dirty="0"/>
-          </a:p>
-        </p:txBody>
-      </p:sp>
-      <p:sp>
-        <p:nvSpPr>
-          <p:cNvPr id="35" name="Text 33"/>
-          <p:cNvSpPr/>
-          <p:nvPr/>
-        </p:nvSpPr>
-        <p:spPr>
-          <a:xfrm>
-            <a:off x="6172200" y="3730752"/>
-            <a:ext cx="2423160" cy="457200"/>
-          </a:xfrm>
-          <a:prstGeom prst="rect">
-            <a:avLst/>
-          </a:prstGeom>
-          <a:noFill/>
-          <a:ln/>
-        </p:spPr>
-        <p:txBody>
-          <a:bodyPr wrap="square" lIns="0" tIns="0" rIns="0" bIns="0" rtlCol="0" anchor="ctr"/>
-          <a:lstStyle/>
-          <a:p>
-            <a:pPr indent="0" marL="0">
-              <a:buNone/>
-            </a:pPr>
-            <a:r>
-              <a:rPr lang="en-US" sz="1050" dirty="0">
-                <a:solidFill>
-                  <a:srgbClr val="26313B"/>
-                </a:solidFill>
-                <a:latin typeface="Calibri" pitchFamily="34" charset="0"/>
-                <a:ea typeface="Calibri" pitchFamily="34" charset="-122"/>
-                <a:cs typeface="Calibri" pitchFamily="34" charset="-120"/>
-              </a:rPr>
-              <a:t>org-wide deployed compatibility</a:t>
-            </a:r>
-            <a:endParaRPr lang="en-US" sz="1050" dirty="0"/>
-          </a:p>
-        </p:txBody>
-      </p:sp>
-      <p:sp>
-        <p:nvSpPr>
-          <p:cNvPr id="36" name="Text 34"/>
-          <p:cNvSpPr/>
-          <p:nvPr/>
-        </p:nvSpPr>
-        <p:spPr>
-          <a:xfrm>
-            <a:off x="457200" y="4526280"/>
-            <a:ext cx="8229600" cy="274320"/>
-          </a:xfrm>
-          <a:prstGeom prst="rect">
-            <a:avLst/>
-          </a:prstGeom>
-          <a:noFill/>
-          <a:ln/>
-        </p:spPr>
-        <p:txBody>
-          <a:bodyPr wrap="square" lIns="0" tIns="0" rIns="0" bIns="0" rtlCol="0" anchor="ctr"/>
-          <a:lstStyle/>
-          <a:p>
-            <a:pPr algn="ctr" indent="0" marL="0">
-              <a:buNone/>
-            </a:pPr>
-            <a:r>
-              <a:rPr lang="en-US" sz="1150" i="1" dirty="0">
-                <a:solidFill>
-                  <a:srgbClr val="76838F"/>
-                </a:solidFill>
-                <a:latin typeface="Calibri" pitchFamily="34" charset="0"/>
-                <a:ea typeface="Calibri" pitchFamily="34" charset="-122"/>
-                <a:cs typeface="Calibri" pitchFamily="34" charset="-120"/>
-              </a:rPr>
-              <a:t>Deterministic by contract: identical inputs produce byte-identical IR — on every machine, in every language.</a:t>
+              <a:t>any, tuples, uint64, open inheritance, non-null Avro unions… are loud, named errors — not silently wrong schemas.</a:t>
             </a:r>
             <a:endParaRPr lang="en-US" sz="1150" dirty="0"/>
           </a:p>
